--- a/presentation/Presentasi_Ilmuwan_Data_Syamsuddin_Wisnubroto.pptx
+++ b/presentation/Presentasi_Ilmuwan_Data_Syamsuddin_Wisnubroto.pptx
@@ -3767,7 +3767,7 @@
                 </a:solidFill>
                 <a:latin typeface="Calibri"/>
               </a:rPr>
-              <a:t>0,594</a:t>
+              <a:t>0,595</a:t>
             </a:r>
             <a:r>
               <a:rPr sz="1600" b="0">
@@ -3835,7 +3835,7 @@
                 </a:solidFill>
                 <a:latin typeface="Calibri"/>
               </a:rPr>
-              <a:t>aturan sederhana "ikuti S&amp;P 500" sedikit lebih tinggi pada data latih.</a:t>
+              <a:t>aturan sederhana "ikuti S&amp;P 500" setara dengan model terbaik pada data latih.</a:t>
             </a:r>
           </a:p>
         </p:txBody>
@@ -4295,7 +4295,7 @@
                           </a:solidFill>
                           <a:latin typeface="Calibri"/>
                         </a:rPr>
-                        <a:t>0,564</a:t>
+                        <a:t>0,543</a:t>
                       </a:r>
                     </a:p>
                   </a:txBody>
@@ -4317,7 +4317,7 @@
                           </a:solidFill>
                           <a:latin typeface="Calibri"/>
                         </a:rPr>
-                        <a:t>0,555</a:t>
+                        <a:t>0,535</a:t>
                       </a:r>
                     </a:p>
                   </a:txBody>
@@ -4339,7 +4339,7 @@
                           </a:solidFill>
                           <a:latin typeface="Calibri"/>
                         </a:rPr>
-                        <a:t>0,581</a:t>
+                        <a:t>0,577</a:t>
                       </a:r>
                     </a:p>
                   </a:txBody>
@@ -4385,7 +4385,7 @@
                           </a:solidFill>
                           <a:latin typeface="Calibri"/>
                         </a:rPr>
-                        <a:t>0,551</a:t>
+                        <a:t>0,546</a:t>
                       </a:r>
                     </a:p>
                   </a:txBody>
@@ -4407,7 +4407,7 @@
                           </a:solidFill>
                           <a:latin typeface="Calibri"/>
                         </a:rPr>
-                        <a:t>0,548</a:t>
+                        <a:t>0,543</a:t>
                       </a:r>
                     </a:p>
                   </a:txBody>
@@ -4429,7 +4429,7 @@
                           </a:solidFill>
                           <a:latin typeface="Calibri"/>
                         </a:rPr>
-                        <a:t>0,576</a:t>
+                        <a:t>0,575</a:t>
                       </a:r>
                     </a:p>
                   </a:txBody>
@@ -4475,7 +4475,7 @@
                           </a:solidFill>
                           <a:latin typeface="Calibri"/>
                         </a:rPr>
-                        <a:t>0,528</a:t>
+                        <a:t>0,522</a:t>
                       </a:r>
                     </a:p>
                   </a:txBody>
@@ -4497,7 +4497,7 @@
                           </a:solidFill>
                           <a:latin typeface="Calibri"/>
                         </a:rPr>
-                        <a:t>0,346</a:t>
+                        <a:t>0,343</a:t>
                       </a:r>
                     </a:p>
                   </a:txBody>
@@ -4660,7 +4660,7 @@
                           </a:solidFill>
                           <a:latin typeface="Calibri"/>
                         </a:rPr>
-                        <a:t>0,564</a:t>
+                        <a:t>0,543</a:t>
                       </a:r>
                     </a:p>
                   </a:txBody>
@@ -4678,11 +4678,11 @@
                       <a:r>
                         <a:rPr sz="1400" b="0">
                           <a:solidFill>
-                            <a:srgbClr val="1A9850"/>
-                          </a:solidFill>
-                          <a:latin typeface="Calibri"/>
-                        </a:rPr>
-                        <a:t>Ya</a:t>
+                            <a:srgbClr val="D73027"/>
+                          </a:solidFill>
+                          <a:latin typeface="Calibri"/>
+                        </a:rPr>
+                        <a:t>Tidak</a:t>
                       </a:r>
                     </a:p>
                   </a:txBody>
@@ -4728,7 +4728,7 @@
                           </a:solidFill>
                           <a:latin typeface="Calibri"/>
                         </a:rPr>
-                        <a:t>0,555</a:t>
+                        <a:t>0,535</a:t>
                       </a:r>
                     </a:p>
                   </a:txBody>
@@ -4746,11 +4746,11 @@
                       <a:r>
                         <a:rPr sz="1400" b="0">
                           <a:solidFill>
-                            <a:srgbClr val="1A9850"/>
-                          </a:solidFill>
-                          <a:latin typeface="Calibri"/>
-                        </a:rPr>
-                        <a:t>Ya</a:t>
+                            <a:srgbClr val="D73027"/>
+                          </a:solidFill>
+                          <a:latin typeface="Calibri"/>
+                        </a:rPr>
+                        <a:t>Tidak</a:t>
                       </a:r>
                     </a:p>
                   </a:txBody>
@@ -4796,7 +4796,7 @@
                           </a:solidFill>
                           <a:latin typeface="Calibri"/>
                         </a:rPr>
-                        <a:t>0,581</a:t>
+                        <a:t>0,577</a:t>
                       </a:r>
                     </a:p>
                   </a:txBody>
@@ -4814,11 +4814,11 @@
                       <a:r>
                         <a:rPr sz="1400" b="0">
                           <a:solidFill>
-                            <a:srgbClr val="1A9850"/>
-                          </a:solidFill>
-                          <a:latin typeface="Calibri"/>
-                        </a:rPr>
-                        <a:t>Ya</a:t>
+                            <a:srgbClr val="D73027"/>
+                          </a:solidFill>
+                          <a:latin typeface="Calibri"/>
+                        </a:rPr>
+                        <a:t>Tidak</a:t>
                       </a:r>
                     </a:p>
                   </a:txBody>
@@ -4864,7 +4864,7 @@
                           </a:solidFill>
                           <a:latin typeface="Calibri"/>
                         </a:rPr>
-                        <a:t>+0,035</a:t>
+                        <a:t>+0,021</a:t>
                       </a:r>
                     </a:p>
                   </a:txBody>
@@ -4934,7 +4934,7 @@
         <p:spPr>
           <a:xfrm>
             <a:off x="7086600" y="3749039"/>
-            <a:ext cx="4709160" cy="2103120"/>
+            <a:ext cx="4709160" cy="2331720"/>
           </a:xfrm>
           <a:prstGeom prst="rect">
             <a:avLst/>
@@ -4978,7 +4978,7 @@
         <p:spPr>
           <a:xfrm>
             <a:off x="7086600" y="3749039"/>
-            <a:ext cx="64008" cy="2103120"/>
+            <a:ext cx="64008" cy="2331720"/>
           </a:xfrm>
           <a:prstGeom prst="rect">
             <a:avLst/>
@@ -5022,7 +5022,7 @@
         <p:spPr>
           <a:xfrm>
             <a:off x="7315200" y="3858768"/>
-            <a:ext cx="4343400" cy="1920239"/>
+            <a:ext cx="4343400" cy="2148839"/>
           </a:xfrm>
           <a:prstGeom prst="rect">
             <a:avLst/>
@@ -5041,7 +5041,7 @@
               </a:spcAft>
             </a:pPr>
             <a:r>
-              <a:rPr sz="1700" b="1">
+              <a:rPr sz="1600" b="1">
                 <a:solidFill>
                   <a:srgbClr val="1F3A5F"/>
                 </a:solidFill>
@@ -5057,13 +5057,13 @@
               </a:spcAft>
             </a:pPr>
             <a:r>
-              <a:rPr sz="1600" b="0">
+              <a:rPr sz="1500" b="0">
                 <a:solidFill>
                   <a:srgbClr val="222B38"/>
                 </a:solidFill>
                 <a:latin typeface="Calibri"/>
               </a:rPr>
-              <a:t>•  Benar 56,4% dari 795 hari uji</a:t>
+              <a:t>•  Benar 54,3% dari 812 hari uji</a:t>
             </a:r>
           </a:p>
           <a:p>
@@ -5073,13 +5073,13 @@
               </a:spcAft>
             </a:pPr>
             <a:r>
-              <a:rPr sz="1600" b="0">
+              <a:rPr sz="1500" b="0">
                 <a:solidFill>
                   <a:srgbClr val="222B38"/>
                 </a:solidFill>
                 <a:latin typeface="Calibri"/>
               </a:rPr>
-              <a:t>•  Semua target tercapai, tetapi tipis</a:t>
+              <a:t>•  Hanya 1 dari 4 target tercapai</a:t>
             </a:r>
           </a:p>
           <a:p>
@@ -5089,13 +5089,29 @@
               </a:spcAft>
             </a:pPr>
             <a:r>
-              <a:rPr sz="1600" b="0">
+              <a:rPr sz="1500" b="0">
                 <a:solidFill>
                   <a:srgbClr val="222B38"/>
                 </a:solidFill>
                 <a:latin typeface="Calibri"/>
               </a:rPr>
-              <a:t>•  Faktor terpenting: S&amp;P 500 semalam</a:t>
+              <a:t>•  Setara dengan aturan "ikuti S&amp;P 500"</a:t>
+            </a:r>
+          </a:p>
+          <a:p>
+            <a:pPr algn="l">
+              <a:spcAft>
+                <a:spcPts val="800"/>
+              </a:spcAft>
+            </a:pPr>
+            <a:r>
+              <a:rPr sz="1500" b="0">
+                <a:solidFill>
+                  <a:srgbClr val="222B38"/>
+                </a:solidFill>
+                <a:latin typeface="Calibri"/>
+              </a:rPr>
+              <a:t>•  Periode uji penuh gejolak (IHSG −41,5% di 2026)</a:t>
             </a:r>
           </a:p>
         </p:txBody>
@@ -5544,7 +5560,7 @@
                 </a:solidFill>
                 <a:latin typeface="Calibri"/>
               </a:rPr>
-              <a:t>•  Data nyata 16 tahun</a:t>
+              <a:t>•  Data nyata 2010 – Sep 2026</a:t>
             </a:r>
           </a:p>
           <a:p>
@@ -5735,7 +5751,7 @@
                 </a:solidFill>
                 <a:latin typeface="Calibri"/>
               </a:rPr>
-              <a:t>•  Arah pasar harian sulit ditebak</a:t>
+              <a:t>•  Target accuracy, F1, ROC-AUC belum tercapai</a:t>
             </a:r>
           </a:p>
           <a:p>
@@ -5751,7 +5767,7 @@
                 </a:solidFill>
                 <a:latin typeface="Calibri"/>
               </a:rPr>
-              <a:t>•  Kekuatan model terutama dari S&amp;P 500</a:t>
+              <a:t>•  Belum lebih baik dari aturan "ikuti S&amp;P 500"</a:t>
             </a:r>
           </a:p>
           <a:p>
@@ -5767,7 +5783,7 @@
                 </a:solidFill>
                 <a:latin typeface="Calibri"/>
               </a:rPr>
-              <a:t>•  Belum memperhitungkan biaya transaksi</a:t>
+              <a:t>•  Pola lama kurang berlaku saat pasar bergejolak</a:t>
             </a:r>
           </a:p>
         </p:txBody>
@@ -5910,7 +5926,7 @@
                 </a:solidFill>
                 <a:latin typeface="Calibri"/>
               </a:rPr>
-              <a:t>•  Lanjut ke uji coba paralel</a:t>
+              <a:t>•  Belum lanjut ke penggunaan</a:t>
             </a:r>
           </a:p>
           <a:p>
@@ -5926,7 +5942,7 @@
                 </a:solidFill>
                 <a:latin typeface="Calibri"/>
               </a:rPr>
-              <a:t>•  Prediksi dicatat tiap pagi</a:t>
+              <a:t>•  Perbaiki model dulu</a:t>
             </a:r>
           </a:p>
           <a:p>
@@ -5942,7 +5958,7 @@
                 </a:solidFill>
                 <a:latin typeface="Calibri"/>
               </a:rPr>
-              <a:t>•  Belum dipakai untuk keputusan investasi</a:t>
+              <a:t>•  Hasil dilaporkan apa adanya</a:t>
             </a:r>
           </a:p>
         </p:txBody>
@@ -6133,7 +6149,7 @@
                 </a:solidFill>
                 <a:latin typeface="Calibri"/>
               </a:rPr>
-              <a:t>•  Evaluasi ulang dengan data setelah Mei 2026</a:t>
+              <a:t>•  Evaluasi ulang dengan data setelah Sep 2026</a:t>
             </a:r>
           </a:p>
         </p:txBody>
@@ -7277,7 +7293,7 @@
         </p:nvGraphicFramePr>
         <p:xfrm>
           <a:off x="7635240" y="1234440"/>
-          <a:ext cx="4160520" cy="2688336"/>
+          <a:ext cx="4160520" cy="2304288"/>
         </p:xfrm>
         <a:graphic>
           <a:graphicData uri="http://schemas.openxmlformats.org/drawingml/2006/table">
@@ -7565,52 +7581,6 @@
                   </a:tcPr>
                 </a:tc>
               </a:tr>
-              <a:tr h="384048">
-                <a:tc>
-                  <a:txBody>
-                    <a:bodyPr/>
-                    <a:lstStyle/>
-                    <a:p>
-                      <a:r>
-                        <a:rPr sz="1300" b="0">
-                          <a:solidFill>
-                            <a:srgbClr val="222B38"/>
-                          </a:solidFill>
-                          <a:latin typeface="Calibri"/>
-                        </a:rPr>
-                        <a:t>CPI, BI_rate, US_rate</a:t>
-                      </a:r>
-                    </a:p>
-                  </a:txBody>
-                  <a:tcPr anchor="ctr" marL="73152" marR="73152">
-                    <a:solidFill>
-                      <a:srgbClr val="F3F5F9"/>
-                    </a:solidFill>
-                  </a:tcPr>
-                </a:tc>
-                <a:tc>
-                  <a:txBody>
-                    <a:bodyPr/>
-                    <a:lstStyle/>
-                    <a:p>
-                      <a:r>
-                        <a:rPr sz="1300" b="0">
-                          <a:solidFill>
-                            <a:srgbClr val="222B38"/>
-                          </a:solidFill>
-                          <a:latin typeface="Calibri"/>
-                        </a:rPr>
-                        <a:t>Inflasi &amp; suku bunga</a:t>
-                      </a:r>
-                    </a:p>
-                  </a:txBody>
-                  <a:tcPr anchor="ctr" marL="73152" marR="73152">
-                    <a:solidFill>
-                      <a:srgbClr val="F3F5F9"/>
-                    </a:solidFill>
-                  </a:tcPr>
-                </a:tc>
-              </a:tr>
             </a:tbl>
           </a:graphicData>
         </a:graphic>
@@ -7753,7 +7723,7 @@
                 </a:solidFill>
                 <a:latin typeface="Calibri"/>
               </a:rPr>
-              <a:t>Data nyata harian 1 Jan 2010 – 29 Mei 2026: 4.277 baris hari kerja, 9 variabel. IHSG naik pada 54% hari bursa.</a:t>
+              <a:t>Data nyata harian 1 Jan 2010 – 30 Sep 2026 dari Yahoo Finance: 4.365 baris hari kerja, 6 variabel. IHSG naik pada 54% hari bursa.</a:t>
             </a:r>
           </a:p>
         </p:txBody>
@@ -8333,7 +8303,7 @@
                           </a:solidFill>
                           <a:latin typeface="Calibri"/>
                         </a:rPr>
-                        <a:t>Menemukan 5 jenis masalah data</a:t>
+                        <a:t>Menemukan 4 jenis masalah data</a:t>
                       </a:r>
                     </a:p>
                   </a:txBody>
@@ -8469,7 +8439,7 @@
                           </a:solidFill>
                           <a:latin typeface="Calibri"/>
                         </a:rPr>
-                        <a:t>5 langkah perbaikan</a:t>
+                        <a:t>4 langkah perbaikan</a:t>
                       </a:r>
                     </a:p>
                   </a:txBody>
@@ -10545,7 +10515,7 @@
         </p:nvGraphicFramePr>
         <p:xfrm>
           <a:off x="411480" y="3977639"/>
-          <a:ext cx="11384280" cy="2194560"/>
+          <a:ext cx="11384280" cy="1920240"/>
         </p:xfrm>
         <a:graphic>
           <a:graphicData uri="http://schemas.openxmlformats.org/drawingml/2006/table">
@@ -10558,7 +10528,7 @@
                 <a:gridCol w="1828800"/>
                 <a:gridCol w="4069080"/>
               </a:tblGrid>
-              <a:tr h="365760">
+              <a:tr h="384048">
                 <a:tc>
                   <a:txBody>
                     <a:bodyPr/>
@@ -10626,7 +10596,7 @@
                   </a:tcPr>
                 </a:tc>
               </a:tr>
-              <a:tr h="365760">
+              <a:tr h="384048">
                 <a:tc>
                   <a:txBody>
                     <a:bodyPr/>
@@ -10694,7 +10664,7 @@
                   </a:tcPr>
                 </a:tc>
               </a:tr>
-              <a:tr h="365760">
+              <a:tr h="384048">
                 <a:tc>
                   <a:txBody>
                     <a:bodyPr/>
@@ -10762,7 +10732,7 @@
                   </a:tcPr>
                 </a:tc>
               </a:tr>
-              <a:tr h="365760">
+              <a:tr h="384048">
                 <a:tc>
                   <a:txBody>
                     <a:bodyPr/>
@@ -10830,7 +10800,7 @@
                   </a:tcPr>
                 </a:tc>
               </a:tr>
-              <a:tr h="365760">
+              <a:tr h="384048">
                 <a:tc>
                   <a:txBody>
                     <a:bodyPr/>
@@ -10865,7 +10835,7 @@
                           </a:solidFill>
                           <a:latin typeface="Calibri"/>
                         </a:rPr>
-                        <a:t>300 baris</a:t>
+                        <a:t>304 baris</a:t>
                       </a:r>
                     </a:p>
                   </a:txBody>
@@ -10894,74 +10864,6 @@
                   <a:tcPr anchor="ctr" marL="73152" marR="73152">
                     <a:solidFill>
                       <a:srgbClr val="F3F5F9"/>
-                    </a:solidFill>
-                  </a:tcPr>
-                </a:tc>
-              </a:tr>
-              <a:tr h="365760">
-                <a:tc>
-                  <a:txBody>
-                    <a:bodyPr/>
-                    <a:lstStyle/>
-                    <a:p>
-                      <a:r>
-                        <a:rPr sz="1300" b="0">
-                          <a:solidFill>
-                            <a:srgbClr val="222B38"/>
-                          </a:solidFill>
-                          <a:latin typeface="Calibri"/>
-                        </a:rPr>
-                        <a:t>CPI, BI_rate, US_rate jarang berubah</a:t>
-                      </a:r>
-                    </a:p>
-                  </a:txBody>
-                  <a:tcPr anchor="ctr" marL="73152" marR="73152">
-                    <a:solidFill>
-                      <a:srgbClr val="FFFFFF"/>
-                    </a:solidFill>
-                  </a:tcPr>
-                </a:tc>
-                <a:tc>
-                  <a:txBody>
-                    <a:bodyPr/>
-                    <a:lstStyle/>
-                    <a:p>
-                      <a:r>
-                        <a:rPr sz="1300" b="0">
-                          <a:solidFill>
-                            <a:srgbClr val="222B38"/>
-                          </a:solidFill>
-                          <a:latin typeface="Calibri"/>
-                        </a:rPr>
-                        <a:t>3 kolom</a:t>
-                      </a:r>
-                    </a:p>
-                  </a:txBody>
-                  <a:tcPr anchor="ctr" marL="73152" marR="73152">
-                    <a:solidFill>
-                      <a:srgbClr val="FFFFFF"/>
-                    </a:solidFill>
-                  </a:tcPr>
-                </a:tc>
-                <a:tc>
-                  <a:txBody>
-                    <a:bodyPr/>
-                    <a:lstStyle/>
-                    <a:p>
-                      <a:r>
-                        <a:rPr sz="1300" b="0">
-                          <a:solidFill>
-                            <a:srgbClr val="222B38"/>
-                          </a:solidFill>
-                          <a:latin typeface="Calibri"/>
-                        </a:rPr>
-                        <a:t>Tidak dipakai</a:t>
-                      </a:r>
-                    </a:p>
-                  </a:txBody>
-                  <a:tcPr anchor="ctr" marL="73152" marR="73152">
-                    <a:solidFill>
-                      <a:srgbClr val="FFFFFF"/>
                     </a:solidFill>
                   </a:tcPr>
                 </a:tc>
@@ -11286,7 +11188,7 @@
         </p:nvGraphicFramePr>
         <p:xfrm>
           <a:off x="411480" y="1234440"/>
-          <a:ext cx="5577840" cy="2286000"/>
+          <a:ext cx="5577840" cy="1828800"/>
         </p:xfrm>
         <a:graphic>
           <a:graphicData uri="http://schemas.openxmlformats.org/drawingml/2006/table">
@@ -11449,7 +11351,7 @@
                           </a:solidFill>
                           <a:latin typeface="Calibri"/>
                         </a:rPr>
-                        <a:t>CPI</a:t>
+                        <a:t>CPI, BI_rate, US_rate</a:t>
                       </a:r>
                     </a:p>
                   </a:txBody>
@@ -11471,59 +11373,13 @@
                           </a:solidFill>
                           <a:latin typeface="Calibri"/>
                         </a:rPr>
-                        <a:t>Tidak — setahun sekali</a:t>
+                        <a:t>Tidak — jarang berubah</a:t>
                       </a:r>
                     </a:p>
                   </a:txBody>
                   <a:tcPr anchor="ctr" marL="73152" marR="73152">
                     <a:solidFill>
                       <a:srgbClr val="FFFFFF"/>
-                    </a:solidFill>
-                  </a:tcPr>
-                </a:tc>
-              </a:tr>
-              <a:tr h="457200">
-                <a:tc>
-                  <a:txBody>
-                    <a:bodyPr/>
-                    <a:lstStyle/>
-                    <a:p>
-                      <a:r>
-                        <a:rPr sz="1400" b="0">
-                          <a:solidFill>
-                            <a:srgbClr val="222B38"/>
-                          </a:solidFill>
-                          <a:latin typeface="Calibri"/>
-                        </a:rPr>
-                        <a:t>BI_rate, US_rate</a:t>
-                      </a:r>
-                    </a:p>
-                  </a:txBody>
-                  <a:tcPr anchor="ctr" marL="73152" marR="73152">
-                    <a:solidFill>
-                      <a:srgbClr val="F3F5F9"/>
-                    </a:solidFill>
-                  </a:tcPr>
-                </a:tc>
-                <a:tc>
-                  <a:txBody>
-                    <a:bodyPr/>
-                    <a:lstStyle/>
-                    <a:p>
-                      <a:r>
-                        <a:rPr sz="1400" b="0">
-                          <a:solidFill>
-                            <a:srgbClr val="D73027"/>
-                          </a:solidFill>
-                          <a:latin typeface="Calibri"/>
-                        </a:rPr>
-                        <a:t>Tidak — jarang berubah</a:t>
-                      </a:r>
-                    </a:p>
-                  </a:txBody>
-                  <a:tcPr anchor="ctr" marL="73152" marR="73152">
-                    <a:solidFill>
-                      <a:srgbClr val="F3F5F9"/>
                     </a:solidFill>
                   </a:tcPr>
                 </a:tc>
@@ -11615,7 +11471,7 @@
         </p:nvGraphicFramePr>
         <p:xfrm>
           <a:off x="6263640" y="1234440"/>
-          <a:ext cx="5532120" cy="2743200"/>
+          <a:ext cx="5532120" cy="2286000"/>
         </p:xfrm>
         <a:graphic>
           <a:graphicData uri="http://schemas.openxmlformats.org/drawingml/2006/table">
@@ -11708,7 +11564,7 @@
                           </a:solidFill>
                           <a:latin typeface="Calibri"/>
                         </a:rPr>
-                        <a:t>4.277 → 4.276</a:t>
+                        <a:t>4.365 → 4.364</a:t>
                       </a:r>
                     </a:p>
                   </a:txBody>
@@ -11732,7 +11588,7 @@
                           </a:solidFill>
                           <a:latin typeface="Calibri"/>
                         </a:rPr>
-                        <a:t>2. Buang 3 kolom makro</a:t>
+                        <a:t>2. Perbaiki kurs janggal</a:t>
                       </a:r>
                     </a:p>
                   </a:txBody>
@@ -11754,7 +11610,7 @@
                           </a:solidFill>
                           <a:latin typeface="Calibri"/>
                         </a:rPr>
-                        <a:t>6 variabel tersisa</a:t>
+                        <a:t>15 nilai</a:t>
                       </a:r>
                     </a:p>
                   </a:txBody>
@@ -11778,7 +11634,7 @@
                           </a:solidFill>
                           <a:latin typeface="Calibri"/>
                         </a:rPr>
-                        <a:t>3. Perbaiki kurs janggal</a:t>
+                        <a:t>3. Perbaiki minyak negatif</a:t>
                       </a:r>
                     </a:p>
                   </a:txBody>
@@ -11800,7 +11656,7 @@
                           </a:solidFill>
                           <a:latin typeface="Calibri"/>
                         </a:rPr>
-                        <a:t>15 nilai</a:t>
+                        <a:t>1 nilai</a:t>
                       </a:r>
                     </a:p>
                   </a:txBody>
@@ -11824,7 +11680,7 @@
                           </a:solidFill>
                           <a:latin typeface="Calibri"/>
                         </a:rPr>
-                        <a:t>4. Perbaiki minyak negatif</a:t>
+                        <a:t>4. Hapus hari libur BEI</a:t>
                       </a:r>
                     </a:p>
                   </a:txBody>
@@ -11846,59 +11702,13 @@
                           </a:solidFill>
                           <a:latin typeface="Calibri"/>
                         </a:rPr>
-                        <a:t>1 nilai</a:t>
+                        <a:t>4.364 → 4.060</a:t>
                       </a:r>
                     </a:p>
                   </a:txBody>
                   <a:tcPr anchor="ctr" marL="73152" marR="73152">
                     <a:solidFill>
                       <a:srgbClr val="F3F5F9"/>
-                    </a:solidFill>
-                  </a:tcPr>
-                </a:tc>
-              </a:tr>
-              <a:tr h="457200">
-                <a:tc>
-                  <a:txBody>
-                    <a:bodyPr/>
-                    <a:lstStyle/>
-                    <a:p>
-                      <a:r>
-                        <a:rPr sz="1400" b="0">
-                          <a:solidFill>
-                            <a:srgbClr val="222B38"/>
-                          </a:solidFill>
-                          <a:latin typeface="Calibri"/>
-                        </a:rPr>
-                        <a:t>5. Hapus hari libur BEI</a:t>
-                      </a:r>
-                    </a:p>
-                  </a:txBody>
-                  <a:tcPr anchor="ctr" marL="73152" marR="73152">
-                    <a:solidFill>
-                      <a:srgbClr val="FFFFFF"/>
-                    </a:solidFill>
-                  </a:tcPr>
-                </a:tc>
-                <a:tc>
-                  <a:txBody>
-                    <a:bodyPr/>
-                    <a:lstStyle/>
-                    <a:p>
-                      <a:r>
-                        <a:rPr sz="1400" b="0">
-                          <a:solidFill>
-                            <a:srgbClr val="222B38"/>
-                          </a:solidFill>
-                          <a:latin typeface="Calibri"/>
-                        </a:rPr>
-                        <a:t>4.276 → 3.976</a:t>
-                      </a:r>
-                    </a:p>
-                  </a:txBody>
-                  <a:tcPr anchor="ctr" marL="73152" marR="73152">
-                    <a:solidFill>
-                      <a:srgbClr val="FFFFFF"/>
                     </a:solidFill>
                   </a:tcPr>
                 </a:tc>
@@ -11915,7 +11725,7 @@
         </p:nvSpPr>
         <p:spPr>
           <a:xfrm>
-            <a:off x="6263640" y="4206240"/>
+            <a:off x="6263640" y="3749039"/>
             <a:ext cx="5532120" cy="1097280"/>
           </a:xfrm>
           <a:prstGeom prst="rect">
@@ -11959,7 +11769,7 @@
         </p:nvSpPr>
         <p:spPr>
           <a:xfrm>
-            <a:off x="6263640" y="4206240"/>
+            <a:off x="6263640" y="3749039"/>
             <a:ext cx="64008" cy="1097280"/>
           </a:xfrm>
           <a:prstGeom prst="rect">
@@ -12003,7 +11813,7 @@
         </p:nvSpPr>
         <p:spPr>
           <a:xfrm>
-            <a:off x="6492240" y="4315968"/>
+            <a:off x="6492240" y="3858768"/>
             <a:ext cx="5166359" cy="914400"/>
           </a:xfrm>
           <a:prstGeom prst="rect">
@@ -12045,7 +11855,7 @@
                 </a:solidFill>
                 <a:latin typeface="Calibri"/>
               </a:rPr>
-              <a:t>3.976 hari bursa bersih, tanpa data kosong.</a:t>
+              <a:t>4.060 hari bursa bersih, tanpa data kosong.</a:t>
             </a:r>
           </a:p>
         </p:txBody>
@@ -12448,7 +12258,7 @@
                 </a:solidFill>
                 <a:latin typeface="Calibri"/>
               </a:rPr>
-              <a:t>3.179 hari (2010 – Jan 2023).</a:t>
+              <a:t>3.246 hari (2010 – Apr 2023).</a:t>
             </a:r>
           </a:p>
           <a:p>
@@ -12473,7 +12283,7 @@
                 </a:solidFill>
                 <a:latin typeface="Calibri"/>
               </a:rPr>
-              <a:t>795 hari (Jan 2023 – Mei 2026), tidak diacak.</a:t>
+              <a:t>812 hari (Apr 2023 – Sep 2026), tidak diacak.</a:t>
             </a:r>
           </a:p>
         </p:txBody>

--- a/presentation/Presentasi_Ilmuwan_Data_Syamsuddin_Wisnubroto.pptx
+++ b/presentation/Presentasi_Ilmuwan_Data_Syamsuddin_Wisnubroto.pptx
@@ -3749,7 +3749,7 @@
                 </a:solidFill>
                 <a:latin typeface="Calibri"/>
               </a:rPr>
-              <a:t>Random Forest </a:t>
+              <a:t>Logistic Regression </a:t>
             </a:r>
             <a:r>
               <a:rPr sz="1600" b="0">
@@ -3767,7 +3767,7 @@
                 </a:solidFill>
                 <a:latin typeface="Calibri"/>
               </a:rPr>
-              <a:t>0,595</a:t>
+              <a:t>0,599</a:t>
             </a:r>
             <a:r>
               <a:rPr sz="1600" b="0">
@@ -3801,7 +3801,7 @@
                 </a:solidFill>
                 <a:latin typeface="Calibri"/>
               </a:rPr>
-              <a:t>Logistic Regression hampir sama baiknya.</a:t>
+              <a:t>Random Forest hampir sama baiknya (0,594).</a:t>
             </a:r>
           </a:p>
           <a:p>
@@ -3835,7 +3835,7 @@
                 </a:solidFill>
                 <a:latin typeface="Calibri"/>
               </a:rPr>
-              <a:t>aturan sederhana "ikuti S&amp;P 500" setara dengan model terbaik pada data latih.</a:t>
+              <a:t>aturan sederhana "ikuti S&amp;P 500" (0,596) hampir sama dengan model terbaik.</a:t>
             </a:r>
           </a:p>
         </p:txBody>
@@ -4273,7 +4273,7 @@
                           </a:solidFill>
                           <a:latin typeface="Calibri"/>
                         </a:rPr>
-                        <a:t>Random Forest</a:t>
+                        <a:t>Logistic Regression</a:t>
                       </a:r>
                     </a:p>
                   </a:txBody>
@@ -4295,7 +4295,7 @@
                           </a:solidFill>
                           <a:latin typeface="Calibri"/>
                         </a:rPr>
-                        <a:t>0,543</a:t>
+                        <a:t>0,558</a:t>
                       </a:r>
                     </a:p>
                   </a:txBody>
@@ -4317,7 +4317,7 @@
                           </a:solidFill>
                           <a:latin typeface="Calibri"/>
                         </a:rPr>
-                        <a:t>0,535</a:t>
+                        <a:t>0,554</a:t>
                       </a:r>
                     </a:p>
                   </a:txBody>
@@ -4339,7 +4339,7 @@
                           </a:solidFill>
                           <a:latin typeface="Calibri"/>
                         </a:rPr>
-                        <a:t>0,577</a:t>
+                        <a:t>0,583</a:t>
                       </a:r>
                     </a:p>
                   </a:txBody>
@@ -4660,7 +4660,7 @@
                           </a:solidFill>
                           <a:latin typeface="Calibri"/>
                         </a:rPr>
-                        <a:t>0,543</a:t>
+                        <a:t>0,558</a:t>
                       </a:r>
                     </a:p>
                   </a:txBody>
@@ -4678,11 +4678,11 @@
                       <a:r>
                         <a:rPr sz="1400" b="0">
                           <a:solidFill>
-                            <a:srgbClr val="D73027"/>
-                          </a:solidFill>
-                          <a:latin typeface="Calibri"/>
-                        </a:rPr>
-                        <a:t>Tidak</a:t>
+                            <a:srgbClr val="1A9850"/>
+                          </a:solidFill>
+                          <a:latin typeface="Calibri"/>
+                        </a:rPr>
+                        <a:t>Ya</a:t>
                       </a:r>
                     </a:p>
                   </a:txBody>
@@ -4728,7 +4728,7 @@
                           </a:solidFill>
                           <a:latin typeface="Calibri"/>
                         </a:rPr>
-                        <a:t>0,535</a:t>
+                        <a:t>0,554</a:t>
                       </a:r>
                     </a:p>
                   </a:txBody>
@@ -4746,11 +4746,11 @@
                       <a:r>
                         <a:rPr sz="1400" b="0">
                           <a:solidFill>
-                            <a:srgbClr val="D73027"/>
-                          </a:solidFill>
-                          <a:latin typeface="Calibri"/>
-                        </a:rPr>
-                        <a:t>Tidak</a:t>
+                            <a:srgbClr val="1A9850"/>
+                          </a:solidFill>
+                          <a:latin typeface="Calibri"/>
+                        </a:rPr>
+                        <a:t>Ya</a:t>
                       </a:r>
                     </a:p>
                   </a:txBody>
@@ -4796,7 +4796,7 @@
                           </a:solidFill>
                           <a:latin typeface="Calibri"/>
                         </a:rPr>
-                        <a:t>0,577</a:t>
+                        <a:t>0,583</a:t>
                       </a:r>
                     </a:p>
                   </a:txBody>
@@ -4814,11 +4814,11 @@
                       <a:r>
                         <a:rPr sz="1400" b="0">
                           <a:solidFill>
-                            <a:srgbClr val="D73027"/>
-                          </a:solidFill>
-                          <a:latin typeface="Calibri"/>
-                        </a:rPr>
-                        <a:t>Tidak</a:t>
+                            <a:srgbClr val="1A9850"/>
+                          </a:solidFill>
+                          <a:latin typeface="Calibri"/>
+                        </a:rPr>
+                        <a:t>Ya</a:t>
                       </a:r>
                     </a:p>
                   </a:txBody>
@@ -4864,7 +4864,7 @@
                           </a:solidFill>
                           <a:latin typeface="Calibri"/>
                         </a:rPr>
-                        <a:t>+0,021</a:t>
+                        <a:t>+0,036</a:t>
                       </a:r>
                     </a:p>
                   </a:txBody>
@@ -4917,8 +4917,8 @@
         </p:blipFill>
         <p:spPr>
           <a:xfrm>
-            <a:off x="7132685" y="1188720"/>
-            <a:ext cx="4616988" cy="2377440"/>
+            <a:off x="7135063" y="1188720"/>
+            <a:ext cx="4612233" cy="2377440"/>
           </a:xfrm>
           <a:prstGeom prst="rect">
             <a:avLst/>
@@ -5063,7 +5063,7 @@
                 </a:solidFill>
                 <a:latin typeface="Calibri"/>
               </a:rPr>
-              <a:t>•  Benar 54,3% dari 812 hari uji</a:t>
+              <a:t>•  Benar 55,8% dari 812 hari uji</a:t>
             </a:r>
           </a:p>
           <a:p>
@@ -5079,7 +5079,7 @@
                 </a:solidFill>
                 <a:latin typeface="Calibri"/>
               </a:rPr>
-              <a:t>•  Hanya 1 dari 4 target tercapai</a:t>
+              <a:t>•  4 dari 4 target tercapai, tetapi tipis</a:t>
             </a:r>
           </a:p>
           <a:p>
@@ -5095,7 +5095,7 @@
                 </a:solidFill>
                 <a:latin typeface="Calibri"/>
               </a:rPr>
-              <a:t>•  Setara dengan aturan "ikuti S&amp;P 500"</a:t>
+              <a:t>•  Iterasi ke-2: 1 variabel lemah dibuang</a:t>
             </a:r>
           </a:p>
           <a:p>
@@ -5111,7 +5111,7 @@
                 </a:solidFill>
                 <a:latin typeface="Calibri"/>
               </a:rPr>
-              <a:t>•  Periode uji penuh gejolak (IHSG −41,5% di 2026)</a:t>
+              <a:t>•  Data uji dipakai 2× → perlu konfirmasi data baru</a:t>
             </a:r>
           </a:p>
         </p:txBody>
@@ -5751,7 +5751,7 @@
                 </a:solidFill>
                 <a:latin typeface="Calibri"/>
               </a:rPr>
-              <a:t>•  Target accuracy, F1, ROC-AUC belum tercapai</a:t>
+              <a:t>•  Selisih terhadap target tipis</a:t>
             </a:r>
           </a:p>
           <a:p>
@@ -5767,7 +5767,7 @@
                 </a:solidFill>
                 <a:latin typeface="Calibri"/>
               </a:rPr>
-              <a:t>•  Belum lebih baik dari aturan "ikuti S&amp;P 500"</a:t>
+              <a:t>•  Hanya sedikit lebih baik dari "ikuti S&amp;P 500"</a:t>
             </a:r>
           </a:p>
           <a:p>
@@ -5783,7 +5783,7 @@
                 </a:solidFill>
                 <a:latin typeface="Calibri"/>
               </a:rPr>
-              <a:t>•  Pola lama kurang berlaku saat pasar bergejolak</a:t>
+              <a:t>•  Data uji dipakai dua kali (2 iterasi)</a:t>
             </a:r>
           </a:p>
         </p:txBody>
@@ -5926,7 +5926,7 @@
                 </a:solidFill>
                 <a:latin typeface="Calibri"/>
               </a:rPr>
-              <a:t>•  Belum lanjut ke penggunaan</a:t>
+              <a:t>•  Lanjut ke uji coba paralel</a:t>
             </a:r>
           </a:p>
           <a:p>
@@ -5942,7 +5942,7 @@
                 </a:solidFill>
                 <a:latin typeface="Calibri"/>
               </a:rPr>
-              <a:t>•  Perbaiki model dulu</a:t>
+              <a:t>•  Konfirmasi dengan data setelah Sep 2026</a:t>
             </a:r>
           </a:p>
           <a:p>
@@ -5958,7 +5958,7 @@
                 </a:solidFill>
                 <a:latin typeface="Calibri"/>
               </a:rPr>
-              <a:t>•  Hasil dilaporkan apa adanya</a:t>
+              <a:t>•  Belum untuk keputusan investasi</a:t>
             </a:r>
           </a:p>
         </p:txBody>
@@ -6659,7 +6659,7 @@
                 </a:solidFill>
                 <a:latin typeface="Calibri"/>
               </a:rPr>
-              <a:t>IHSG dipengaruhi pasar global: saham Amerika, harga minyak, emas, dan kurs rupiah.</a:t>
+              <a:t>IHSG dipengaruhi pasar global: saham Amerika, indeks ketakutan (VIX), harga minyak, dan emas.</a:t>
             </a:r>
           </a:p>
           <a:p>
@@ -7293,7 +7293,7 @@
         </p:nvGraphicFramePr>
         <p:xfrm>
           <a:off x="7635240" y="1234440"/>
-          <a:ext cx="4160520" cy="2304288"/>
+          <a:ext cx="4160520" cy="1920240"/>
         </p:xfrm>
         <a:graphic>
           <a:graphicData uri="http://schemas.openxmlformats.org/drawingml/2006/table">
@@ -7535,52 +7535,6 @@
                   </a:tcPr>
                 </a:tc>
               </a:tr>
-              <a:tr h="384048">
-                <a:tc>
-                  <a:txBody>
-                    <a:bodyPr/>
-                    <a:lstStyle/>
-                    <a:p>
-                      <a:r>
-                        <a:rPr sz="1300" b="0">
-                          <a:solidFill>
-                            <a:srgbClr val="222B38"/>
-                          </a:solidFill>
-                          <a:latin typeface="Calibri"/>
-                        </a:rPr>
-                        <a:t>USDIDR</a:t>
-                      </a:r>
-                    </a:p>
-                  </a:txBody>
-                  <a:tcPr anchor="ctr" marL="73152" marR="73152">
-                    <a:solidFill>
-                      <a:srgbClr val="FFFFFF"/>
-                    </a:solidFill>
-                  </a:tcPr>
-                </a:tc>
-                <a:tc>
-                  <a:txBody>
-                    <a:bodyPr/>
-                    <a:lstStyle/>
-                    <a:p>
-                      <a:r>
-                        <a:rPr sz="1300" b="0">
-                          <a:solidFill>
-                            <a:srgbClr val="222B38"/>
-                          </a:solidFill>
-                          <a:latin typeface="Calibri"/>
-                        </a:rPr>
-                        <a:t>Kurs dolar terhadap rupiah</a:t>
-                      </a:r>
-                    </a:p>
-                  </a:txBody>
-                  <a:tcPr anchor="ctr" marL="73152" marR="73152">
-                    <a:solidFill>
-                      <a:srgbClr val="FFFFFF"/>
-                    </a:solidFill>
-                  </a:tcPr>
-                </a:tc>
-              </a:tr>
             </a:tbl>
           </a:graphicData>
         </a:graphic>
@@ -7723,7 +7677,7 @@
                 </a:solidFill>
                 <a:latin typeface="Calibri"/>
               </a:rPr>
-              <a:t>Data nyata harian 1 Jan 2010 – 30 Sep 2026 dari Yahoo Finance: 4.365 baris hari kerja, 6 variabel. IHSG naik pada 54% hari bursa.</a:t>
+              <a:t>Data nyata harian 1 Jan 2010 – 30 Sep 2026 dari Yahoo Finance: 4.365 baris hari kerja, 5 variabel. IHSG naik pada 54% hari bursa.</a:t>
             </a:r>
           </a:p>
         </p:txBody>
@@ -8303,7 +8257,7 @@
                           </a:solidFill>
                           <a:latin typeface="Calibri"/>
                         </a:rPr>
-                        <a:t>Menemukan 4 jenis masalah data</a:t>
+                        <a:t>Menemukan 3 jenis masalah data</a:t>
                       </a:r>
                     </a:p>
                   </a:txBody>
@@ -8371,7 +8325,7 @@
                           </a:solidFill>
                           <a:latin typeface="Calibri"/>
                         </a:rPr>
-                        <a:t>Memilih 6 variabel dan target</a:t>
+                        <a:t>Memilih 5 variabel dan target</a:t>
                       </a:r>
                     </a:p>
                   </a:txBody>
@@ -8439,7 +8393,7 @@
                           </a:solidFill>
                           <a:latin typeface="Calibri"/>
                         </a:rPr>
-                        <a:t>4 langkah perbaikan</a:t>
+                        <a:t>3 langkah perbaikan</a:t>
                       </a:r>
                     </a:p>
                   </a:txBody>
@@ -8507,7 +8461,7 @@
                           </a:solidFill>
                           <a:latin typeface="Calibri"/>
                         </a:rPr>
-                        <a:t>6 fitur, data latih 80% &amp; uji 20%</a:t>
+                        <a:t>5 fitur, data latih 80% &amp; uji 20%</a:t>
                       </a:r>
                     </a:p>
                   </a:txBody>
@@ -10051,8 +10005,8 @@
         </p:blipFill>
         <p:spPr>
           <a:xfrm>
-            <a:off x="411480" y="1229716"/>
-            <a:ext cx="6766560" cy="3758487"/>
+            <a:off x="411480" y="1202611"/>
+            <a:ext cx="6766560" cy="3812696"/>
           </a:xfrm>
           <a:prstGeom prst="rect">
             <a:avLst/>
@@ -10483,7 +10437,7 @@
       </p:sp>
       <p:pic>
         <p:nvPicPr>
-          <p:cNvPr id="9" name="Picture 8" descr="04_kurs_janggal.png"/>
+          <p:cNvPr id="9" name="Picture 8" descr="04_minyak_negatif.png"/>
           <p:cNvPicPr>
             <a:picLocks noChangeAspect="1"/>
           </p:cNvPicPr>
@@ -10497,8 +10451,8 @@
         </p:blipFill>
         <p:spPr>
           <a:xfrm>
-            <a:off x="2527545" y="1188720"/>
-            <a:ext cx="7152148" cy="2651760"/>
+            <a:off x="2579820" y="1188720"/>
+            <a:ext cx="7047598" cy="2651760"/>
           </a:xfrm>
           <a:prstGeom prst="rect">
             <a:avLst/>
@@ -10677,7 +10631,7 @@
                           </a:solidFill>
                           <a:latin typeface="Calibri"/>
                         </a:rPr>
-                        <a:t>Kurs USD/IDR janggal (mis. 888,11)</a:t>
+                        <a:t>Tanggal ganda</a:t>
                       </a:r>
                     </a:p>
                   </a:txBody>
@@ -10699,7 +10653,7 @@
                           </a:solidFill>
                           <a:latin typeface="Calibri"/>
                         </a:rPr>
-                        <a:t>15 nilai</a:t>
+                        <a:t>0</a:t>
                       </a:r>
                     </a:p>
                   </a:txBody>
@@ -10721,7 +10675,7 @@
                           </a:solidFill>
                           <a:latin typeface="Calibri"/>
                         </a:rPr>
-                        <a:t>Diganti nilai hari sebelumnya</a:t>
+                        <a:t>–</a:t>
                       </a:r>
                     </a:p>
                   </a:txBody>
@@ -11305,7 +11259,7 @@
                           </a:solidFill>
                           <a:latin typeface="Calibri"/>
                         </a:rPr>
-                        <a:t>OIL, GOLD, USDIDR</a:t>
+                        <a:t>OIL, GOLD</a:t>
                       </a:r>
                     </a:p>
                   </a:txBody>
@@ -11471,7 +11425,7 @@
         </p:nvGraphicFramePr>
         <p:xfrm>
           <a:off x="6263640" y="1234440"/>
-          <a:ext cx="5532120" cy="2286000"/>
+          <a:ext cx="5532120" cy="1828800"/>
         </p:xfrm>
         <a:graphic>
           <a:graphicData uri="http://schemas.openxmlformats.org/drawingml/2006/table">
@@ -11588,7 +11542,7 @@
                           </a:solidFill>
                           <a:latin typeface="Calibri"/>
                         </a:rPr>
-                        <a:t>2. Perbaiki kurs janggal</a:t>
+                        <a:t>2. Perbaiki minyak negatif</a:t>
                       </a:r>
                     </a:p>
                   </a:txBody>
@@ -11610,7 +11564,7 @@
                           </a:solidFill>
                           <a:latin typeface="Calibri"/>
                         </a:rPr>
-                        <a:t>15 nilai</a:t>
+                        <a:t>1 nilai</a:t>
                       </a:r>
                     </a:p>
                   </a:txBody>
@@ -11634,7 +11588,7 @@
                           </a:solidFill>
                           <a:latin typeface="Calibri"/>
                         </a:rPr>
-                        <a:t>3. Perbaiki minyak negatif</a:t>
+                        <a:t>3. Hapus hari libur BEI</a:t>
                       </a:r>
                     </a:p>
                   </a:txBody>
@@ -11656,59 +11610,13 @@
                           </a:solidFill>
                           <a:latin typeface="Calibri"/>
                         </a:rPr>
-                        <a:t>1 nilai</a:t>
+                        <a:t>4.364 → 4.060</a:t>
                       </a:r>
                     </a:p>
                   </a:txBody>
                   <a:tcPr anchor="ctr" marL="73152" marR="73152">
                     <a:solidFill>
                       <a:srgbClr val="FFFFFF"/>
-                    </a:solidFill>
-                  </a:tcPr>
-                </a:tc>
-              </a:tr>
-              <a:tr h="457200">
-                <a:tc>
-                  <a:txBody>
-                    <a:bodyPr/>
-                    <a:lstStyle/>
-                    <a:p>
-                      <a:r>
-                        <a:rPr sz="1400" b="0">
-                          <a:solidFill>
-                            <a:srgbClr val="222B38"/>
-                          </a:solidFill>
-                          <a:latin typeface="Calibri"/>
-                        </a:rPr>
-                        <a:t>4. Hapus hari libur BEI</a:t>
-                      </a:r>
-                    </a:p>
-                  </a:txBody>
-                  <a:tcPr anchor="ctr" marL="73152" marR="73152">
-                    <a:solidFill>
-                      <a:srgbClr val="F3F5F9"/>
-                    </a:solidFill>
-                  </a:tcPr>
-                </a:tc>
-                <a:tc>
-                  <a:txBody>
-                    <a:bodyPr/>
-                    <a:lstStyle/>
-                    <a:p>
-                      <a:r>
-                        <a:rPr sz="1400" b="0">
-                          <a:solidFill>
-                            <a:srgbClr val="222B38"/>
-                          </a:solidFill>
-                          <a:latin typeface="Calibri"/>
-                        </a:rPr>
-                        <a:t>4.364 → 4.060</a:t>
-                      </a:r>
-                    </a:p>
-                  </a:txBody>
-                  <a:tcPr anchor="ctr" marL="73152" marR="73152">
-                    <a:solidFill>
-                      <a:srgbClr val="F3F5F9"/>
                     </a:solidFill>
                   </a:tcPr>
                 </a:tc>
@@ -11725,7 +11633,7 @@
         </p:nvSpPr>
         <p:spPr>
           <a:xfrm>
-            <a:off x="6263640" y="3749039"/>
+            <a:off x="6263640" y="3291840"/>
             <a:ext cx="5532120" cy="1097280"/>
           </a:xfrm>
           <a:prstGeom prst="rect">
@@ -11769,7 +11677,7 @@
         </p:nvSpPr>
         <p:spPr>
           <a:xfrm>
-            <a:off x="6263640" y="3749039"/>
+            <a:off x="6263640" y="3291840"/>
             <a:ext cx="64008" cy="1097280"/>
           </a:xfrm>
           <a:prstGeom prst="rect">
@@ -11813,7 +11721,7 @@
         </p:nvSpPr>
         <p:spPr>
           <a:xfrm>
-            <a:off x="6492240" y="3858768"/>
+            <a:off x="6492240" y="3401568"/>
             <a:ext cx="5166359" cy="914400"/>
           </a:xfrm>
           <a:prstGeom prst="rect">
@@ -12224,7 +12132,7 @@
                 </a:solidFill>
                 <a:latin typeface="Calibri"/>
               </a:rPr>
-              <a:t>6 fitur: </a:t>
+              <a:t>5 fitur: </a:t>
             </a:r>
             <a:r>
               <a:rPr sz="1500" b="0">
@@ -12233,7 +12141,7 @@
                 </a:solidFill>
                 <a:latin typeface="Calibri"/>
               </a:rPr>
-              <a:t>perubahan harian (%) IHSG, S&amp;P 500, VIX, minyak, emas, dan USD/IDR.</a:t>
+              <a:t>perubahan harian (%) IHSG, S&amp;P 500, VIX, minyak, dan emas.</a:t>
             </a:r>
           </a:p>
           <a:p>

--- a/presentation/Presentasi_Ilmuwan_Data_Syamsuddin_Wisnubroto.pptx
+++ b/presentation/Presentasi_Ilmuwan_Data_Syamsuddin_Wisnubroto.pptx
@@ -18,6 +18,7 @@
     <p:sldId id="266" r:id="rId17"/>
     <p:sldId id="267" r:id="rId18"/>
     <p:sldId id="268" r:id="rId19"/>
+    <p:sldId id="269" r:id="rId20"/>
   </p:sldIdLst>
   <p:sldSz cx="12191695" cy="6858000" type="screen4x3"/>
   <p:notesSz cx="6858000" cy="9144000"/>
@@ -3472,7 +3473,7 @@
                 </a:solidFill>
                 <a:latin typeface="Calibri"/>
               </a:rPr>
-              <a:t>Membangun model</a:t>
+              <a:t>Konstruksi data dan skenario model</a:t>
             </a:r>
           </a:p>
         </p:txBody>
@@ -3555,7 +3556,7 @@
                 </a:solidFill>
                 <a:latin typeface="Calibri"/>
               </a:rPr>
-              <a:t>Unit 9</a:t>
+              <a:t>Unit 7–8</a:t>
             </a:r>
           </a:p>
         </p:txBody>
@@ -3684,7 +3685,7 @@
       </p:sp>
       <p:pic>
         <p:nvPicPr>
-          <p:cNvPr id="9" name="Picture 8" descr="09_perbandingan_model.png"/>
+          <p:cNvPr id="9" name="Picture 8" descr="07_pembagian_data.png"/>
           <p:cNvPicPr>
             <a:picLocks noChangeAspect="1"/>
           </p:cNvPicPr>
@@ -3698,8 +3699,8 @@
         </p:blipFill>
         <p:spPr>
           <a:xfrm>
-            <a:off x="411480" y="1256607"/>
-            <a:ext cx="6949440" cy="3247505"/>
+            <a:off x="411480" y="1220650"/>
+            <a:ext cx="6675120" cy="2496459"/>
           </a:xfrm>
           <a:prstGeom prst="rect">
             <a:avLst/>
@@ -3714,8 +3715,8 @@
         </p:nvSpPr>
         <p:spPr>
           <a:xfrm>
-            <a:off x="7635240" y="1325880"/>
-            <a:ext cx="4160520" cy="4114800"/>
+            <a:off x="411480" y="3931920"/>
+            <a:ext cx="6675120" cy="2103120"/>
           </a:xfrm>
           <a:prstGeom prst="rect">
             <a:avLst/>
@@ -3734,49 +3735,22 @@
               </a:spcAft>
             </a:pPr>
             <a:r>
-              <a:rPr sz="1000" b="0">
-                <a:solidFill>
-                  <a:srgbClr val="E08214"/>
+              <a:rPr sz="1500" b="1">
+                <a:solidFill>
+                  <a:srgbClr val="222B38"/>
                 </a:solidFill>
                 <a:latin typeface="Calibri"/>
               </a:rPr>
-              <a:t>■  </a:t>
-            </a:r>
-            <a:r>
-              <a:rPr sz="1600" b="1">
+              <a:t>5 fitur: </a:t>
+            </a:r>
+            <a:r>
+              <a:rPr sz="1500" b="0">
                 <a:solidFill>
                   <a:srgbClr val="222B38"/>
                 </a:solidFill>
                 <a:latin typeface="Calibri"/>
               </a:rPr>
-              <a:t>Logistic Regression </a:t>
-            </a:r>
-            <a:r>
-              <a:rPr sz="1600" b="0">
-                <a:solidFill>
-                  <a:srgbClr val="222B38"/>
-                </a:solidFill>
-                <a:latin typeface="Calibri"/>
-              </a:rPr>
-              <a:t>dipilih (accuracy validasi </a:t>
-            </a:r>
-            <a:r>
-              <a:rPr sz="1600" b="1">
-                <a:solidFill>
-                  <a:srgbClr val="222B38"/>
-                </a:solidFill>
-                <a:latin typeface="Calibri"/>
-              </a:rPr>
-              <a:t>0,599</a:t>
-            </a:r>
-            <a:r>
-              <a:rPr sz="1600" b="0">
-                <a:solidFill>
-                  <a:srgbClr val="222B38"/>
-                </a:solidFill>
-                <a:latin typeface="Calibri"/>
-              </a:rPr>
-              <a:t>).</a:t>
+              <a:t>perubahan harian (%) IHSG, S&amp;P 500, VIX, minyak, dan emas.</a:t>
             </a:r>
           </a:p>
           <a:p>
@@ -3786,22 +3760,22 @@
               </a:spcAft>
             </a:pPr>
             <a:r>
-              <a:rPr sz="1000" b="0">
-                <a:solidFill>
-                  <a:srgbClr val="E08214"/>
+              <a:rPr sz="1500" b="1">
+                <a:solidFill>
+                  <a:srgbClr val="222B38"/>
                 </a:solidFill>
                 <a:latin typeface="Calibri"/>
               </a:rPr>
-              <a:t>■  </a:t>
-            </a:r>
-            <a:r>
-              <a:rPr sz="1600" b="0">
+              <a:t>Data latih: </a:t>
+            </a:r>
+            <a:r>
+              <a:rPr sz="1500" b="0">
                 <a:solidFill>
                   <a:srgbClr val="222B38"/>
                 </a:solidFill>
                 <a:latin typeface="Calibri"/>
               </a:rPr>
-              <a:t>Random Forest hampir sama baiknya (0,594).</a:t>
+              <a:t>3.246 hari (2010 – Apr 2023).</a:t>
             </a:r>
           </a:p>
           <a:p>
@@ -3811,31 +3785,363 @@
               </a:spcAft>
             </a:pPr>
             <a:r>
-              <a:rPr sz="1000" b="0">
-                <a:solidFill>
-                  <a:srgbClr val="E08214"/>
+              <a:rPr sz="1500" b="1">
+                <a:solidFill>
+                  <a:srgbClr val="222B38"/>
                 </a:solidFill>
                 <a:latin typeface="Calibri"/>
               </a:rPr>
-              <a:t>■  </a:t>
-            </a:r>
-            <a:r>
-              <a:rPr sz="1600" b="1">
-                <a:solidFill>
-                  <a:srgbClr val="D73027"/>
+              <a:t>Data uji: </a:t>
+            </a:r>
+            <a:r>
+              <a:rPr sz="1500" b="0">
+                <a:solidFill>
+                  <a:srgbClr val="222B38"/>
                 </a:solidFill>
                 <a:latin typeface="Calibri"/>
               </a:rPr>
-              <a:t>Catatan jujur: </a:t>
-            </a:r>
-            <a:r>
-              <a:rPr sz="1600" b="0">
-                <a:solidFill>
-                  <a:srgbClr val="222B38"/>
+              <a:t>812 hari (Apr 2023 – Sep 2026), tidak diacak.</a:t>
+            </a:r>
+          </a:p>
+        </p:txBody>
+      </p:sp>
+      <p:graphicFrame>
+        <p:nvGraphicFramePr>
+          <p:cNvPr id="11" name="Table 10"/>
+          <p:cNvGraphicFramePr>
+            <a:graphicFrameLocks noGrp="1"/>
+          </p:cNvGraphicFramePr>
+          <p:nvPr/>
+        </p:nvGraphicFramePr>
+        <p:xfrm>
+          <a:off x="7360920" y="1234440"/>
+          <a:ext cx="4434840" cy="2743200"/>
+        </p:xfrm>
+        <a:graphic>
+          <a:graphicData uri="http://schemas.openxmlformats.org/drawingml/2006/table">
+            <a:tbl>
+              <a:tblPr firstRow="1" bandRow="1">
+                <a:tableStyleId>{5C22544A-7EE6-4342-B048-85BDC9FD1C3A}</a:tableStyleId>
+              </a:tblPr>
+              <a:tblGrid>
+                <a:gridCol w="2743200"/>
+                <a:gridCol w="1691640"/>
+              </a:tblGrid>
+              <a:tr h="457200">
+                <a:tc>
+                  <a:txBody>
+                    <a:bodyPr/>
+                    <a:lstStyle/>
+                    <a:p>
+                      <a:r>
+                        <a:rPr sz="1400" b="1">
+                          <a:solidFill>
+                            <a:srgbClr val="FFFFFF"/>
+                          </a:solidFill>
+                          <a:latin typeface="Calibri"/>
+                        </a:rPr>
+                        <a:t>Skenario</a:t>
+                      </a:r>
+                    </a:p>
+                  </a:txBody>
+                  <a:tcPr anchor="ctr" marL="73152" marR="73152">
+                    <a:solidFill>
+                      <a:srgbClr val="1F3A5F"/>
+                    </a:solidFill>
+                  </a:tcPr>
+                </a:tc>
+                <a:tc>
+                  <a:txBody>
+                    <a:bodyPr/>
+                    <a:lstStyle/>
+                    <a:p>
+                      <a:r>
+                        <a:rPr sz="1400" b="1">
+                          <a:solidFill>
+                            <a:srgbClr val="FFFFFF"/>
+                          </a:solidFill>
+                          <a:latin typeface="Calibri"/>
+                        </a:rPr>
+                        <a:t>Jenis</a:t>
+                      </a:r>
+                    </a:p>
+                  </a:txBody>
+                  <a:tcPr anchor="ctr" marL="73152" marR="73152">
+                    <a:solidFill>
+                      <a:srgbClr val="1F3A5F"/>
+                    </a:solidFill>
+                  </a:tcPr>
+                </a:tc>
+              </a:tr>
+              <a:tr h="457200">
+                <a:tc>
+                  <a:txBody>
+                    <a:bodyPr/>
+                    <a:lstStyle/>
+                    <a:p>
+                      <a:r>
+                        <a:rPr sz="1400" b="0">
+                          <a:solidFill>
+                            <a:srgbClr val="222B38"/>
+                          </a:solidFill>
+                          <a:latin typeface="Calibri"/>
+                        </a:rPr>
+                        <a:t>Selalu Naik</a:t>
+                      </a:r>
+                    </a:p>
+                  </a:txBody>
+                  <a:tcPr anchor="ctr" marL="73152" marR="73152">
+                    <a:solidFill>
+                      <a:srgbClr val="FFFFFF"/>
+                    </a:solidFill>
+                  </a:tcPr>
+                </a:tc>
+                <a:tc>
+                  <a:txBody>
+                    <a:bodyPr/>
+                    <a:lstStyle/>
+                    <a:p>
+                      <a:r>
+                        <a:rPr sz="1400" b="0">
+                          <a:solidFill>
+                            <a:srgbClr val="222B38"/>
+                          </a:solidFill>
+                          <a:latin typeface="Calibri"/>
+                        </a:rPr>
+                        <a:t>Baseline</a:t>
+                      </a:r>
+                    </a:p>
+                  </a:txBody>
+                  <a:tcPr anchor="ctr" marL="73152" marR="73152">
+                    <a:solidFill>
+                      <a:srgbClr val="FFFFFF"/>
+                    </a:solidFill>
+                  </a:tcPr>
+                </a:tc>
+              </a:tr>
+              <a:tr h="457200">
+                <a:tc>
+                  <a:txBody>
+                    <a:bodyPr/>
+                    <a:lstStyle/>
+                    <a:p>
+                      <a:r>
+                        <a:rPr sz="1400" b="0">
+                          <a:solidFill>
+                            <a:srgbClr val="222B38"/>
+                          </a:solidFill>
+                          <a:latin typeface="Calibri"/>
+                        </a:rPr>
+                        <a:t>Ikuti S&amp;P 500</a:t>
+                      </a:r>
+                    </a:p>
+                  </a:txBody>
+                  <a:tcPr anchor="ctr" marL="73152" marR="73152">
+                    <a:solidFill>
+                      <a:srgbClr val="F3F5F9"/>
+                    </a:solidFill>
+                  </a:tcPr>
+                </a:tc>
+                <a:tc>
+                  <a:txBody>
+                    <a:bodyPr/>
+                    <a:lstStyle/>
+                    <a:p>
+                      <a:r>
+                        <a:rPr sz="1400" b="0">
+                          <a:solidFill>
+                            <a:srgbClr val="222B38"/>
+                          </a:solidFill>
+                          <a:latin typeface="Calibri"/>
+                        </a:rPr>
+                        <a:t>Baseline</a:t>
+                      </a:r>
+                    </a:p>
+                  </a:txBody>
+                  <a:tcPr anchor="ctr" marL="73152" marR="73152">
+                    <a:solidFill>
+                      <a:srgbClr val="F3F5F9"/>
+                    </a:solidFill>
+                  </a:tcPr>
+                </a:tc>
+              </a:tr>
+              <a:tr h="457200">
+                <a:tc>
+                  <a:txBody>
+                    <a:bodyPr/>
+                    <a:lstStyle/>
+                    <a:p>
+                      <a:r>
+                        <a:rPr sz="1400" b="0">
+                          <a:solidFill>
+                            <a:srgbClr val="222B38"/>
+                          </a:solidFill>
+                          <a:latin typeface="Calibri"/>
+                        </a:rPr>
+                        <a:t>Logistic Regression</a:t>
+                      </a:r>
+                    </a:p>
+                  </a:txBody>
+                  <a:tcPr anchor="ctr" marL="73152" marR="73152">
+                    <a:solidFill>
+                      <a:srgbClr val="FFFFFF"/>
+                    </a:solidFill>
+                  </a:tcPr>
+                </a:tc>
+                <a:tc>
+                  <a:txBody>
+                    <a:bodyPr/>
+                    <a:lstStyle/>
+                    <a:p>
+                      <a:r>
+                        <a:rPr sz="1400" b="0">
+                          <a:solidFill>
+                            <a:srgbClr val="222B38"/>
+                          </a:solidFill>
+                          <a:latin typeface="Calibri"/>
+                        </a:rPr>
+                        <a:t>Model</a:t>
+                      </a:r>
+                    </a:p>
+                  </a:txBody>
+                  <a:tcPr anchor="ctr" marL="73152" marR="73152">
+                    <a:solidFill>
+                      <a:srgbClr val="FFFFFF"/>
+                    </a:solidFill>
+                  </a:tcPr>
+                </a:tc>
+              </a:tr>
+              <a:tr h="457200">
+                <a:tc>
+                  <a:txBody>
+                    <a:bodyPr/>
+                    <a:lstStyle/>
+                    <a:p>
+                      <a:r>
+                        <a:rPr sz="1400" b="0">
+                          <a:solidFill>
+                            <a:srgbClr val="222B38"/>
+                          </a:solidFill>
+                          <a:latin typeface="Calibri"/>
+                        </a:rPr>
+                        <a:t>Decision Tree</a:t>
+                      </a:r>
+                    </a:p>
+                  </a:txBody>
+                  <a:tcPr anchor="ctr" marL="73152" marR="73152">
+                    <a:solidFill>
+                      <a:srgbClr val="F3F5F9"/>
+                    </a:solidFill>
+                  </a:tcPr>
+                </a:tc>
+                <a:tc>
+                  <a:txBody>
+                    <a:bodyPr/>
+                    <a:lstStyle/>
+                    <a:p>
+                      <a:r>
+                        <a:rPr sz="1400" b="0">
+                          <a:solidFill>
+                            <a:srgbClr val="222B38"/>
+                          </a:solidFill>
+                          <a:latin typeface="Calibri"/>
+                        </a:rPr>
+                        <a:t>Model</a:t>
+                      </a:r>
+                    </a:p>
+                  </a:txBody>
+                  <a:tcPr anchor="ctr" marL="73152" marR="73152">
+                    <a:solidFill>
+                      <a:srgbClr val="F3F5F9"/>
+                    </a:solidFill>
+                  </a:tcPr>
+                </a:tc>
+              </a:tr>
+              <a:tr h="457200">
+                <a:tc>
+                  <a:txBody>
+                    <a:bodyPr/>
+                    <a:lstStyle/>
+                    <a:p>
+                      <a:r>
+                        <a:rPr sz="1400" b="0">
+                          <a:solidFill>
+                            <a:srgbClr val="222B38"/>
+                          </a:solidFill>
+                          <a:latin typeface="Calibri"/>
+                        </a:rPr>
+                        <a:t>Random Forest</a:t>
+                      </a:r>
+                    </a:p>
+                  </a:txBody>
+                  <a:tcPr anchor="ctr" marL="73152" marR="73152">
+                    <a:solidFill>
+                      <a:srgbClr val="FFFFFF"/>
+                    </a:solidFill>
+                  </a:tcPr>
+                </a:tc>
+                <a:tc>
+                  <a:txBody>
+                    <a:bodyPr/>
+                    <a:lstStyle/>
+                    <a:p>
+                      <a:r>
+                        <a:rPr sz="1400" b="0">
+                          <a:solidFill>
+                            <a:srgbClr val="222B38"/>
+                          </a:solidFill>
+                          <a:latin typeface="Calibri"/>
+                        </a:rPr>
+                        <a:t>Model</a:t>
+                      </a:r>
+                    </a:p>
+                  </a:txBody>
+                  <a:tcPr anchor="ctr" marL="73152" marR="73152">
+                    <a:solidFill>
+                      <a:srgbClr val="FFFFFF"/>
+                    </a:solidFill>
+                  </a:tcPr>
+                </a:tc>
+              </a:tr>
+            </a:tbl>
+          </a:graphicData>
+        </a:graphic>
+      </p:graphicFrame>
+      <p:sp>
+        <p:nvSpPr>
+          <p:cNvPr id="12" name="TextBox 11"/>
+          <p:cNvSpPr txBox="1"/>
+          <p:nvPr/>
+        </p:nvSpPr>
+        <p:spPr>
+          <a:xfrm>
+            <a:off x="7360920" y="4160520"/>
+            <a:ext cx="4434840" cy="1645920"/>
+          </a:xfrm>
+          <a:prstGeom prst="rect">
+            <a:avLst/>
+          </a:prstGeom>
+          <a:noFill/>
+        </p:spPr>
+        <p:txBody>
+          <a:bodyPr wrap="square" anchor="t">
+            <a:spAutoFit/>
+          </a:bodyPr>
+          <a:lstStyle/>
+          <a:p>
+            <a:pPr algn="l">
+              <a:spcAft>
+                <a:spcPts val="800"/>
+              </a:spcAft>
+            </a:pPr>
+            <a:r>
+              <a:rPr sz="1400" b="0">
+                <a:solidFill>
+                  <a:srgbClr val="5A6778"/>
                 </a:solidFill>
                 <a:latin typeface="Calibri"/>
               </a:rPr>
-              <a:t>aturan sederhana "ikuti S&amp;P 500" (0,596) hampir sama dengan model terbaik.</a:t>
+              <a:t>Model dibandingkan dengan validasi silang deret waktu (5 bagian) pada data latih.</a:t>
             </a:r>
           </a:p>
         </p:txBody>
@@ -3936,7 +4242,7 @@
                 </a:solidFill>
                 <a:latin typeface="Calibri"/>
               </a:rPr>
-              <a:t>Evaluasi dengan data uji</a:t>
+              <a:t>Membangun model</a:t>
             </a:r>
           </a:p>
         </p:txBody>
@@ -4019,7 +4325,7 @@
                 </a:solidFill>
                 <a:latin typeface="Calibri"/>
               </a:rPr>
-              <a:t>Unit 10</a:t>
+              <a:t>Unit 9</a:t>
             </a:r>
           </a:p>
         </p:txBody>
@@ -4142,6 +4448,470 @@
                 <a:latin typeface="Calibri"/>
               </a:rPr>
               <a:t>11</a:t>
+            </a:r>
+          </a:p>
+        </p:txBody>
+      </p:sp>
+      <p:pic>
+        <p:nvPicPr>
+          <p:cNvPr id="9" name="Picture 8" descr="09_perbandingan_model.png"/>
+          <p:cNvPicPr>
+            <a:picLocks noChangeAspect="1"/>
+          </p:cNvPicPr>
+          <p:nvPr/>
+        </p:nvPicPr>
+        <p:blipFill>
+          <a:blip r:embed="rId2"/>
+          <a:stretch>
+            <a:fillRect/>
+          </a:stretch>
+        </p:blipFill>
+        <p:spPr>
+          <a:xfrm>
+            <a:off x="411480" y="1256607"/>
+            <a:ext cx="6949440" cy="3247505"/>
+          </a:xfrm>
+          <a:prstGeom prst="rect">
+            <a:avLst/>
+          </a:prstGeom>
+        </p:spPr>
+      </p:pic>
+      <p:sp>
+        <p:nvSpPr>
+          <p:cNvPr id="10" name="TextBox 9"/>
+          <p:cNvSpPr txBox="1"/>
+          <p:nvPr/>
+        </p:nvSpPr>
+        <p:spPr>
+          <a:xfrm>
+            <a:off x="7635240" y="1325880"/>
+            <a:ext cx="4160520" cy="4114800"/>
+          </a:xfrm>
+          <a:prstGeom prst="rect">
+            <a:avLst/>
+          </a:prstGeom>
+          <a:noFill/>
+        </p:spPr>
+        <p:txBody>
+          <a:bodyPr wrap="square" anchor="t">
+            <a:spAutoFit/>
+          </a:bodyPr>
+          <a:lstStyle/>
+          <a:p>
+            <a:pPr algn="l">
+              <a:spcAft>
+                <a:spcPts val="800"/>
+              </a:spcAft>
+            </a:pPr>
+            <a:r>
+              <a:rPr sz="1000" b="0">
+                <a:solidFill>
+                  <a:srgbClr val="E08214"/>
+                </a:solidFill>
+                <a:latin typeface="Calibri"/>
+              </a:rPr>
+              <a:t>■  </a:t>
+            </a:r>
+            <a:r>
+              <a:rPr sz="1600" b="1">
+                <a:solidFill>
+                  <a:srgbClr val="222B38"/>
+                </a:solidFill>
+                <a:latin typeface="Calibri"/>
+              </a:rPr>
+              <a:t>Logistic Regression </a:t>
+            </a:r>
+            <a:r>
+              <a:rPr sz="1600" b="0">
+                <a:solidFill>
+                  <a:srgbClr val="222B38"/>
+                </a:solidFill>
+                <a:latin typeface="Calibri"/>
+              </a:rPr>
+              <a:t>dipilih (accuracy validasi </a:t>
+            </a:r>
+            <a:r>
+              <a:rPr sz="1600" b="1">
+                <a:solidFill>
+                  <a:srgbClr val="222B38"/>
+                </a:solidFill>
+                <a:latin typeface="Calibri"/>
+              </a:rPr>
+              <a:t>0,599</a:t>
+            </a:r>
+            <a:r>
+              <a:rPr sz="1600" b="0">
+                <a:solidFill>
+                  <a:srgbClr val="222B38"/>
+                </a:solidFill>
+                <a:latin typeface="Calibri"/>
+              </a:rPr>
+              <a:t>).</a:t>
+            </a:r>
+          </a:p>
+          <a:p>
+            <a:pPr algn="l">
+              <a:spcAft>
+                <a:spcPts val="800"/>
+              </a:spcAft>
+            </a:pPr>
+            <a:r>
+              <a:rPr sz="1000" b="0">
+                <a:solidFill>
+                  <a:srgbClr val="E08214"/>
+                </a:solidFill>
+                <a:latin typeface="Calibri"/>
+              </a:rPr>
+              <a:t>■  </a:t>
+            </a:r>
+            <a:r>
+              <a:rPr sz="1600" b="0">
+                <a:solidFill>
+                  <a:srgbClr val="222B38"/>
+                </a:solidFill>
+                <a:latin typeface="Calibri"/>
+              </a:rPr>
+              <a:t>Random Forest hampir sama baiknya (0,594).</a:t>
+            </a:r>
+          </a:p>
+          <a:p>
+            <a:pPr algn="l">
+              <a:spcAft>
+                <a:spcPts val="800"/>
+              </a:spcAft>
+            </a:pPr>
+            <a:r>
+              <a:rPr sz="1000" b="0">
+                <a:solidFill>
+                  <a:srgbClr val="E08214"/>
+                </a:solidFill>
+                <a:latin typeface="Calibri"/>
+              </a:rPr>
+              <a:t>■  </a:t>
+            </a:r>
+            <a:r>
+              <a:rPr sz="1600" b="1">
+                <a:solidFill>
+                  <a:srgbClr val="D73027"/>
+                </a:solidFill>
+                <a:latin typeface="Calibri"/>
+              </a:rPr>
+              <a:t>Catatan jujur: </a:t>
+            </a:r>
+            <a:r>
+              <a:rPr sz="1600" b="0">
+                <a:solidFill>
+                  <a:srgbClr val="222B38"/>
+                </a:solidFill>
+                <a:latin typeface="Calibri"/>
+              </a:rPr>
+              <a:t>aturan sederhana "ikuti S&amp;P 500" (0,596) hampir sama dengan model terbaik.</a:t>
+            </a:r>
+          </a:p>
+        </p:txBody>
+      </p:sp>
+    </p:spTree>
+  </p:cSld>
+  <p:clrMapOvr>
+    <a:masterClrMapping/>
+  </p:clrMapOvr>
+</p:sld>
+</file>
+
+<file path=ppt/slides/slide12.xml><?xml version="1.0" encoding="utf-8"?>
+<p:sld xmlns:a="http://schemas.openxmlformats.org/drawingml/2006/main" xmlns:p="http://schemas.openxmlformats.org/presentationml/2006/main" xmlns:r="http://schemas.openxmlformats.org/officeDocument/2006/relationships">
+  <p:cSld>
+    <p:spTree>
+      <p:nvGrpSpPr>
+        <p:cNvPr id="1" name=""/>
+        <p:cNvGrpSpPr/>
+        <p:nvPr/>
+      </p:nvGrpSpPr>
+      <p:grpSpPr/>
+      <p:sp>
+        <p:nvSpPr>
+          <p:cNvPr id="2" name="Rectangle 1"/>
+          <p:cNvSpPr/>
+          <p:nvPr/>
+        </p:nvSpPr>
+        <p:spPr>
+          <a:xfrm>
+            <a:off x="0" y="0"/>
+            <a:ext cx="109728" cy="6858000"/>
+          </a:xfrm>
+          <a:prstGeom prst="rect">
+            <a:avLst/>
+          </a:prstGeom>
+          <a:solidFill>
+            <a:srgbClr val="1F3A5F"/>
+          </a:solidFill>
+          <a:ln>
+            <a:noFill/>
+          </a:ln>
+          <a:effectLst/>
+        </p:spPr>
+        <p:style>
+          <a:lnRef idx="1">
+            <a:schemeClr val="accent1"/>
+          </a:lnRef>
+          <a:fillRef idx="3">
+            <a:schemeClr val="accent1"/>
+          </a:fillRef>
+          <a:effectRef idx="2">
+            <a:schemeClr val="accent1"/>
+          </a:effectRef>
+          <a:fontRef idx="minor">
+            <a:schemeClr val="lt1"/>
+          </a:fontRef>
+        </p:style>
+        <p:txBody>
+          <a:bodyPr rtlCol="0" anchor="ctr"/>
+          <a:lstStyle/>
+          <a:p>
+            <a:pPr algn="ctr"/>
+          </a:p>
+        </p:txBody>
+      </p:sp>
+      <p:sp>
+        <p:nvSpPr>
+          <p:cNvPr id="3" name="TextBox 2"/>
+          <p:cNvSpPr txBox="1"/>
+          <p:nvPr/>
+        </p:nvSpPr>
+        <p:spPr>
+          <a:xfrm>
+            <a:off x="411480" y="292608"/>
+            <a:ext cx="9144000" cy="640080"/>
+          </a:xfrm>
+          <a:prstGeom prst="rect">
+            <a:avLst/>
+          </a:prstGeom>
+          <a:noFill/>
+        </p:spPr>
+        <p:txBody>
+          <a:bodyPr wrap="square" anchor="t">
+            <a:spAutoFit/>
+          </a:bodyPr>
+          <a:lstStyle/>
+          <a:p>
+            <a:pPr algn="l">
+              <a:spcAft>
+                <a:spcPts val="800"/>
+              </a:spcAft>
+            </a:pPr>
+            <a:r>
+              <a:rPr sz="2800" b="1">
+                <a:solidFill>
+                  <a:srgbClr val="1F3A5F"/>
+                </a:solidFill>
+                <a:latin typeface="Calibri"/>
+              </a:rPr>
+              <a:t>Evaluasi dengan data uji</a:t>
+            </a:r>
+          </a:p>
+        </p:txBody>
+      </p:sp>
+      <p:sp>
+        <p:nvSpPr>
+          <p:cNvPr id="4" name="Rounded Rectangle 3"/>
+          <p:cNvSpPr/>
+          <p:nvPr/>
+        </p:nvSpPr>
+        <p:spPr>
+          <a:xfrm>
+            <a:off x="9692640" y="365760"/>
+            <a:ext cx="2103120" cy="411480"/>
+          </a:xfrm>
+          <a:prstGeom prst="roundRect">
+            <a:avLst/>
+          </a:prstGeom>
+          <a:solidFill>
+            <a:srgbClr val="F3F5F9"/>
+          </a:solidFill>
+          <a:ln>
+            <a:noFill/>
+          </a:ln>
+          <a:effectLst/>
+        </p:spPr>
+        <p:style>
+          <a:lnRef idx="1">
+            <a:schemeClr val="accent1"/>
+          </a:lnRef>
+          <a:fillRef idx="3">
+            <a:schemeClr val="accent1"/>
+          </a:fillRef>
+          <a:effectRef idx="2">
+            <a:schemeClr val="accent1"/>
+          </a:effectRef>
+          <a:fontRef idx="minor">
+            <a:schemeClr val="lt1"/>
+          </a:fontRef>
+        </p:style>
+        <p:txBody>
+          <a:bodyPr rtlCol="0" anchor="ctr"/>
+          <a:lstStyle/>
+          <a:p>
+            <a:pPr algn="ctr"/>
+          </a:p>
+        </p:txBody>
+      </p:sp>
+      <p:sp>
+        <p:nvSpPr>
+          <p:cNvPr id="5" name="TextBox 4"/>
+          <p:cNvSpPr txBox="1"/>
+          <p:nvPr/>
+        </p:nvSpPr>
+        <p:spPr>
+          <a:xfrm>
+            <a:off x="9692640" y="365760"/>
+            <a:ext cx="2103120" cy="411480"/>
+          </a:xfrm>
+          <a:prstGeom prst="rect">
+            <a:avLst/>
+          </a:prstGeom>
+          <a:noFill/>
+        </p:spPr>
+        <p:txBody>
+          <a:bodyPr wrap="square" anchor="ctr">
+            <a:spAutoFit/>
+          </a:bodyPr>
+          <a:lstStyle/>
+          <a:p>
+            <a:pPr algn="ctr">
+              <a:spcAft>
+                <a:spcPts val="800"/>
+              </a:spcAft>
+            </a:pPr>
+            <a:r>
+              <a:rPr sz="1300" b="1">
+                <a:solidFill>
+                  <a:srgbClr val="E08214"/>
+                </a:solidFill>
+                <a:latin typeface="Calibri"/>
+              </a:rPr>
+              <a:t>Unit 10</a:t>
+            </a:r>
+          </a:p>
+        </p:txBody>
+      </p:sp>
+      <p:sp>
+        <p:nvSpPr>
+          <p:cNvPr id="6" name="Rectangle 5"/>
+          <p:cNvSpPr/>
+          <p:nvPr/>
+        </p:nvSpPr>
+        <p:spPr>
+          <a:xfrm>
+            <a:off x="411480" y="960120"/>
+            <a:ext cx="11384280" cy="27432"/>
+          </a:xfrm>
+          <a:prstGeom prst="rect">
+            <a:avLst/>
+          </a:prstGeom>
+          <a:solidFill>
+            <a:srgbClr val="E08214"/>
+          </a:solidFill>
+          <a:ln>
+            <a:noFill/>
+          </a:ln>
+          <a:effectLst/>
+        </p:spPr>
+        <p:style>
+          <a:lnRef idx="1">
+            <a:schemeClr val="accent1"/>
+          </a:lnRef>
+          <a:fillRef idx="3">
+            <a:schemeClr val="accent1"/>
+          </a:fillRef>
+          <a:effectRef idx="2">
+            <a:schemeClr val="accent1"/>
+          </a:effectRef>
+          <a:fontRef idx="minor">
+            <a:schemeClr val="lt1"/>
+          </a:fontRef>
+        </p:style>
+        <p:txBody>
+          <a:bodyPr rtlCol="0" anchor="ctr"/>
+          <a:lstStyle/>
+          <a:p>
+            <a:pPr algn="ctr"/>
+          </a:p>
+        </p:txBody>
+      </p:sp>
+      <p:sp>
+        <p:nvSpPr>
+          <p:cNvPr id="7" name="TextBox 6"/>
+          <p:cNvSpPr txBox="1"/>
+          <p:nvPr/>
+        </p:nvSpPr>
+        <p:spPr>
+          <a:xfrm>
+            <a:off x="411480" y="6446520"/>
+            <a:ext cx="8229600" cy="274320"/>
+          </a:xfrm>
+          <a:prstGeom prst="rect">
+            <a:avLst/>
+          </a:prstGeom>
+          <a:noFill/>
+        </p:spPr>
+        <p:txBody>
+          <a:bodyPr wrap="square" anchor="t">
+            <a:spAutoFit/>
+          </a:bodyPr>
+          <a:lstStyle/>
+          <a:p>
+            <a:pPr algn="l">
+              <a:spcAft>
+                <a:spcPts val="800"/>
+              </a:spcAft>
+            </a:pPr>
+            <a:r>
+              <a:rPr sz="1000" b="0">
+                <a:solidFill>
+                  <a:srgbClr val="5A6778"/>
+                </a:solidFill>
+                <a:latin typeface="Calibri"/>
+              </a:rPr>
+              <a:t>Prediksi Arah Harian IHSG · M. Syamsuddin Wisnubroto</a:t>
+            </a:r>
+          </a:p>
+        </p:txBody>
+      </p:sp>
+      <p:sp>
+        <p:nvSpPr>
+          <p:cNvPr id="8" name="TextBox 7"/>
+          <p:cNvSpPr txBox="1"/>
+          <p:nvPr/>
+        </p:nvSpPr>
+        <p:spPr>
+          <a:xfrm>
+            <a:off x="11155680" y="6446520"/>
+            <a:ext cx="640080" cy="274320"/>
+          </a:xfrm>
+          <a:prstGeom prst="rect">
+            <a:avLst/>
+          </a:prstGeom>
+          <a:noFill/>
+        </p:spPr>
+        <p:txBody>
+          <a:bodyPr wrap="square" anchor="t">
+            <a:spAutoFit/>
+          </a:bodyPr>
+          <a:lstStyle/>
+          <a:p>
+            <a:pPr algn="r">
+              <a:spcAft>
+                <a:spcPts val="800"/>
+              </a:spcAft>
+            </a:pPr>
+            <a:r>
+              <a:rPr sz="1000" b="0">
+                <a:solidFill>
+                  <a:srgbClr val="5A6778"/>
+                </a:solidFill>
+                <a:latin typeface="Calibri"/>
+              </a:rPr>
+              <a:t>12</a:t>
             </a:r>
           </a:p>
         </p:txBody>
@@ -5124,7 +5894,7 @@
 </p:sld>
 </file>
 
-<file path=ppt/slides/slide12.xml><?xml version="1.0" encoding="utf-8"?>
+<file path=ppt/slides/slide13.xml><?xml version="1.0" encoding="utf-8"?>
 <p:sld xmlns:a="http://schemas.openxmlformats.org/drawingml/2006/main" xmlns:p="http://schemas.openxmlformats.org/presentationml/2006/main" xmlns:r="http://schemas.openxmlformats.org/officeDocument/2006/relationships">
   <p:cSld>
     <p:spTree>
@@ -5417,7 +6187,7 @@
                 </a:solidFill>
                 <a:latin typeface="Calibri"/>
               </a:rPr>
-              <a:t>12</a:t>
+              <a:t>13</a:t>
             </a:r>
           </a:p>
         </p:txBody>
@@ -6162,7 +6932,7 @@
 </p:sld>
 </file>
 
-<file path=ppt/slides/slide13.xml><?xml version="1.0" encoding="utf-8"?>
+<file path=ppt/slides/slide14.xml><?xml version="1.0" encoding="utf-8"?>
 <p:sld xmlns:a="http://schemas.openxmlformats.org/drawingml/2006/main" xmlns:p="http://schemas.openxmlformats.org/presentationml/2006/main" xmlns:r="http://schemas.openxmlformats.org/officeDocument/2006/relationships">
   <p:cSld>
     <p:spTree>
@@ -7778,7 +8548,7 @@
                 </a:solidFill>
                 <a:latin typeface="Calibri"/>
               </a:rPr>
-              <a:t>11 unit kompetensi</a:t>
+              <a:t>Mengenal variabel pasar</a:t>
             </a:r>
           </a:p>
         </p:txBody>
@@ -7915,7 +8685,7 @@
         </p:nvGraphicFramePr>
         <p:xfrm>
           <a:off x="411480" y="1188720"/>
-          <a:ext cx="11384280" cy="4937760"/>
+          <a:ext cx="11384280" cy="3401568"/>
         </p:xfrm>
         <a:graphic>
           <a:graphicData uri="http://schemas.openxmlformats.org/drawingml/2006/table">
@@ -7924,11 +8694,12 @@
                 <a:tableStyleId>{5C22544A-7EE6-4342-B048-85BDC9FD1C3A}</a:tableStyleId>
               </a:tblPr>
               <a:tblGrid>
-                <a:gridCol w="822960"/>
-                <a:gridCol w="4389120"/>
-                <a:gridCol w="6172200"/>
+                <a:gridCol w="1463040"/>
+                <a:gridCol w="3931920"/>
+                <a:gridCol w="2514600"/>
+                <a:gridCol w="3474720"/>
               </a:tblGrid>
-              <a:tr h="411480">
+              <a:tr h="566928">
                 <a:tc>
                   <a:txBody>
                     <a:bodyPr/>
@@ -7941,7 +8712,7 @@
                           </a:solidFill>
                           <a:latin typeface="Calibri"/>
                         </a:rPr>
-                        <a:t>Unit</a:t>
+                        <a:t>Variabel</a:t>
                       </a:r>
                     </a:p>
                   </a:txBody>
@@ -7963,7 +8734,7 @@
                           </a:solidFill>
                           <a:latin typeface="Calibri"/>
                         </a:rPr>
-                        <a:t>Kompetensi</a:t>
+                        <a:t>Apa itu?</a:t>
                       </a:r>
                     </a:p>
                   </a:txBody>
@@ -7985,7 +8756,7 @@
                           </a:solidFill>
                           <a:latin typeface="Calibri"/>
                         </a:rPr>
-                        <a:t>Yang dilakukan</a:t>
+                        <a:t>Satuan</a:t>
                       </a:r>
                     </a:p>
                   </a:txBody>
@@ -7995,8 +8766,30 @@
                     </a:solidFill>
                   </a:tcPr>
                 </a:tc>
+                <a:tc>
+                  <a:txBody>
+                    <a:bodyPr/>
+                    <a:lstStyle/>
+                    <a:p>
+                      <a:r>
+                        <a:rPr sz="1300" b="1">
+                          <a:solidFill>
+                            <a:srgbClr val="FFFFFF"/>
+                          </a:solidFill>
+                          <a:latin typeface="Calibri"/>
+                        </a:rPr>
+                        <a:t>Kaitan dengan IHSG</a:t>
+                      </a:r>
+                    </a:p>
+                  </a:txBody>
+                  <a:tcPr anchor="ctr" marL="73152" marR="73152">
+                    <a:solidFill>
+                      <a:srgbClr val="1F3A5F"/>
+                    </a:solidFill>
+                  </a:tcPr>
+                </a:tc>
               </a:tr>
-              <a:tr h="411480">
+              <a:tr h="566928">
                 <a:tc>
                   <a:txBody>
                     <a:bodyPr/>
@@ -8009,7 +8802,7 @@
                           </a:solidFill>
                           <a:latin typeface="Calibri"/>
                         </a:rPr>
-                        <a:t>1</a:t>
+                        <a:t>IHSG</a:t>
                       </a:r>
                     </a:p>
                   </a:txBody>
@@ -8031,7 +8824,7 @@
                           </a:solidFill>
                           <a:latin typeface="Calibri"/>
                         </a:rPr>
-                        <a:t>Menentukan Objektif Bisnis</a:t>
+                        <a:t>Indeks seluruh saham di Bursa Efek Indonesia</a:t>
                       </a:r>
                     </a:p>
                   </a:txBody>
@@ -8053,7 +8846,7 @@
                           </a:solidFill>
                           <a:latin typeface="Calibri"/>
                         </a:rPr>
-                        <a:t>Pertanyaan bisnis, pengguna, kriteria berhasil</a:t>
+                        <a:t>poin indeks</a:t>
                       </a:r>
                     </a:p>
                   </a:txBody>
@@ -8063,8 +8856,30 @@
                     </a:solidFill>
                   </a:tcPr>
                 </a:tc>
+                <a:tc>
+                  <a:txBody>
+                    <a:bodyPr/>
+                    <a:lstStyle/>
+                    <a:p>
+                      <a:r>
+                        <a:rPr sz="1300" b="0">
+                          <a:solidFill>
+                            <a:srgbClr val="222B38"/>
+                          </a:solidFill>
+                          <a:latin typeface="Calibri"/>
+                        </a:rPr>
+                        <a:t>Yang ditebak: naik/turun besok</a:t>
+                      </a:r>
+                    </a:p>
+                  </a:txBody>
+                  <a:tcPr anchor="ctr" marL="73152" marR="73152">
+                    <a:solidFill>
+                      <a:srgbClr val="FFFFFF"/>
+                    </a:solidFill>
+                  </a:tcPr>
+                </a:tc>
               </a:tr>
-              <a:tr h="411480">
+              <a:tr h="566928">
                 <a:tc>
                   <a:txBody>
                     <a:bodyPr/>
@@ -8077,7 +8892,7 @@
                           </a:solidFill>
                           <a:latin typeface="Calibri"/>
                         </a:rPr>
-                        <a:t>2</a:t>
+                        <a:t>S&amp;P 500</a:t>
                       </a:r>
                     </a:p>
                   </a:txBody>
@@ -8099,7 +8914,7 @@
                           </a:solidFill>
                           <a:latin typeface="Calibri"/>
                         </a:rPr>
-                        <a:t>Menentukan Tujuan Teknis</a:t>
+                        <a:t>Indeks 500 perusahaan terbesar Amerika Serikat</a:t>
                       </a:r>
                     </a:p>
                   </a:txBody>
@@ -8121,7 +8936,7 @@
                           </a:solidFill>
                           <a:latin typeface="Calibri"/>
                         </a:rPr>
-                        <a:t>Klasifikasi naik/turun, target ukuran</a:t>
+                        <a:t>poin indeks</a:t>
                       </a:r>
                     </a:p>
                   </a:txBody>
@@ -8131,8 +8946,30 @@
                     </a:solidFill>
                   </a:tcPr>
                 </a:tc>
+                <a:tc>
+                  <a:txBody>
+                    <a:bodyPr/>
+                    <a:lstStyle/>
+                    <a:p>
+                      <a:r>
+                        <a:rPr sz="1300" b="0">
+                          <a:solidFill>
+                            <a:srgbClr val="222B38"/>
+                          </a:solidFill>
+                          <a:latin typeface="Calibri"/>
+                        </a:rPr>
+                        <a:t>Bursa AS buka setelah BEI tutup → informasi baru</a:t>
+                      </a:r>
+                    </a:p>
+                  </a:txBody>
+                  <a:tcPr anchor="ctr" marL="73152" marR="73152">
+                    <a:solidFill>
+                      <a:srgbClr val="F3F5F9"/>
+                    </a:solidFill>
+                  </a:tcPr>
+                </a:tc>
               </a:tr>
-              <a:tr h="411480">
+              <a:tr h="566928">
                 <a:tc>
                   <a:txBody>
                     <a:bodyPr/>
@@ -8145,7 +8982,7 @@
                           </a:solidFill>
                           <a:latin typeface="Calibri"/>
                         </a:rPr>
-                        <a:t>3</a:t>
+                        <a:t>VIX</a:t>
                       </a:r>
                     </a:p>
                   </a:txBody>
@@ -8167,7 +9004,7 @@
                           </a:solidFill>
                           <a:latin typeface="Calibri"/>
                         </a:rPr>
-                        <a:t>Menelaah Data</a:t>
+                        <a:t>"Indeks ketakutan" pasar saham AS (bursa Cboe)</a:t>
                       </a:r>
                     </a:p>
                   </a:txBody>
@@ -8189,7 +9026,7 @@
                           </a:solidFill>
                           <a:latin typeface="Calibri"/>
                         </a:rPr>
-                        <a:t>Grafik, statistik, korelasi</a:t>
+                        <a:t>poin; &lt; 20 tenang, &gt; 30 cemas</a:t>
                       </a:r>
                     </a:p>
                   </a:txBody>
@@ -8199,8 +9036,30 @@
                     </a:solidFill>
                   </a:tcPr>
                 </a:tc>
+                <a:tc>
+                  <a:txBody>
+                    <a:bodyPr/>
+                    <a:lstStyle/>
+                    <a:p>
+                      <a:r>
+                        <a:rPr sz="1300" b="0">
+                          <a:solidFill>
+                            <a:srgbClr val="222B38"/>
+                          </a:solidFill>
+                          <a:latin typeface="Calibri"/>
+                        </a:rPr>
+                        <a:t>VIX naik → investor menjual aset berisiko</a:t>
+                      </a:r>
+                    </a:p>
+                  </a:txBody>
+                  <a:tcPr anchor="ctr" marL="73152" marR="73152">
+                    <a:solidFill>
+                      <a:srgbClr val="FFFFFF"/>
+                    </a:solidFill>
+                  </a:tcPr>
+                </a:tc>
               </a:tr>
-              <a:tr h="411480">
+              <a:tr h="566928">
                 <a:tc>
                   <a:txBody>
                     <a:bodyPr/>
@@ -8213,7 +9072,7 @@
                           </a:solidFill>
                           <a:latin typeface="Calibri"/>
                         </a:rPr>
-                        <a:t>4</a:t>
+                        <a:t>Minyak (WTI)</a:t>
                       </a:r>
                     </a:p>
                   </a:txBody>
@@ -8235,7 +9094,7 @@
                           </a:solidFill>
                           <a:latin typeface="Calibri"/>
                         </a:rPr>
-                        <a:t>Memvalidasi Data</a:t>
+                        <a:t>Harga kontrak berjangka minyak di bursa NYMEX</a:t>
                       </a:r>
                     </a:p>
                   </a:txBody>
@@ -8257,7 +9116,7 @@
                           </a:solidFill>
                           <a:latin typeface="Calibri"/>
                         </a:rPr>
-                        <a:t>Menemukan 3 jenis masalah data</a:t>
+                        <a:t>USD per barel</a:t>
                       </a:r>
                     </a:p>
                   </a:txBody>
@@ -8267,8 +9126,30 @@
                     </a:solidFill>
                   </a:tcPr>
                 </a:tc>
+                <a:tc>
+                  <a:txBody>
+                    <a:bodyPr/>
+                    <a:lstStyle/>
+                    <a:p>
+                      <a:r>
+                        <a:rPr sz="1300" b="0">
+                          <a:solidFill>
+                            <a:srgbClr val="222B38"/>
+                          </a:solidFill>
+                          <a:latin typeface="Calibri"/>
+                        </a:rPr>
+                        <a:t>Banyak saham energi &amp; tambang di BEI</a:t>
+                      </a:r>
+                    </a:p>
+                  </a:txBody>
+                  <a:tcPr anchor="ctr" marL="73152" marR="73152">
+                    <a:solidFill>
+                      <a:srgbClr val="F3F5F9"/>
+                    </a:solidFill>
+                  </a:tcPr>
+                </a:tc>
               </a:tr>
-              <a:tr h="411480">
+              <a:tr h="566928">
                 <a:tc>
                   <a:txBody>
                     <a:bodyPr/>
@@ -8281,7 +9162,7 @@
                           </a:solidFill>
                           <a:latin typeface="Calibri"/>
                         </a:rPr>
-                        <a:t>5</a:t>
+                        <a:t>Emas</a:t>
                       </a:r>
                     </a:p>
                   </a:txBody>
@@ -8303,7 +9184,7 @@
                           </a:solidFill>
                           <a:latin typeface="Calibri"/>
                         </a:rPr>
-                        <a:t>Menentukan Objek Data</a:t>
+                        <a:t>Harga kontrak berjangka emas di bursa COMEX</a:t>
                       </a:r>
                     </a:p>
                   </a:txBody>
@@ -8325,7 +9206,7 @@
                           </a:solidFill>
                           <a:latin typeface="Calibri"/>
                         </a:rPr>
-                        <a:t>Memilih 5 variabel dan target</a:t>
+                        <a:t>USD per troy ounce</a:t>
                       </a:r>
                     </a:p>
                   </a:txBody>
@@ -8335,8 +9216,6 @@
                     </a:solidFill>
                   </a:tcPr>
                 </a:tc>
-              </a:tr>
-              <a:tr h="411480">
                 <a:tc>
                   <a:txBody>
                     <a:bodyPr/>
@@ -8349,391 +9228,7 @@
                           </a:solidFill>
                           <a:latin typeface="Calibri"/>
                         </a:rPr>
-                        <a:t>6</a:t>
-                      </a:r>
-                    </a:p>
-                  </a:txBody>
-                  <a:tcPr anchor="ctr" marL="73152" marR="73152">
-                    <a:solidFill>
-                      <a:srgbClr val="F3F5F9"/>
-                    </a:solidFill>
-                  </a:tcPr>
-                </a:tc>
-                <a:tc>
-                  <a:txBody>
-                    <a:bodyPr/>
-                    <a:lstStyle/>
-                    <a:p>
-                      <a:r>
-                        <a:rPr sz="1300" b="0">
-                          <a:solidFill>
-                            <a:srgbClr val="222B38"/>
-                          </a:solidFill>
-                          <a:latin typeface="Calibri"/>
-                        </a:rPr>
-                        <a:t>Membersihkan Data</a:t>
-                      </a:r>
-                    </a:p>
-                  </a:txBody>
-                  <a:tcPr anchor="ctr" marL="73152" marR="73152">
-                    <a:solidFill>
-                      <a:srgbClr val="F3F5F9"/>
-                    </a:solidFill>
-                  </a:tcPr>
-                </a:tc>
-                <a:tc>
-                  <a:txBody>
-                    <a:bodyPr/>
-                    <a:lstStyle/>
-                    <a:p>
-                      <a:r>
-                        <a:rPr sz="1300" b="0">
-                          <a:solidFill>
-                            <a:srgbClr val="222B38"/>
-                          </a:solidFill>
-                          <a:latin typeface="Calibri"/>
-                        </a:rPr>
-                        <a:t>3 langkah perbaikan</a:t>
-                      </a:r>
-                    </a:p>
-                  </a:txBody>
-                  <a:tcPr anchor="ctr" marL="73152" marR="73152">
-                    <a:solidFill>
-                      <a:srgbClr val="F3F5F9"/>
-                    </a:solidFill>
-                  </a:tcPr>
-                </a:tc>
-              </a:tr>
-              <a:tr h="411480">
-                <a:tc>
-                  <a:txBody>
-                    <a:bodyPr/>
-                    <a:lstStyle/>
-                    <a:p>
-                      <a:r>
-                        <a:rPr sz="1300" b="0">
-                          <a:solidFill>
-                            <a:srgbClr val="222B38"/>
-                          </a:solidFill>
-                          <a:latin typeface="Calibri"/>
-                        </a:rPr>
-                        <a:t>7</a:t>
-                      </a:r>
-                    </a:p>
-                  </a:txBody>
-                  <a:tcPr anchor="ctr" marL="73152" marR="73152">
-                    <a:solidFill>
-                      <a:srgbClr val="FFFFFF"/>
-                    </a:solidFill>
-                  </a:tcPr>
-                </a:tc>
-                <a:tc>
-                  <a:txBody>
-                    <a:bodyPr/>
-                    <a:lstStyle/>
-                    <a:p>
-                      <a:r>
-                        <a:rPr sz="1300" b="0">
-                          <a:solidFill>
-                            <a:srgbClr val="222B38"/>
-                          </a:solidFill>
-                          <a:latin typeface="Calibri"/>
-                        </a:rPr>
-                        <a:t>Mengkonstruksi Data</a:t>
-                      </a:r>
-                    </a:p>
-                  </a:txBody>
-                  <a:tcPr anchor="ctr" marL="73152" marR="73152">
-                    <a:solidFill>
-                      <a:srgbClr val="FFFFFF"/>
-                    </a:solidFill>
-                  </a:tcPr>
-                </a:tc>
-                <a:tc>
-                  <a:txBody>
-                    <a:bodyPr/>
-                    <a:lstStyle/>
-                    <a:p>
-                      <a:r>
-                        <a:rPr sz="1300" b="0">
-                          <a:solidFill>
-                            <a:srgbClr val="222B38"/>
-                          </a:solidFill>
-                          <a:latin typeface="Calibri"/>
-                        </a:rPr>
-                        <a:t>5 fitur, data latih 80% &amp; uji 20%</a:t>
-                      </a:r>
-                    </a:p>
-                  </a:txBody>
-                  <a:tcPr anchor="ctr" marL="73152" marR="73152">
-                    <a:solidFill>
-                      <a:srgbClr val="FFFFFF"/>
-                    </a:solidFill>
-                  </a:tcPr>
-                </a:tc>
-              </a:tr>
-              <a:tr h="411480">
-                <a:tc>
-                  <a:txBody>
-                    <a:bodyPr/>
-                    <a:lstStyle/>
-                    <a:p>
-                      <a:r>
-                        <a:rPr sz="1300" b="0">
-                          <a:solidFill>
-                            <a:srgbClr val="222B38"/>
-                          </a:solidFill>
-                          <a:latin typeface="Calibri"/>
-                        </a:rPr>
-                        <a:t>8</a:t>
-                      </a:r>
-                    </a:p>
-                  </a:txBody>
-                  <a:tcPr anchor="ctr" marL="73152" marR="73152">
-                    <a:solidFill>
-                      <a:srgbClr val="F3F5F9"/>
-                    </a:solidFill>
-                  </a:tcPr>
-                </a:tc>
-                <a:tc>
-                  <a:txBody>
-                    <a:bodyPr/>
-                    <a:lstStyle/>
-                    <a:p>
-                      <a:r>
-                        <a:rPr sz="1300" b="0">
-                          <a:solidFill>
-                            <a:srgbClr val="222B38"/>
-                          </a:solidFill>
-                          <a:latin typeface="Calibri"/>
-                        </a:rPr>
-                        <a:t>Membangun Skenario Model</a:t>
-                      </a:r>
-                    </a:p>
-                  </a:txBody>
-                  <a:tcPr anchor="ctr" marL="73152" marR="73152">
-                    <a:solidFill>
-                      <a:srgbClr val="F3F5F9"/>
-                    </a:solidFill>
-                  </a:tcPr>
-                </a:tc>
-                <a:tc>
-                  <a:txBody>
-                    <a:bodyPr/>
-                    <a:lstStyle/>
-                    <a:p>
-                      <a:r>
-                        <a:rPr sz="1300" b="0">
-                          <a:solidFill>
-                            <a:srgbClr val="222B38"/>
-                          </a:solidFill>
-                          <a:latin typeface="Calibri"/>
-                        </a:rPr>
-                        <a:t>2 baseline + 3 model</a:t>
-                      </a:r>
-                    </a:p>
-                  </a:txBody>
-                  <a:tcPr anchor="ctr" marL="73152" marR="73152">
-                    <a:solidFill>
-                      <a:srgbClr val="F3F5F9"/>
-                    </a:solidFill>
-                  </a:tcPr>
-                </a:tc>
-              </a:tr>
-              <a:tr h="411480">
-                <a:tc>
-                  <a:txBody>
-                    <a:bodyPr/>
-                    <a:lstStyle/>
-                    <a:p>
-                      <a:r>
-                        <a:rPr sz="1300" b="0">
-                          <a:solidFill>
-                            <a:srgbClr val="222B38"/>
-                          </a:solidFill>
-                          <a:latin typeface="Calibri"/>
-                        </a:rPr>
-                        <a:t>9</a:t>
-                      </a:r>
-                    </a:p>
-                  </a:txBody>
-                  <a:tcPr anchor="ctr" marL="73152" marR="73152">
-                    <a:solidFill>
-                      <a:srgbClr val="FFFFFF"/>
-                    </a:solidFill>
-                  </a:tcPr>
-                </a:tc>
-                <a:tc>
-                  <a:txBody>
-                    <a:bodyPr/>
-                    <a:lstStyle/>
-                    <a:p>
-                      <a:r>
-                        <a:rPr sz="1300" b="0">
-                          <a:solidFill>
-                            <a:srgbClr val="222B38"/>
-                          </a:solidFill>
-                          <a:latin typeface="Calibri"/>
-                        </a:rPr>
-                        <a:t>Membangun Model</a:t>
-                      </a:r>
-                    </a:p>
-                  </a:txBody>
-                  <a:tcPr anchor="ctr" marL="73152" marR="73152">
-                    <a:solidFill>
-                      <a:srgbClr val="FFFFFF"/>
-                    </a:solidFill>
-                  </a:tcPr>
-                </a:tc>
-                <a:tc>
-                  <a:txBody>
-                    <a:bodyPr/>
-                    <a:lstStyle/>
-                    <a:p>
-                      <a:r>
-                        <a:rPr sz="1300" b="0">
-                          <a:solidFill>
-                            <a:srgbClr val="222B38"/>
-                          </a:solidFill>
-                          <a:latin typeface="Calibri"/>
-                        </a:rPr>
-                        <a:t>Validasi silang, pilih model terbaik</a:t>
-                      </a:r>
-                    </a:p>
-                  </a:txBody>
-                  <a:tcPr anchor="ctr" marL="73152" marR="73152">
-                    <a:solidFill>
-                      <a:srgbClr val="FFFFFF"/>
-                    </a:solidFill>
-                  </a:tcPr>
-                </a:tc>
-              </a:tr>
-              <a:tr h="411480">
-                <a:tc>
-                  <a:txBody>
-                    <a:bodyPr/>
-                    <a:lstStyle/>
-                    <a:p>
-                      <a:r>
-                        <a:rPr sz="1300" b="0">
-                          <a:solidFill>
-                            <a:srgbClr val="222B38"/>
-                          </a:solidFill>
-                          <a:latin typeface="Calibri"/>
-                        </a:rPr>
-                        <a:t>10</a:t>
-                      </a:r>
-                    </a:p>
-                  </a:txBody>
-                  <a:tcPr anchor="ctr" marL="73152" marR="73152">
-                    <a:solidFill>
-                      <a:srgbClr val="F3F5F9"/>
-                    </a:solidFill>
-                  </a:tcPr>
-                </a:tc>
-                <a:tc>
-                  <a:txBody>
-                    <a:bodyPr/>
-                    <a:lstStyle/>
-                    <a:p>
-                      <a:r>
-                        <a:rPr sz="1300" b="0">
-                          <a:solidFill>
-                            <a:srgbClr val="222B38"/>
-                          </a:solidFill>
-                          <a:latin typeface="Calibri"/>
-                        </a:rPr>
-                        <a:t>Mengevaluasi Hasil Pemodelan</a:t>
-                      </a:r>
-                    </a:p>
-                  </a:txBody>
-                  <a:tcPr anchor="ctr" marL="73152" marR="73152">
-                    <a:solidFill>
-                      <a:srgbClr val="F3F5F9"/>
-                    </a:solidFill>
-                  </a:tcPr>
-                </a:tc>
-                <a:tc>
-                  <a:txBody>
-                    <a:bodyPr/>
-                    <a:lstStyle/>
-                    <a:p>
-                      <a:r>
-                        <a:rPr sz="1300" b="0">
-                          <a:solidFill>
-                            <a:srgbClr val="222B38"/>
-                          </a:solidFill>
-                          <a:latin typeface="Calibri"/>
-                        </a:rPr>
-                        <a:t>Uji dengan data baru</a:t>
-                      </a:r>
-                    </a:p>
-                  </a:txBody>
-                  <a:tcPr anchor="ctr" marL="73152" marR="73152">
-                    <a:solidFill>
-                      <a:srgbClr val="F3F5F9"/>
-                    </a:solidFill>
-                  </a:tcPr>
-                </a:tc>
-              </a:tr>
-              <a:tr h="411480">
-                <a:tc>
-                  <a:txBody>
-                    <a:bodyPr/>
-                    <a:lstStyle/>
-                    <a:p>
-                      <a:r>
-                        <a:rPr sz="1300" b="0">
-                          <a:solidFill>
-                            <a:srgbClr val="222B38"/>
-                          </a:solidFill>
-                          <a:latin typeface="Calibri"/>
-                        </a:rPr>
-                        <a:t>11</a:t>
-                      </a:r>
-                    </a:p>
-                  </a:txBody>
-                  <a:tcPr anchor="ctr" marL="73152" marR="73152">
-                    <a:solidFill>
-                      <a:srgbClr val="FFFFFF"/>
-                    </a:solidFill>
-                  </a:tcPr>
-                </a:tc>
-                <a:tc>
-                  <a:txBody>
-                    <a:bodyPr/>
-                    <a:lstStyle/>
-                    <a:p>
-                      <a:r>
-                        <a:rPr sz="1300" b="0">
-                          <a:solidFill>
-                            <a:srgbClr val="222B38"/>
-                          </a:solidFill>
-                          <a:latin typeface="Calibri"/>
-                        </a:rPr>
-                        <a:t>Melakukan Review Pemodelan</a:t>
-                      </a:r>
-                    </a:p>
-                  </a:txBody>
-                  <a:tcPr anchor="ctr" marL="73152" marR="73152">
-                    <a:solidFill>
-                      <a:srgbClr val="FFFFFF"/>
-                    </a:solidFill>
-                  </a:tcPr>
-                </a:tc>
-                <a:tc>
-                  <a:txBody>
-                    <a:bodyPr/>
-                    <a:lstStyle/>
-                    <a:p>
-                      <a:r>
-                        <a:rPr sz="1300" b="0">
-                          <a:solidFill>
-                            <a:srgbClr val="222B38"/>
-                          </a:solidFill>
-                          <a:latin typeface="Calibri"/>
-                        </a:rPr>
-                        <a:t>Kelebihan, kekurangan, rencana</a:t>
+                        <a:t>Aset aman; cerminan sentimen global</a:t>
                       </a:r>
                     </a:p>
                   </a:txBody>
@@ -8748,6 +9243,149 @@
           </a:graphicData>
         </a:graphic>
       </p:graphicFrame>
+      <p:sp>
+        <p:nvSpPr>
+          <p:cNvPr id="8" name="Rectangle 7"/>
+          <p:cNvSpPr/>
+          <p:nvPr/>
+        </p:nvSpPr>
+        <p:spPr>
+          <a:xfrm>
+            <a:off x="411480" y="4800600"/>
+            <a:ext cx="11384280" cy="1280160"/>
+          </a:xfrm>
+          <a:prstGeom prst="rect">
+            <a:avLst/>
+          </a:prstGeom>
+          <a:solidFill>
+            <a:srgbClr val="F3F5F9"/>
+          </a:solidFill>
+          <a:ln>
+            <a:noFill/>
+          </a:ln>
+          <a:effectLst/>
+        </p:spPr>
+        <p:style>
+          <a:lnRef idx="1">
+            <a:schemeClr val="accent1"/>
+          </a:lnRef>
+          <a:fillRef idx="3">
+            <a:schemeClr val="accent1"/>
+          </a:fillRef>
+          <a:effectRef idx="2">
+            <a:schemeClr val="accent1"/>
+          </a:effectRef>
+          <a:fontRef idx="minor">
+            <a:schemeClr val="lt1"/>
+          </a:fontRef>
+        </p:style>
+        <p:txBody>
+          <a:bodyPr rtlCol="0" anchor="ctr"/>
+          <a:lstStyle/>
+          <a:p>
+            <a:pPr algn="ctr"/>
+          </a:p>
+        </p:txBody>
+      </p:sp>
+      <p:sp>
+        <p:nvSpPr>
+          <p:cNvPr id="9" name="Rectangle 8"/>
+          <p:cNvSpPr/>
+          <p:nvPr/>
+        </p:nvSpPr>
+        <p:spPr>
+          <a:xfrm>
+            <a:off x="411480" y="4800600"/>
+            <a:ext cx="64008" cy="1280160"/>
+          </a:xfrm>
+          <a:prstGeom prst="rect">
+            <a:avLst/>
+          </a:prstGeom>
+          <a:solidFill>
+            <a:srgbClr val="1F3A5F"/>
+          </a:solidFill>
+          <a:ln>
+            <a:noFill/>
+          </a:ln>
+          <a:effectLst/>
+        </p:spPr>
+        <p:style>
+          <a:lnRef idx="1">
+            <a:schemeClr val="accent1"/>
+          </a:lnRef>
+          <a:fillRef idx="3">
+            <a:schemeClr val="accent1"/>
+          </a:fillRef>
+          <a:effectRef idx="2">
+            <a:schemeClr val="accent1"/>
+          </a:effectRef>
+          <a:fontRef idx="minor">
+            <a:schemeClr val="lt1"/>
+          </a:fontRef>
+        </p:style>
+        <p:txBody>
+          <a:bodyPr rtlCol="0" anchor="ctr"/>
+          <a:lstStyle/>
+          <a:p>
+            <a:pPr algn="ctr"/>
+          </a:p>
+        </p:txBody>
+      </p:sp>
+      <p:sp>
+        <p:nvSpPr>
+          <p:cNvPr id="10" name="TextBox 9"/>
+          <p:cNvSpPr txBox="1"/>
+          <p:nvPr/>
+        </p:nvSpPr>
+        <p:spPr>
+          <a:xfrm>
+            <a:off x="640080" y="4910328"/>
+            <a:ext cx="11018519" cy="1097280"/>
+          </a:xfrm>
+          <a:prstGeom prst="rect">
+            <a:avLst/>
+          </a:prstGeom>
+          <a:noFill/>
+        </p:spPr>
+        <p:txBody>
+          <a:bodyPr wrap="square" anchor="t">
+            <a:spAutoFit/>
+          </a:bodyPr>
+          <a:lstStyle/>
+          <a:p>
+            <a:pPr algn="l">
+              <a:spcAft>
+                <a:spcPts val="800"/>
+              </a:spcAft>
+            </a:pPr>
+            <a:r>
+              <a:rPr sz="1600" b="1">
+                <a:solidFill>
+                  <a:srgbClr val="1F3A5F"/>
+                </a:solidFill>
+                <a:latin typeface="Calibri"/>
+              </a:rPr>
+              <a:t>Jam perdagangan (WIB)</a:t>
+            </a:r>
+          </a:p>
+          <a:p>
+            <a:pPr algn="l">
+              <a:spcAft>
+                <a:spcPts val="800"/>
+              </a:spcAft>
+            </a:pPr>
+            <a:r>
+              <a:rPr sz="1500" b="0">
+                <a:solidFill>
+                  <a:srgbClr val="222B38"/>
+                </a:solidFill>
+                <a:latin typeface="Calibri"/>
+              </a:rPr>
+              <a:t>BEI ±09.00–16.00 · Bursa AS ±20.30–03.00 (Maret–November) atau ±21.30–04.00 (November–Maret). Sumber data: Yahoo Finance (^JKSE, ^GSPC, ^VIX, CL=F, GC=F).</a:t>
+            </a:r>
+          </a:p>
+        </p:txBody>
+      </p:sp>
     </p:spTree>
   </p:cSld>
   <p:clrMapOvr>
@@ -8844,97 +9482,14 @@
                 </a:solidFill>
                 <a:latin typeface="Calibri"/>
               </a:rPr>
-              <a:t>Tujuan bisnis dan tujuan teknis</a:t>
-            </a:r>
-          </a:p>
-        </p:txBody>
-      </p:sp>
-      <p:sp>
-        <p:nvSpPr>
-          <p:cNvPr id="4" name="Rounded Rectangle 3"/>
-          <p:cNvSpPr/>
-          <p:nvPr/>
-        </p:nvSpPr>
-        <p:spPr>
-          <a:xfrm>
-            <a:off x="9692640" y="365760"/>
-            <a:ext cx="2103120" cy="411480"/>
-          </a:xfrm>
-          <a:prstGeom prst="roundRect">
-            <a:avLst/>
-          </a:prstGeom>
-          <a:solidFill>
-            <a:srgbClr val="F3F5F9"/>
-          </a:solidFill>
-          <a:ln>
-            <a:noFill/>
-          </a:ln>
-          <a:effectLst/>
-        </p:spPr>
-        <p:style>
-          <a:lnRef idx="1">
-            <a:schemeClr val="accent1"/>
-          </a:lnRef>
-          <a:fillRef idx="3">
-            <a:schemeClr val="accent1"/>
-          </a:fillRef>
-          <a:effectRef idx="2">
-            <a:schemeClr val="accent1"/>
-          </a:effectRef>
-          <a:fontRef idx="minor">
-            <a:schemeClr val="lt1"/>
-          </a:fontRef>
-        </p:style>
-        <p:txBody>
-          <a:bodyPr rtlCol="0" anchor="ctr"/>
-          <a:lstStyle/>
-          <a:p>
-            <a:pPr algn="ctr"/>
-          </a:p>
-        </p:txBody>
-      </p:sp>
-      <p:sp>
-        <p:nvSpPr>
-          <p:cNvPr id="5" name="TextBox 4"/>
-          <p:cNvSpPr txBox="1"/>
-          <p:nvPr/>
-        </p:nvSpPr>
-        <p:spPr>
-          <a:xfrm>
-            <a:off x="9692640" y="365760"/>
-            <a:ext cx="2103120" cy="411480"/>
-          </a:xfrm>
-          <a:prstGeom prst="rect">
-            <a:avLst/>
-          </a:prstGeom>
-          <a:noFill/>
-        </p:spPr>
-        <p:txBody>
-          <a:bodyPr wrap="square" anchor="ctr">
-            <a:spAutoFit/>
-          </a:bodyPr>
-          <a:lstStyle/>
-          <a:p>
-            <a:pPr algn="ctr">
-              <a:spcAft>
-                <a:spcPts val="800"/>
-              </a:spcAft>
-            </a:pPr>
-            <a:r>
-              <a:rPr sz="1300" b="1">
-                <a:solidFill>
-                  <a:srgbClr val="E08214"/>
-                </a:solidFill>
-                <a:latin typeface="Calibri"/>
-              </a:rPr>
-              <a:t>Unit 1–2</a:t>
-            </a:r>
-          </a:p>
-        </p:txBody>
-      </p:sp>
-      <p:sp>
-        <p:nvSpPr>
-          <p:cNvPr id="6" name="Rectangle 5"/>
+              <a:t>11 unit kompetensi</a:t>
+            </a:r>
+          </a:p>
+        </p:txBody>
+      </p:sp>
+      <p:sp>
+        <p:nvSpPr>
+          <p:cNvPr id="4" name="Rectangle 3"/>
           <p:cNvSpPr/>
           <p:nvPr/>
         </p:nvSpPr>
@@ -8978,7 +9533,7 @@
       </p:sp>
       <p:sp>
         <p:nvSpPr>
-          <p:cNvPr id="7" name="TextBox 6"/>
+          <p:cNvPr id="5" name="TextBox 4"/>
           <p:cNvSpPr txBox="1"/>
           <p:nvPr/>
         </p:nvSpPr>
@@ -9017,7 +9572,7 @@
       </p:sp>
       <p:sp>
         <p:nvSpPr>
-          <p:cNvPr id="8" name="TextBox 7"/>
+          <p:cNvPr id="6" name="TextBox 5"/>
           <p:cNvSpPr txBox="1"/>
           <p:nvPr/>
         </p:nvSpPr>
@@ -9054,351 +9609,17 @@
           </a:p>
         </p:txBody>
       </p:sp>
-      <p:sp>
-        <p:nvSpPr>
-          <p:cNvPr id="9" name="Rectangle 8"/>
-          <p:cNvSpPr/>
-          <p:nvPr/>
-        </p:nvSpPr>
-        <p:spPr>
-          <a:xfrm>
-            <a:off x="411480" y="1234440"/>
-            <a:ext cx="5394960" cy="1828800"/>
-          </a:xfrm>
-          <a:prstGeom prst="rect">
-            <a:avLst/>
-          </a:prstGeom>
-          <a:solidFill>
-            <a:srgbClr val="F3F5F9"/>
-          </a:solidFill>
-          <a:ln>
-            <a:noFill/>
-          </a:ln>
-          <a:effectLst/>
-        </p:spPr>
-        <p:style>
-          <a:lnRef idx="1">
-            <a:schemeClr val="accent1"/>
-          </a:lnRef>
-          <a:fillRef idx="3">
-            <a:schemeClr val="accent1"/>
-          </a:fillRef>
-          <a:effectRef idx="2">
-            <a:schemeClr val="accent1"/>
-          </a:effectRef>
-          <a:fontRef idx="minor">
-            <a:schemeClr val="lt1"/>
-          </a:fontRef>
-        </p:style>
-        <p:txBody>
-          <a:bodyPr rtlCol="0" anchor="ctr"/>
-          <a:lstStyle/>
-          <a:p>
-            <a:pPr algn="ctr"/>
-          </a:p>
-        </p:txBody>
-      </p:sp>
-      <p:sp>
-        <p:nvSpPr>
-          <p:cNvPr id="10" name="Rectangle 9"/>
-          <p:cNvSpPr/>
-          <p:nvPr/>
-        </p:nvSpPr>
-        <p:spPr>
-          <a:xfrm>
-            <a:off x="411480" y="1234440"/>
-            <a:ext cx="64008" cy="1828800"/>
-          </a:xfrm>
-          <a:prstGeom prst="rect">
-            <a:avLst/>
-          </a:prstGeom>
-          <a:solidFill>
-            <a:srgbClr val="1F3A5F"/>
-          </a:solidFill>
-          <a:ln>
-            <a:noFill/>
-          </a:ln>
-          <a:effectLst/>
-        </p:spPr>
-        <p:style>
-          <a:lnRef idx="1">
-            <a:schemeClr val="accent1"/>
-          </a:lnRef>
-          <a:fillRef idx="3">
-            <a:schemeClr val="accent1"/>
-          </a:fillRef>
-          <a:effectRef idx="2">
-            <a:schemeClr val="accent1"/>
-          </a:effectRef>
-          <a:fontRef idx="minor">
-            <a:schemeClr val="lt1"/>
-          </a:fontRef>
-        </p:style>
-        <p:txBody>
-          <a:bodyPr rtlCol="0" anchor="ctr"/>
-          <a:lstStyle/>
-          <a:p>
-            <a:pPr algn="ctr"/>
-          </a:p>
-        </p:txBody>
-      </p:sp>
-      <p:sp>
-        <p:nvSpPr>
-          <p:cNvPr id="11" name="TextBox 10"/>
-          <p:cNvSpPr txBox="1"/>
-          <p:nvPr/>
-        </p:nvSpPr>
-        <p:spPr>
-          <a:xfrm>
-            <a:off x="640080" y="1344168"/>
-            <a:ext cx="5029200" cy="1645920"/>
-          </a:xfrm>
-          <a:prstGeom prst="rect">
-            <a:avLst/>
-          </a:prstGeom>
-          <a:noFill/>
-        </p:spPr>
-        <p:txBody>
-          <a:bodyPr wrap="square" anchor="t">
-            <a:spAutoFit/>
-          </a:bodyPr>
-          <a:lstStyle/>
-          <a:p>
-            <a:pPr algn="l">
-              <a:spcAft>
-                <a:spcPts val="800"/>
-              </a:spcAft>
-            </a:pPr>
-            <a:r>
-              <a:rPr sz="1800" b="1">
-                <a:solidFill>
-                  <a:srgbClr val="1F3A5F"/>
-                </a:solidFill>
-                <a:latin typeface="Calibri"/>
-              </a:rPr>
-              <a:t>Tujuan bisnis</a:t>
-            </a:r>
-          </a:p>
-          <a:p>
-            <a:pPr algn="l">
-              <a:spcAft>
-                <a:spcPts val="800"/>
-              </a:spcAft>
-            </a:pPr>
-            <a:r>
-              <a:rPr sz="1700" b="0">
-                <a:solidFill>
-                  <a:srgbClr val="222B38"/>
-                </a:solidFill>
-                <a:latin typeface="Calibri"/>
-              </a:rPr>
-              <a:t>•  Perkiraan arah IHSG sebelum BEI dibuka</a:t>
-            </a:r>
-          </a:p>
-          <a:p>
-            <a:pPr algn="l">
-              <a:spcAft>
-                <a:spcPts val="800"/>
-              </a:spcAft>
-            </a:pPr>
-            <a:r>
-              <a:rPr sz="1700" b="0">
-                <a:solidFill>
-                  <a:srgbClr val="222B38"/>
-                </a:solidFill>
-                <a:latin typeface="Calibri"/>
-              </a:rPr>
-              <a:t>•  Mengetahui faktor pasar yang paling berpengaruh</a:t>
-            </a:r>
-          </a:p>
-        </p:txBody>
-      </p:sp>
-      <p:sp>
-        <p:nvSpPr>
-          <p:cNvPr id="12" name="Rectangle 11"/>
-          <p:cNvSpPr/>
-          <p:nvPr/>
-        </p:nvSpPr>
-        <p:spPr>
-          <a:xfrm>
-            <a:off x="411480" y="3291840"/>
-            <a:ext cx="5394960" cy="2286000"/>
-          </a:xfrm>
-          <a:prstGeom prst="rect">
-            <a:avLst/>
-          </a:prstGeom>
-          <a:solidFill>
-            <a:srgbClr val="F3F5F9"/>
-          </a:solidFill>
-          <a:ln>
-            <a:noFill/>
-          </a:ln>
-          <a:effectLst/>
-        </p:spPr>
-        <p:style>
-          <a:lnRef idx="1">
-            <a:schemeClr val="accent1"/>
-          </a:lnRef>
-          <a:fillRef idx="3">
-            <a:schemeClr val="accent1"/>
-          </a:fillRef>
-          <a:effectRef idx="2">
-            <a:schemeClr val="accent1"/>
-          </a:effectRef>
-          <a:fontRef idx="minor">
-            <a:schemeClr val="lt1"/>
-          </a:fontRef>
-        </p:style>
-        <p:txBody>
-          <a:bodyPr rtlCol="0" anchor="ctr"/>
-          <a:lstStyle/>
-          <a:p>
-            <a:pPr algn="ctr"/>
-          </a:p>
-        </p:txBody>
-      </p:sp>
-      <p:sp>
-        <p:nvSpPr>
-          <p:cNvPr id="13" name="Rectangle 12"/>
-          <p:cNvSpPr/>
-          <p:nvPr/>
-        </p:nvSpPr>
-        <p:spPr>
-          <a:xfrm>
-            <a:off x="411480" y="3291840"/>
-            <a:ext cx="64008" cy="2286000"/>
-          </a:xfrm>
-          <a:prstGeom prst="rect">
-            <a:avLst/>
-          </a:prstGeom>
-          <a:solidFill>
-            <a:srgbClr val="1F3A5F"/>
-          </a:solidFill>
-          <a:ln>
-            <a:noFill/>
-          </a:ln>
-          <a:effectLst/>
-        </p:spPr>
-        <p:style>
-          <a:lnRef idx="1">
-            <a:schemeClr val="accent1"/>
-          </a:lnRef>
-          <a:fillRef idx="3">
-            <a:schemeClr val="accent1"/>
-          </a:fillRef>
-          <a:effectRef idx="2">
-            <a:schemeClr val="accent1"/>
-          </a:effectRef>
-          <a:fontRef idx="minor">
-            <a:schemeClr val="lt1"/>
-          </a:fontRef>
-        </p:style>
-        <p:txBody>
-          <a:bodyPr rtlCol="0" anchor="ctr"/>
-          <a:lstStyle/>
-          <a:p>
-            <a:pPr algn="ctr"/>
-          </a:p>
-        </p:txBody>
-      </p:sp>
-      <p:sp>
-        <p:nvSpPr>
-          <p:cNvPr id="14" name="TextBox 13"/>
-          <p:cNvSpPr txBox="1"/>
-          <p:nvPr/>
-        </p:nvSpPr>
-        <p:spPr>
-          <a:xfrm>
-            <a:off x="640080" y="3401568"/>
-            <a:ext cx="5029200" cy="2103120"/>
-          </a:xfrm>
-          <a:prstGeom prst="rect">
-            <a:avLst/>
-          </a:prstGeom>
-          <a:noFill/>
-        </p:spPr>
-        <p:txBody>
-          <a:bodyPr wrap="square" anchor="t">
-            <a:spAutoFit/>
-          </a:bodyPr>
-          <a:lstStyle/>
-          <a:p>
-            <a:pPr algn="l">
-              <a:spcAft>
-                <a:spcPts val="800"/>
-              </a:spcAft>
-            </a:pPr>
-            <a:r>
-              <a:rPr sz="1800" b="1">
-                <a:solidFill>
-                  <a:srgbClr val="1F3A5F"/>
-                </a:solidFill>
-                <a:latin typeface="Calibri"/>
-              </a:rPr>
-              <a:t>Tujuan teknis</a:t>
-            </a:r>
-          </a:p>
-          <a:p>
-            <a:pPr algn="l">
-              <a:spcAft>
-                <a:spcPts val="800"/>
-              </a:spcAft>
-            </a:pPr>
-            <a:r>
-              <a:rPr sz="1700" b="0">
-                <a:solidFill>
-                  <a:srgbClr val="222B38"/>
-                </a:solidFill>
-                <a:latin typeface="Calibri"/>
-              </a:rPr>
-              <a:t>•  Klasifikasi 2 kelas: 1 = IHSG besok naik, 0 = turun</a:t>
-            </a:r>
-          </a:p>
-          <a:p>
-            <a:pPr algn="l">
-              <a:spcAft>
-                <a:spcPts val="800"/>
-              </a:spcAft>
-            </a:pPr>
-            <a:r>
-              <a:rPr sz="1700" b="0">
-                <a:solidFill>
-                  <a:srgbClr val="222B38"/>
-                </a:solidFill>
-                <a:latin typeface="Calibri"/>
-              </a:rPr>
-              <a:t>•  80% data awal untuk latih, 20% terakhir untuk uji</a:t>
-            </a:r>
-          </a:p>
-          <a:p>
-            <a:pPr algn="l">
-              <a:spcAft>
-                <a:spcPts val="800"/>
-              </a:spcAft>
-            </a:pPr>
-            <a:r>
-              <a:rPr sz="1700" b="0">
-                <a:solidFill>
-                  <a:srgbClr val="222B38"/>
-                </a:solidFill>
-                <a:latin typeface="Calibri"/>
-              </a:rPr>
-              <a:t>•  Data tidak diacak (urut waktu)</a:t>
-            </a:r>
-          </a:p>
-        </p:txBody>
-      </p:sp>
       <p:graphicFrame>
         <p:nvGraphicFramePr>
-          <p:cNvPr id="15" name="Table 14"/>
+          <p:cNvPr id="7" name="Table 6"/>
           <p:cNvGraphicFramePr>
             <a:graphicFrameLocks noGrp="1"/>
           </p:cNvGraphicFramePr>
           <p:nvPr/>
         </p:nvGraphicFramePr>
         <p:xfrm>
-          <a:off x="6172200" y="1234440"/>
-          <a:ext cx="5623560" cy="2514600"/>
+          <a:off x="411480" y="1188720"/>
+          <a:ext cx="11384280" cy="4937760"/>
         </p:xfrm>
         <a:graphic>
           <a:graphicData uri="http://schemas.openxmlformats.org/drawingml/2006/table">
@@ -9407,23 +9628,24 @@
                 <a:tableStyleId>{5C22544A-7EE6-4342-B048-85BDC9FD1C3A}</a:tableStyleId>
               </a:tblPr>
               <a:tblGrid>
-                <a:gridCol w="3794760"/>
-                <a:gridCol w="1828800"/>
+                <a:gridCol w="822960"/>
+                <a:gridCol w="4389120"/>
+                <a:gridCol w="6172200"/>
               </a:tblGrid>
-              <a:tr h="502920">
-                <a:tc>
-                  <a:txBody>
-                    <a:bodyPr/>
-                    <a:lstStyle/>
-                    <a:p>
-                      <a:r>
-                        <a:rPr sz="1500" b="1">
+              <a:tr h="411480">
+                <a:tc>
+                  <a:txBody>
+                    <a:bodyPr/>
+                    <a:lstStyle/>
+                    <a:p>
+                      <a:r>
+                        <a:rPr sz="1300" b="1">
                           <a:solidFill>
                             <a:srgbClr val="FFFFFF"/>
                           </a:solidFill>
                           <a:latin typeface="Calibri"/>
                         </a:rPr>
-                        <a:t>Ukuran keberhasilan</a:t>
+                        <a:t>Unit</a:t>
                       </a:r>
                     </a:p>
                   </a:txBody>
@@ -9439,13 +9661,13 @@
                     <a:lstStyle/>
                     <a:p>
                       <a:r>
-                        <a:rPr sz="1500" b="1">
+                        <a:rPr sz="1300" b="1">
                           <a:solidFill>
                             <a:srgbClr val="FFFFFF"/>
                           </a:solidFill>
                           <a:latin typeface="Calibri"/>
                         </a:rPr>
-                        <a:t>Target</a:t>
+                        <a:t>Kompetensi</a:t>
                       </a:r>
                     </a:p>
                   </a:txBody>
@@ -9455,21 +9677,43 @@
                     </a:solidFill>
                   </a:tcPr>
                 </a:tc>
+                <a:tc>
+                  <a:txBody>
+                    <a:bodyPr/>
+                    <a:lstStyle/>
+                    <a:p>
+                      <a:r>
+                        <a:rPr sz="1300" b="1">
+                          <a:solidFill>
+                            <a:srgbClr val="FFFFFF"/>
+                          </a:solidFill>
+                          <a:latin typeface="Calibri"/>
+                        </a:rPr>
+                        <a:t>Yang dilakukan</a:t>
+                      </a:r>
+                    </a:p>
+                  </a:txBody>
+                  <a:tcPr anchor="ctr" marL="73152" marR="73152">
+                    <a:solidFill>
+                      <a:srgbClr val="1F3A5F"/>
+                    </a:solidFill>
+                  </a:tcPr>
+                </a:tc>
               </a:tr>
-              <a:tr h="502920">
-                <a:tc>
-                  <a:txBody>
-                    <a:bodyPr/>
-                    <a:lstStyle/>
-                    <a:p>
-                      <a:r>
-                        <a:rPr sz="1500" b="0">
+              <a:tr h="411480">
+                <a:tc>
+                  <a:txBody>
+                    <a:bodyPr/>
+                    <a:lstStyle/>
+                    <a:p>
+                      <a:r>
+                        <a:rPr sz="1300" b="0">
                           <a:solidFill>
                             <a:srgbClr val="222B38"/>
                           </a:solidFill>
                           <a:latin typeface="Calibri"/>
                         </a:rPr>
-                        <a:t>Accuracy</a:t>
+                        <a:t>1</a:t>
                       </a:r>
                     </a:p>
                   </a:txBody>
@@ -9485,13 +9729,13 @@
                     <a:lstStyle/>
                     <a:p>
                       <a:r>
-                        <a:rPr sz="1500" b="0">
+                        <a:rPr sz="1300" b="0">
                           <a:solidFill>
                             <a:srgbClr val="222B38"/>
                           </a:solidFill>
                           <a:latin typeface="Calibri"/>
                         </a:rPr>
-                        <a:t>≥ 0,55</a:t>
+                        <a:t>Menentukan Objektif Bisnis</a:t>
                       </a:r>
                     </a:p>
                   </a:txBody>
@@ -9501,21 +9745,43 @@
                     </a:solidFill>
                   </a:tcPr>
                 </a:tc>
+                <a:tc>
+                  <a:txBody>
+                    <a:bodyPr/>
+                    <a:lstStyle/>
+                    <a:p>
+                      <a:r>
+                        <a:rPr sz="1300" b="0">
+                          <a:solidFill>
+                            <a:srgbClr val="222B38"/>
+                          </a:solidFill>
+                          <a:latin typeface="Calibri"/>
+                        </a:rPr>
+                        <a:t>Pertanyaan bisnis, pengguna, kriteria berhasil</a:t>
+                      </a:r>
+                    </a:p>
+                  </a:txBody>
+                  <a:tcPr anchor="ctr" marL="73152" marR="73152">
+                    <a:solidFill>
+                      <a:srgbClr val="FFFFFF"/>
+                    </a:solidFill>
+                  </a:tcPr>
+                </a:tc>
               </a:tr>
-              <a:tr h="502920">
-                <a:tc>
-                  <a:txBody>
-                    <a:bodyPr/>
-                    <a:lstStyle/>
-                    <a:p>
-                      <a:r>
-                        <a:rPr sz="1500" b="0">
+              <a:tr h="411480">
+                <a:tc>
+                  <a:txBody>
+                    <a:bodyPr/>
+                    <a:lstStyle/>
+                    <a:p>
+                      <a:r>
+                        <a:rPr sz="1300" b="0">
                           <a:solidFill>
                             <a:srgbClr val="222B38"/>
                           </a:solidFill>
                           <a:latin typeface="Calibri"/>
                         </a:rPr>
-                        <a:t>F1-macro</a:t>
+                        <a:t>2</a:t>
                       </a:r>
                     </a:p>
                   </a:txBody>
@@ -9531,13 +9797,13 @@
                     <a:lstStyle/>
                     <a:p>
                       <a:r>
-                        <a:rPr sz="1500" b="0">
+                        <a:rPr sz="1300" b="0">
                           <a:solidFill>
                             <a:srgbClr val="222B38"/>
                           </a:solidFill>
                           <a:latin typeface="Calibri"/>
                         </a:rPr>
-                        <a:t>≥ 0,55</a:t>
+                        <a:t>Menentukan Tujuan Teknis</a:t>
                       </a:r>
                     </a:p>
                   </a:txBody>
@@ -9547,21 +9813,43 @@
                     </a:solidFill>
                   </a:tcPr>
                 </a:tc>
+                <a:tc>
+                  <a:txBody>
+                    <a:bodyPr/>
+                    <a:lstStyle/>
+                    <a:p>
+                      <a:r>
+                        <a:rPr sz="1300" b="0">
+                          <a:solidFill>
+                            <a:srgbClr val="222B38"/>
+                          </a:solidFill>
+                          <a:latin typeface="Calibri"/>
+                        </a:rPr>
+                        <a:t>Klasifikasi naik/turun, target ukuran</a:t>
+                      </a:r>
+                    </a:p>
+                  </a:txBody>
+                  <a:tcPr anchor="ctr" marL="73152" marR="73152">
+                    <a:solidFill>
+                      <a:srgbClr val="F3F5F9"/>
+                    </a:solidFill>
+                  </a:tcPr>
+                </a:tc>
               </a:tr>
-              <a:tr h="502920">
-                <a:tc>
-                  <a:txBody>
-                    <a:bodyPr/>
-                    <a:lstStyle/>
-                    <a:p>
-                      <a:r>
-                        <a:rPr sz="1500" b="0">
+              <a:tr h="411480">
+                <a:tc>
+                  <a:txBody>
+                    <a:bodyPr/>
+                    <a:lstStyle/>
+                    <a:p>
+                      <a:r>
+                        <a:rPr sz="1300" b="0">
                           <a:solidFill>
                             <a:srgbClr val="222B38"/>
                           </a:solidFill>
                           <a:latin typeface="Calibri"/>
                         </a:rPr>
-                        <a:t>ROC-AUC</a:t>
+                        <a:t>3</a:t>
                       </a:r>
                     </a:p>
                   </a:txBody>
@@ -9577,13 +9865,13 @@
                     <a:lstStyle/>
                     <a:p>
                       <a:r>
-                        <a:rPr sz="1500" b="0">
+                        <a:rPr sz="1300" b="0">
                           <a:solidFill>
                             <a:srgbClr val="222B38"/>
                           </a:solidFill>
                           <a:latin typeface="Calibri"/>
                         </a:rPr>
-                        <a:t>≥ 0,58</a:t>
+                        <a:t>Menelaah Data</a:t>
                       </a:r>
                     </a:p>
                   </a:txBody>
@@ -9593,21 +9881,43 @@
                     </a:solidFill>
                   </a:tcPr>
                 </a:tc>
+                <a:tc>
+                  <a:txBody>
+                    <a:bodyPr/>
+                    <a:lstStyle/>
+                    <a:p>
+                      <a:r>
+                        <a:rPr sz="1300" b="0">
+                          <a:solidFill>
+                            <a:srgbClr val="222B38"/>
+                          </a:solidFill>
+                          <a:latin typeface="Calibri"/>
+                        </a:rPr>
+                        <a:t>Grafik, statistik, korelasi</a:t>
+                      </a:r>
+                    </a:p>
+                  </a:txBody>
+                  <a:tcPr anchor="ctr" marL="73152" marR="73152">
+                    <a:solidFill>
+                      <a:srgbClr val="FFFFFF"/>
+                    </a:solidFill>
+                  </a:tcPr>
+                </a:tc>
               </a:tr>
-              <a:tr h="502920">
-                <a:tc>
-                  <a:txBody>
-                    <a:bodyPr/>
-                    <a:lstStyle/>
-                    <a:p>
-                      <a:r>
-                        <a:rPr sz="1500" b="0">
+              <a:tr h="411480">
+                <a:tc>
+                  <a:txBody>
+                    <a:bodyPr/>
+                    <a:lstStyle/>
+                    <a:p>
+                      <a:r>
+                        <a:rPr sz="1300" b="0">
                           <a:solidFill>
                             <a:srgbClr val="222B38"/>
                           </a:solidFill>
                           <a:latin typeface="Calibri"/>
                         </a:rPr>
-                        <a:t>Dibanding tebakan "selalu naik"</a:t>
+                        <a:t>4</a:t>
                       </a:r>
                     </a:p>
                   </a:txBody>
@@ -9623,19 +9933,517 @@
                     <a:lstStyle/>
                     <a:p>
                       <a:r>
-                        <a:rPr sz="1500" b="0">
+                        <a:rPr sz="1300" b="0">
                           <a:solidFill>
                             <a:srgbClr val="222B38"/>
                           </a:solidFill>
                           <a:latin typeface="Calibri"/>
                         </a:rPr>
-                        <a:t>harus lebih baik</a:t>
+                        <a:t>Memvalidasi Data</a:t>
                       </a:r>
                     </a:p>
                   </a:txBody>
                   <a:tcPr anchor="ctr" marL="73152" marR="73152">
                     <a:solidFill>
                       <a:srgbClr val="F3F5F9"/>
+                    </a:solidFill>
+                  </a:tcPr>
+                </a:tc>
+                <a:tc>
+                  <a:txBody>
+                    <a:bodyPr/>
+                    <a:lstStyle/>
+                    <a:p>
+                      <a:r>
+                        <a:rPr sz="1300" b="0">
+                          <a:solidFill>
+                            <a:srgbClr val="222B38"/>
+                          </a:solidFill>
+                          <a:latin typeface="Calibri"/>
+                        </a:rPr>
+                        <a:t>Menemukan 3 jenis masalah data</a:t>
+                      </a:r>
+                    </a:p>
+                  </a:txBody>
+                  <a:tcPr anchor="ctr" marL="73152" marR="73152">
+                    <a:solidFill>
+                      <a:srgbClr val="F3F5F9"/>
+                    </a:solidFill>
+                  </a:tcPr>
+                </a:tc>
+              </a:tr>
+              <a:tr h="411480">
+                <a:tc>
+                  <a:txBody>
+                    <a:bodyPr/>
+                    <a:lstStyle/>
+                    <a:p>
+                      <a:r>
+                        <a:rPr sz="1300" b="0">
+                          <a:solidFill>
+                            <a:srgbClr val="222B38"/>
+                          </a:solidFill>
+                          <a:latin typeface="Calibri"/>
+                        </a:rPr>
+                        <a:t>5</a:t>
+                      </a:r>
+                    </a:p>
+                  </a:txBody>
+                  <a:tcPr anchor="ctr" marL="73152" marR="73152">
+                    <a:solidFill>
+                      <a:srgbClr val="FFFFFF"/>
+                    </a:solidFill>
+                  </a:tcPr>
+                </a:tc>
+                <a:tc>
+                  <a:txBody>
+                    <a:bodyPr/>
+                    <a:lstStyle/>
+                    <a:p>
+                      <a:r>
+                        <a:rPr sz="1300" b="0">
+                          <a:solidFill>
+                            <a:srgbClr val="222B38"/>
+                          </a:solidFill>
+                          <a:latin typeface="Calibri"/>
+                        </a:rPr>
+                        <a:t>Menentukan Objek Data</a:t>
+                      </a:r>
+                    </a:p>
+                  </a:txBody>
+                  <a:tcPr anchor="ctr" marL="73152" marR="73152">
+                    <a:solidFill>
+                      <a:srgbClr val="FFFFFF"/>
+                    </a:solidFill>
+                  </a:tcPr>
+                </a:tc>
+                <a:tc>
+                  <a:txBody>
+                    <a:bodyPr/>
+                    <a:lstStyle/>
+                    <a:p>
+                      <a:r>
+                        <a:rPr sz="1300" b="0">
+                          <a:solidFill>
+                            <a:srgbClr val="222B38"/>
+                          </a:solidFill>
+                          <a:latin typeface="Calibri"/>
+                        </a:rPr>
+                        <a:t>Memilih 5 variabel dan target</a:t>
+                      </a:r>
+                    </a:p>
+                  </a:txBody>
+                  <a:tcPr anchor="ctr" marL="73152" marR="73152">
+                    <a:solidFill>
+                      <a:srgbClr val="FFFFFF"/>
+                    </a:solidFill>
+                  </a:tcPr>
+                </a:tc>
+              </a:tr>
+              <a:tr h="411480">
+                <a:tc>
+                  <a:txBody>
+                    <a:bodyPr/>
+                    <a:lstStyle/>
+                    <a:p>
+                      <a:r>
+                        <a:rPr sz="1300" b="0">
+                          <a:solidFill>
+                            <a:srgbClr val="222B38"/>
+                          </a:solidFill>
+                          <a:latin typeface="Calibri"/>
+                        </a:rPr>
+                        <a:t>6</a:t>
+                      </a:r>
+                    </a:p>
+                  </a:txBody>
+                  <a:tcPr anchor="ctr" marL="73152" marR="73152">
+                    <a:solidFill>
+                      <a:srgbClr val="F3F5F9"/>
+                    </a:solidFill>
+                  </a:tcPr>
+                </a:tc>
+                <a:tc>
+                  <a:txBody>
+                    <a:bodyPr/>
+                    <a:lstStyle/>
+                    <a:p>
+                      <a:r>
+                        <a:rPr sz="1300" b="0">
+                          <a:solidFill>
+                            <a:srgbClr val="222B38"/>
+                          </a:solidFill>
+                          <a:latin typeface="Calibri"/>
+                        </a:rPr>
+                        <a:t>Membersihkan Data</a:t>
+                      </a:r>
+                    </a:p>
+                  </a:txBody>
+                  <a:tcPr anchor="ctr" marL="73152" marR="73152">
+                    <a:solidFill>
+                      <a:srgbClr val="F3F5F9"/>
+                    </a:solidFill>
+                  </a:tcPr>
+                </a:tc>
+                <a:tc>
+                  <a:txBody>
+                    <a:bodyPr/>
+                    <a:lstStyle/>
+                    <a:p>
+                      <a:r>
+                        <a:rPr sz="1300" b="0">
+                          <a:solidFill>
+                            <a:srgbClr val="222B38"/>
+                          </a:solidFill>
+                          <a:latin typeface="Calibri"/>
+                        </a:rPr>
+                        <a:t>3 langkah perbaikan</a:t>
+                      </a:r>
+                    </a:p>
+                  </a:txBody>
+                  <a:tcPr anchor="ctr" marL="73152" marR="73152">
+                    <a:solidFill>
+                      <a:srgbClr val="F3F5F9"/>
+                    </a:solidFill>
+                  </a:tcPr>
+                </a:tc>
+              </a:tr>
+              <a:tr h="411480">
+                <a:tc>
+                  <a:txBody>
+                    <a:bodyPr/>
+                    <a:lstStyle/>
+                    <a:p>
+                      <a:r>
+                        <a:rPr sz="1300" b="0">
+                          <a:solidFill>
+                            <a:srgbClr val="222B38"/>
+                          </a:solidFill>
+                          <a:latin typeface="Calibri"/>
+                        </a:rPr>
+                        <a:t>7</a:t>
+                      </a:r>
+                    </a:p>
+                  </a:txBody>
+                  <a:tcPr anchor="ctr" marL="73152" marR="73152">
+                    <a:solidFill>
+                      <a:srgbClr val="FFFFFF"/>
+                    </a:solidFill>
+                  </a:tcPr>
+                </a:tc>
+                <a:tc>
+                  <a:txBody>
+                    <a:bodyPr/>
+                    <a:lstStyle/>
+                    <a:p>
+                      <a:r>
+                        <a:rPr sz="1300" b="0">
+                          <a:solidFill>
+                            <a:srgbClr val="222B38"/>
+                          </a:solidFill>
+                          <a:latin typeface="Calibri"/>
+                        </a:rPr>
+                        <a:t>Mengkonstruksi Data</a:t>
+                      </a:r>
+                    </a:p>
+                  </a:txBody>
+                  <a:tcPr anchor="ctr" marL="73152" marR="73152">
+                    <a:solidFill>
+                      <a:srgbClr val="FFFFFF"/>
+                    </a:solidFill>
+                  </a:tcPr>
+                </a:tc>
+                <a:tc>
+                  <a:txBody>
+                    <a:bodyPr/>
+                    <a:lstStyle/>
+                    <a:p>
+                      <a:r>
+                        <a:rPr sz="1300" b="0">
+                          <a:solidFill>
+                            <a:srgbClr val="222B38"/>
+                          </a:solidFill>
+                          <a:latin typeface="Calibri"/>
+                        </a:rPr>
+                        <a:t>5 fitur, data latih 80% &amp; uji 20%</a:t>
+                      </a:r>
+                    </a:p>
+                  </a:txBody>
+                  <a:tcPr anchor="ctr" marL="73152" marR="73152">
+                    <a:solidFill>
+                      <a:srgbClr val="FFFFFF"/>
+                    </a:solidFill>
+                  </a:tcPr>
+                </a:tc>
+              </a:tr>
+              <a:tr h="411480">
+                <a:tc>
+                  <a:txBody>
+                    <a:bodyPr/>
+                    <a:lstStyle/>
+                    <a:p>
+                      <a:r>
+                        <a:rPr sz="1300" b="0">
+                          <a:solidFill>
+                            <a:srgbClr val="222B38"/>
+                          </a:solidFill>
+                          <a:latin typeface="Calibri"/>
+                        </a:rPr>
+                        <a:t>8</a:t>
+                      </a:r>
+                    </a:p>
+                  </a:txBody>
+                  <a:tcPr anchor="ctr" marL="73152" marR="73152">
+                    <a:solidFill>
+                      <a:srgbClr val="F3F5F9"/>
+                    </a:solidFill>
+                  </a:tcPr>
+                </a:tc>
+                <a:tc>
+                  <a:txBody>
+                    <a:bodyPr/>
+                    <a:lstStyle/>
+                    <a:p>
+                      <a:r>
+                        <a:rPr sz="1300" b="0">
+                          <a:solidFill>
+                            <a:srgbClr val="222B38"/>
+                          </a:solidFill>
+                          <a:latin typeface="Calibri"/>
+                        </a:rPr>
+                        <a:t>Membangun Skenario Model</a:t>
+                      </a:r>
+                    </a:p>
+                  </a:txBody>
+                  <a:tcPr anchor="ctr" marL="73152" marR="73152">
+                    <a:solidFill>
+                      <a:srgbClr val="F3F5F9"/>
+                    </a:solidFill>
+                  </a:tcPr>
+                </a:tc>
+                <a:tc>
+                  <a:txBody>
+                    <a:bodyPr/>
+                    <a:lstStyle/>
+                    <a:p>
+                      <a:r>
+                        <a:rPr sz="1300" b="0">
+                          <a:solidFill>
+                            <a:srgbClr val="222B38"/>
+                          </a:solidFill>
+                          <a:latin typeface="Calibri"/>
+                        </a:rPr>
+                        <a:t>2 baseline + 3 model</a:t>
+                      </a:r>
+                    </a:p>
+                  </a:txBody>
+                  <a:tcPr anchor="ctr" marL="73152" marR="73152">
+                    <a:solidFill>
+                      <a:srgbClr val="F3F5F9"/>
+                    </a:solidFill>
+                  </a:tcPr>
+                </a:tc>
+              </a:tr>
+              <a:tr h="411480">
+                <a:tc>
+                  <a:txBody>
+                    <a:bodyPr/>
+                    <a:lstStyle/>
+                    <a:p>
+                      <a:r>
+                        <a:rPr sz="1300" b="0">
+                          <a:solidFill>
+                            <a:srgbClr val="222B38"/>
+                          </a:solidFill>
+                          <a:latin typeface="Calibri"/>
+                        </a:rPr>
+                        <a:t>9</a:t>
+                      </a:r>
+                    </a:p>
+                  </a:txBody>
+                  <a:tcPr anchor="ctr" marL="73152" marR="73152">
+                    <a:solidFill>
+                      <a:srgbClr val="FFFFFF"/>
+                    </a:solidFill>
+                  </a:tcPr>
+                </a:tc>
+                <a:tc>
+                  <a:txBody>
+                    <a:bodyPr/>
+                    <a:lstStyle/>
+                    <a:p>
+                      <a:r>
+                        <a:rPr sz="1300" b="0">
+                          <a:solidFill>
+                            <a:srgbClr val="222B38"/>
+                          </a:solidFill>
+                          <a:latin typeface="Calibri"/>
+                        </a:rPr>
+                        <a:t>Membangun Model</a:t>
+                      </a:r>
+                    </a:p>
+                  </a:txBody>
+                  <a:tcPr anchor="ctr" marL="73152" marR="73152">
+                    <a:solidFill>
+                      <a:srgbClr val="FFFFFF"/>
+                    </a:solidFill>
+                  </a:tcPr>
+                </a:tc>
+                <a:tc>
+                  <a:txBody>
+                    <a:bodyPr/>
+                    <a:lstStyle/>
+                    <a:p>
+                      <a:r>
+                        <a:rPr sz="1300" b="0">
+                          <a:solidFill>
+                            <a:srgbClr val="222B38"/>
+                          </a:solidFill>
+                          <a:latin typeface="Calibri"/>
+                        </a:rPr>
+                        <a:t>Validasi silang, pilih model terbaik</a:t>
+                      </a:r>
+                    </a:p>
+                  </a:txBody>
+                  <a:tcPr anchor="ctr" marL="73152" marR="73152">
+                    <a:solidFill>
+                      <a:srgbClr val="FFFFFF"/>
+                    </a:solidFill>
+                  </a:tcPr>
+                </a:tc>
+              </a:tr>
+              <a:tr h="411480">
+                <a:tc>
+                  <a:txBody>
+                    <a:bodyPr/>
+                    <a:lstStyle/>
+                    <a:p>
+                      <a:r>
+                        <a:rPr sz="1300" b="0">
+                          <a:solidFill>
+                            <a:srgbClr val="222B38"/>
+                          </a:solidFill>
+                          <a:latin typeface="Calibri"/>
+                        </a:rPr>
+                        <a:t>10</a:t>
+                      </a:r>
+                    </a:p>
+                  </a:txBody>
+                  <a:tcPr anchor="ctr" marL="73152" marR="73152">
+                    <a:solidFill>
+                      <a:srgbClr val="F3F5F9"/>
+                    </a:solidFill>
+                  </a:tcPr>
+                </a:tc>
+                <a:tc>
+                  <a:txBody>
+                    <a:bodyPr/>
+                    <a:lstStyle/>
+                    <a:p>
+                      <a:r>
+                        <a:rPr sz="1300" b="0">
+                          <a:solidFill>
+                            <a:srgbClr val="222B38"/>
+                          </a:solidFill>
+                          <a:latin typeface="Calibri"/>
+                        </a:rPr>
+                        <a:t>Mengevaluasi Hasil Pemodelan</a:t>
+                      </a:r>
+                    </a:p>
+                  </a:txBody>
+                  <a:tcPr anchor="ctr" marL="73152" marR="73152">
+                    <a:solidFill>
+                      <a:srgbClr val="F3F5F9"/>
+                    </a:solidFill>
+                  </a:tcPr>
+                </a:tc>
+                <a:tc>
+                  <a:txBody>
+                    <a:bodyPr/>
+                    <a:lstStyle/>
+                    <a:p>
+                      <a:r>
+                        <a:rPr sz="1300" b="0">
+                          <a:solidFill>
+                            <a:srgbClr val="222B38"/>
+                          </a:solidFill>
+                          <a:latin typeface="Calibri"/>
+                        </a:rPr>
+                        <a:t>Uji dengan data baru</a:t>
+                      </a:r>
+                    </a:p>
+                  </a:txBody>
+                  <a:tcPr anchor="ctr" marL="73152" marR="73152">
+                    <a:solidFill>
+                      <a:srgbClr val="F3F5F9"/>
+                    </a:solidFill>
+                  </a:tcPr>
+                </a:tc>
+              </a:tr>
+              <a:tr h="411480">
+                <a:tc>
+                  <a:txBody>
+                    <a:bodyPr/>
+                    <a:lstStyle/>
+                    <a:p>
+                      <a:r>
+                        <a:rPr sz="1300" b="0">
+                          <a:solidFill>
+                            <a:srgbClr val="222B38"/>
+                          </a:solidFill>
+                          <a:latin typeface="Calibri"/>
+                        </a:rPr>
+                        <a:t>11</a:t>
+                      </a:r>
+                    </a:p>
+                  </a:txBody>
+                  <a:tcPr anchor="ctr" marL="73152" marR="73152">
+                    <a:solidFill>
+                      <a:srgbClr val="FFFFFF"/>
+                    </a:solidFill>
+                  </a:tcPr>
+                </a:tc>
+                <a:tc>
+                  <a:txBody>
+                    <a:bodyPr/>
+                    <a:lstStyle/>
+                    <a:p>
+                      <a:r>
+                        <a:rPr sz="1300" b="0">
+                          <a:solidFill>
+                            <a:srgbClr val="222B38"/>
+                          </a:solidFill>
+                          <a:latin typeface="Calibri"/>
+                        </a:rPr>
+                        <a:t>Melakukan Review Pemodelan</a:t>
+                      </a:r>
+                    </a:p>
+                  </a:txBody>
+                  <a:tcPr anchor="ctr" marL="73152" marR="73152">
+                    <a:solidFill>
+                      <a:srgbClr val="FFFFFF"/>
+                    </a:solidFill>
+                  </a:tcPr>
+                </a:tc>
+                <a:tc>
+                  <a:txBody>
+                    <a:bodyPr/>
+                    <a:lstStyle/>
+                    <a:p>
+                      <a:r>
+                        <a:rPr sz="1300" b="0">
+                          <a:solidFill>
+                            <a:srgbClr val="222B38"/>
+                          </a:solidFill>
+                          <a:latin typeface="Calibri"/>
+                        </a:rPr>
+                        <a:t>Kelebihan, kekurangan, rencana</a:t>
+                      </a:r>
+                    </a:p>
+                  </a:txBody>
+                  <a:tcPr anchor="ctr" marL="73152" marR="73152">
+                    <a:solidFill>
+                      <a:srgbClr val="FFFFFF"/>
                     </a:solidFill>
                   </a:tcPr>
                 </a:tc>
@@ -9644,45 +10452,6 @@
           </a:graphicData>
         </a:graphic>
       </p:graphicFrame>
-      <p:sp>
-        <p:nvSpPr>
-          <p:cNvPr id="16" name="TextBox 15"/>
-          <p:cNvSpPr txBox="1"/>
-          <p:nvPr/>
-        </p:nvSpPr>
-        <p:spPr>
-          <a:xfrm>
-            <a:off x="6172200" y="3977639"/>
-            <a:ext cx="5623560" cy="1371600"/>
-          </a:xfrm>
-          <a:prstGeom prst="rect">
-            <a:avLst/>
-          </a:prstGeom>
-          <a:noFill/>
-        </p:spPr>
-        <p:txBody>
-          <a:bodyPr wrap="square" anchor="t">
-            <a:spAutoFit/>
-          </a:bodyPr>
-          <a:lstStyle/>
-          <a:p>
-            <a:pPr algn="l">
-              <a:spcAft>
-                <a:spcPts val="800"/>
-              </a:spcAft>
-            </a:pPr>
-            <a:r>
-              <a:rPr sz="1400" b="0">
-                <a:solidFill>
-                  <a:srgbClr val="5A6778"/>
-                </a:solidFill>
-                <a:latin typeface="Calibri"/>
-              </a:rPr>
-              <a:t>Target sengaja realistis karena arah pasar saham harian memang sulit ditebak.</a:t>
-            </a:r>
-          </a:p>
-        </p:txBody>
-      </p:sp>
     </p:spTree>
   </p:cSld>
   <p:clrMapOvr>
@@ -9779,7 +10548,7 @@
                 </a:solidFill>
                 <a:latin typeface="Calibri"/>
               </a:rPr>
-              <a:t>Telaah data: S&amp;P 500 paling berpengaruh</a:t>
+              <a:t>Tujuan bisnis dan tujuan teknis</a:t>
             </a:r>
           </a:p>
         </p:txBody>
@@ -9862,7 +10631,7 @@
                 </a:solidFill>
                 <a:latin typeface="Calibri"/>
               </a:rPr>
-              <a:t>Unit 3</a:t>
+              <a:t>Unit 1–2</a:t>
             </a:r>
           </a:p>
         </p:txBody>
@@ -9989,40 +10758,104 @@
           </a:p>
         </p:txBody>
       </p:sp>
-      <p:pic>
-        <p:nvPicPr>
-          <p:cNvPr id="9" name="Picture 8" descr="03_korelasi_ihsg_besok.png"/>
-          <p:cNvPicPr>
-            <a:picLocks noChangeAspect="1"/>
-          </p:cNvPicPr>
-          <p:nvPr/>
-        </p:nvPicPr>
-        <p:blipFill>
-          <a:blip r:embed="rId2"/>
-          <a:stretch>
-            <a:fillRect/>
-          </a:stretch>
-        </p:blipFill>
-        <p:spPr>
-          <a:xfrm>
-            <a:off x="411480" y="1202611"/>
-            <a:ext cx="6766560" cy="3812696"/>
+      <p:sp>
+        <p:nvSpPr>
+          <p:cNvPr id="9" name="Rectangle 8"/>
+          <p:cNvSpPr/>
+          <p:nvPr/>
+        </p:nvSpPr>
+        <p:spPr>
+          <a:xfrm>
+            <a:off x="411480" y="1234440"/>
+            <a:ext cx="5394960" cy="1828800"/>
           </a:xfrm>
           <a:prstGeom prst="rect">
             <a:avLst/>
           </a:prstGeom>
-        </p:spPr>
-      </p:pic>
-      <p:sp>
-        <p:nvSpPr>
-          <p:cNvPr id="10" name="TextBox 9"/>
+          <a:solidFill>
+            <a:srgbClr val="F3F5F9"/>
+          </a:solidFill>
+          <a:ln>
+            <a:noFill/>
+          </a:ln>
+          <a:effectLst/>
+        </p:spPr>
+        <p:style>
+          <a:lnRef idx="1">
+            <a:schemeClr val="accent1"/>
+          </a:lnRef>
+          <a:fillRef idx="3">
+            <a:schemeClr val="accent1"/>
+          </a:fillRef>
+          <a:effectRef idx="2">
+            <a:schemeClr val="accent1"/>
+          </a:effectRef>
+          <a:fontRef idx="minor">
+            <a:schemeClr val="lt1"/>
+          </a:fontRef>
+        </p:style>
+        <p:txBody>
+          <a:bodyPr rtlCol="0" anchor="ctr"/>
+          <a:lstStyle/>
+          <a:p>
+            <a:pPr algn="ctr"/>
+          </a:p>
+        </p:txBody>
+      </p:sp>
+      <p:sp>
+        <p:nvSpPr>
+          <p:cNvPr id="10" name="Rectangle 9"/>
+          <p:cNvSpPr/>
+          <p:nvPr/>
+        </p:nvSpPr>
+        <p:spPr>
+          <a:xfrm>
+            <a:off x="411480" y="1234440"/>
+            <a:ext cx="64008" cy="1828800"/>
+          </a:xfrm>
+          <a:prstGeom prst="rect">
+            <a:avLst/>
+          </a:prstGeom>
+          <a:solidFill>
+            <a:srgbClr val="1F3A5F"/>
+          </a:solidFill>
+          <a:ln>
+            <a:noFill/>
+          </a:ln>
+          <a:effectLst/>
+        </p:spPr>
+        <p:style>
+          <a:lnRef idx="1">
+            <a:schemeClr val="accent1"/>
+          </a:lnRef>
+          <a:fillRef idx="3">
+            <a:schemeClr val="accent1"/>
+          </a:fillRef>
+          <a:effectRef idx="2">
+            <a:schemeClr val="accent1"/>
+          </a:effectRef>
+          <a:fontRef idx="minor">
+            <a:schemeClr val="lt1"/>
+          </a:fontRef>
+        </p:style>
+        <p:txBody>
+          <a:bodyPr rtlCol="0" anchor="ctr"/>
+          <a:lstStyle/>
+          <a:p>
+            <a:pPr algn="ctr"/>
+          </a:p>
+        </p:txBody>
+      </p:sp>
+      <p:sp>
+        <p:nvSpPr>
+          <p:cNvPr id="11" name="TextBox 10"/>
           <p:cNvSpPr txBox="1"/>
           <p:nvPr/>
         </p:nvSpPr>
         <p:spPr>
           <a:xfrm>
-            <a:off x="7452360" y="1325880"/>
-            <a:ext cx="4343400" cy="4114800"/>
+            <a:off x="640080" y="1344168"/>
+            <a:ext cx="5029200" cy="1645920"/>
           </a:xfrm>
           <a:prstGeom prst="rect">
             <a:avLst/>
@@ -10041,31 +10874,13 @@
               </a:spcAft>
             </a:pPr>
             <a:r>
-              <a:rPr sz="1000" b="0">
-                <a:solidFill>
-                  <a:srgbClr val="E08214"/>
+              <a:rPr sz="1800" b="1">
+                <a:solidFill>
+                  <a:srgbClr val="1F3A5F"/>
                 </a:solidFill>
                 <a:latin typeface="Calibri"/>
               </a:rPr>
-              <a:t>■  </a:t>
-            </a:r>
-            <a:r>
-              <a:rPr sz="1600" b="1">
-                <a:solidFill>
-                  <a:srgbClr val="222B38"/>
-                </a:solidFill>
-                <a:latin typeface="Calibri"/>
-              </a:rPr>
-              <a:t>S&amp;P 500 </a:t>
-            </a:r>
-            <a:r>
-              <a:rPr sz="1600" b="0">
-                <a:solidFill>
-                  <a:srgbClr val="222B38"/>
-                </a:solidFill>
-                <a:latin typeface="Calibri"/>
-              </a:rPr>
-              <a:t>berhubungan paling kuat dengan IHSG besok (+0,29).</a:t>
+              <a:t>Tujuan bisnis</a:t>
             </a:r>
           </a:p>
           <a:p>
@@ -10075,31 +10890,13 @@
               </a:spcAft>
             </a:pPr>
             <a:r>
-              <a:rPr sz="1000" b="0">
-                <a:solidFill>
-                  <a:srgbClr val="E08214"/>
+              <a:rPr sz="1700" b="0">
+                <a:solidFill>
+                  <a:srgbClr val="222B38"/>
                 </a:solidFill>
                 <a:latin typeface="Calibri"/>
               </a:rPr>
-              <a:t>■  </a:t>
-            </a:r>
-            <a:r>
-              <a:rPr sz="1600" b="1">
-                <a:solidFill>
-                  <a:srgbClr val="222B38"/>
-                </a:solidFill>
-                <a:latin typeface="Calibri"/>
-              </a:rPr>
-              <a:t>VIX </a:t>
-            </a:r>
-            <a:r>
-              <a:rPr sz="1600" b="0">
-                <a:solidFill>
-                  <a:srgbClr val="222B38"/>
-                </a:solidFill>
-                <a:latin typeface="Calibri"/>
-              </a:rPr>
-              <a:t>berhubungan terbalik (−0,24): saat pasar takut, IHSG cenderung turun.</a:t>
+              <a:t>•  Perkiraan arah IHSG sebelum BEI dibuka</a:t>
             </a:r>
           </a:p>
           <a:p>
@@ -10109,22 +10906,483 @@
               </a:spcAft>
             </a:pPr>
             <a:r>
-              <a:rPr sz="1000" b="0">
-                <a:solidFill>
-                  <a:srgbClr val="E08214"/>
+              <a:rPr sz="1700" b="0">
+                <a:solidFill>
+                  <a:srgbClr val="222B38"/>
                 </a:solidFill>
                 <a:latin typeface="Calibri"/>
               </a:rPr>
-              <a:t>■  </a:t>
-            </a:r>
-            <a:r>
-              <a:rPr sz="1600" b="0">
-                <a:solidFill>
-                  <a:srgbClr val="222B38"/>
+              <a:t>•  Mengetahui faktor pasar yang paling berpengaruh</a:t>
+            </a:r>
+          </a:p>
+        </p:txBody>
+      </p:sp>
+      <p:sp>
+        <p:nvSpPr>
+          <p:cNvPr id="12" name="Rectangle 11"/>
+          <p:cNvSpPr/>
+          <p:nvPr/>
+        </p:nvSpPr>
+        <p:spPr>
+          <a:xfrm>
+            <a:off x="411480" y="3291840"/>
+            <a:ext cx="5394960" cy="2286000"/>
+          </a:xfrm>
+          <a:prstGeom prst="rect">
+            <a:avLst/>
+          </a:prstGeom>
+          <a:solidFill>
+            <a:srgbClr val="F3F5F9"/>
+          </a:solidFill>
+          <a:ln>
+            <a:noFill/>
+          </a:ln>
+          <a:effectLst/>
+        </p:spPr>
+        <p:style>
+          <a:lnRef idx="1">
+            <a:schemeClr val="accent1"/>
+          </a:lnRef>
+          <a:fillRef idx="3">
+            <a:schemeClr val="accent1"/>
+          </a:fillRef>
+          <a:effectRef idx="2">
+            <a:schemeClr val="accent1"/>
+          </a:effectRef>
+          <a:fontRef idx="minor">
+            <a:schemeClr val="lt1"/>
+          </a:fontRef>
+        </p:style>
+        <p:txBody>
+          <a:bodyPr rtlCol="0" anchor="ctr"/>
+          <a:lstStyle/>
+          <a:p>
+            <a:pPr algn="ctr"/>
+          </a:p>
+        </p:txBody>
+      </p:sp>
+      <p:sp>
+        <p:nvSpPr>
+          <p:cNvPr id="13" name="Rectangle 12"/>
+          <p:cNvSpPr/>
+          <p:nvPr/>
+        </p:nvSpPr>
+        <p:spPr>
+          <a:xfrm>
+            <a:off x="411480" y="3291840"/>
+            <a:ext cx="64008" cy="2286000"/>
+          </a:xfrm>
+          <a:prstGeom prst="rect">
+            <a:avLst/>
+          </a:prstGeom>
+          <a:solidFill>
+            <a:srgbClr val="1F3A5F"/>
+          </a:solidFill>
+          <a:ln>
+            <a:noFill/>
+          </a:ln>
+          <a:effectLst/>
+        </p:spPr>
+        <p:style>
+          <a:lnRef idx="1">
+            <a:schemeClr val="accent1"/>
+          </a:lnRef>
+          <a:fillRef idx="3">
+            <a:schemeClr val="accent1"/>
+          </a:fillRef>
+          <a:effectRef idx="2">
+            <a:schemeClr val="accent1"/>
+          </a:effectRef>
+          <a:fontRef idx="minor">
+            <a:schemeClr val="lt1"/>
+          </a:fontRef>
+        </p:style>
+        <p:txBody>
+          <a:bodyPr rtlCol="0" anchor="ctr"/>
+          <a:lstStyle/>
+          <a:p>
+            <a:pPr algn="ctr"/>
+          </a:p>
+        </p:txBody>
+      </p:sp>
+      <p:sp>
+        <p:nvSpPr>
+          <p:cNvPr id="14" name="TextBox 13"/>
+          <p:cNvSpPr txBox="1"/>
+          <p:nvPr/>
+        </p:nvSpPr>
+        <p:spPr>
+          <a:xfrm>
+            <a:off x="640080" y="3401568"/>
+            <a:ext cx="5029200" cy="2103120"/>
+          </a:xfrm>
+          <a:prstGeom prst="rect">
+            <a:avLst/>
+          </a:prstGeom>
+          <a:noFill/>
+        </p:spPr>
+        <p:txBody>
+          <a:bodyPr wrap="square" anchor="t">
+            <a:spAutoFit/>
+          </a:bodyPr>
+          <a:lstStyle/>
+          <a:p>
+            <a:pPr algn="l">
+              <a:spcAft>
+                <a:spcPts val="800"/>
+              </a:spcAft>
+            </a:pPr>
+            <a:r>
+              <a:rPr sz="1800" b="1">
+                <a:solidFill>
+                  <a:srgbClr val="1F3A5F"/>
                 </a:solidFill>
                 <a:latin typeface="Calibri"/>
               </a:rPr>
-              <a:t>Analisis hanya memakai data 2010–2022 agar data uji tidak ikut dilihat.</a:t>
+              <a:t>Tujuan teknis</a:t>
+            </a:r>
+          </a:p>
+          <a:p>
+            <a:pPr algn="l">
+              <a:spcAft>
+                <a:spcPts val="800"/>
+              </a:spcAft>
+            </a:pPr>
+            <a:r>
+              <a:rPr sz="1700" b="0">
+                <a:solidFill>
+                  <a:srgbClr val="222B38"/>
+                </a:solidFill>
+                <a:latin typeface="Calibri"/>
+              </a:rPr>
+              <a:t>•  Klasifikasi 2 kelas: 1 = IHSG besok naik, 0 = turun</a:t>
+            </a:r>
+          </a:p>
+          <a:p>
+            <a:pPr algn="l">
+              <a:spcAft>
+                <a:spcPts val="800"/>
+              </a:spcAft>
+            </a:pPr>
+            <a:r>
+              <a:rPr sz="1700" b="0">
+                <a:solidFill>
+                  <a:srgbClr val="222B38"/>
+                </a:solidFill>
+                <a:latin typeface="Calibri"/>
+              </a:rPr>
+              <a:t>•  80% data awal untuk latih, 20% terakhir untuk uji</a:t>
+            </a:r>
+          </a:p>
+          <a:p>
+            <a:pPr algn="l">
+              <a:spcAft>
+                <a:spcPts val="800"/>
+              </a:spcAft>
+            </a:pPr>
+            <a:r>
+              <a:rPr sz="1700" b="0">
+                <a:solidFill>
+                  <a:srgbClr val="222B38"/>
+                </a:solidFill>
+                <a:latin typeface="Calibri"/>
+              </a:rPr>
+              <a:t>•  Data tidak diacak (urut waktu)</a:t>
+            </a:r>
+          </a:p>
+        </p:txBody>
+      </p:sp>
+      <p:graphicFrame>
+        <p:nvGraphicFramePr>
+          <p:cNvPr id="15" name="Table 14"/>
+          <p:cNvGraphicFramePr>
+            <a:graphicFrameLocks noGrp="1"/>
+          </p:cNvGraphicFramePr>
+          <p:nvPr/>
+        </p:nvGraphicFramePr>
+        <p:xfrm>
+          <a:off x="6172200" y="1234440"/>
+          <a:ext cx="5623560" cy="2514600"/>
+        </p:xfrm>
+        <a:graphic>
+          <a:graphicData uri="http://schemas.openxmlformats.org/drawingml/2006/table">
+            <a:tbl>
+              <a:tblPr firstRow="1" bandRow="1">
+                <a:tableStyleId>{5C22544A-7EE6-4342-B048-85BDC9FD1C3A}</a:tableStyleId>
+              </a:tblPr>
+              <a:tblGrid>
+                <a:gridCol w="3794760"/>
+                <a:gridCol w="1828800"/>
+              </a:tblGrid>
+              <a:tr h="502920">
+                <a:tc>
+                  <a:txBody>
+                    <a:bodyPr/>
+                    <a:lstStyle/>
+                    <a:p>
+                      <a:r>
+                        <a:rPr sz="1500" b="1">
+                          <a:solidFill>
+                            <a:srgbClr val="FFFFFF"/>
+                          </a:solidFill>
+                          <a:latin typeface="Calibri"/>
+                        </a:rPr>
+                        <a:t>Ukuran keberhasilan</a:t>
+                      </a:r>
+                    </a:p>
+                  </a:txBody>
+                  <a:tcPr anchor="ctr" marL="73152" marR="73152">
+                    <a:solidFill>
+                      <a:srgbClr val="1F3A5F"/>
+                    </a:solidFill>
+                  </a:tcPr>
+                </a:tc>
+                <a:tc>
+                  <a:txBody>
+                    <a:bodyPr/>
+                    <a:lstStyle/>
+                    <a:p>
+                      <a:r>
+                        <a:rPr sz="1500" b="1">
+                          <a:solidFill>
+                            <a:srgbClr val="FFFFFF"/>
+                          </a:solidFill>
+                          <a:latin typeface="Calibri"/>
+                        </a:rPr>
+                        <a:t>Target</a:t>
+                      </a:r>
+                    </a:p>
+                  </a:txBody>
+                  <a:tcPr anchor="ctr" marL="73152" marR="73152">
+                    <a:solidFill>
+                      <a:srgbClr val="1F3A5F"/>
+                    </a:solidFill>
+                  </a:tcPr>
+                </a:tc>
+              </a:tr>
+              <a:tr h="502920">
+                <a:tc>
+                  <a:txBody>
+                    <a:bodyPr/>
+                    <a:lstStyle/>
+                    <a:p>
+                      <a:r>
+                        <a:rPr sz="1500" b="0">
+                          <a:solidFill>
+                            <a:srgbClr val="222B38"/>
+                          </a:solidFill>
+                          <a:latin typeface="Calibri"/>
+                        </a:rPr>
+                        <a:t>Accuracy</a:t>
+                      </a:r>
+                    </a:p>
+                  </a:txBody>
+                  <a:tcPr anchor="ctr" marL="73152" marR="73152">
+                    <a:solidFill>
+                      <a:srgbClr val="FFFFFF"/>
+                    </a:solidFill>
+                  </a:tcPr>
+                </a:tc>
+                <a:tc>
+                  <a:txBody>
+                    <a:bodyPr/>
+                    <a:lstStyle/>
+                    <a:p>
+                      <a:r>
+                        <a:rPr sz="1500" b="0">
+                          <a:solidFill>
+                            <a:srgbClr val="222B38"/>
+                          </a:solidFill>
+                          <a:latin typeface="Calibri"/>
+                        </a:rPr>
+                        <a:t>≥ 0,55</a:t>
+                      </a:r>
+                    </a:p>
+                  </a:txBody>
+                  <a:tcPr anchor="ctr" marL="73152" marR="73152">
+                    <a:solidFill>
+                      <a:srgbClr val="FFFFFF"/>
+                    </a:solidFill>
+                  </a:tcPr>
+                </a:tc>
+              </a:tr>
+              <a:tr h="502920">
+                <a:tc>
+                  <a:txBody>
+                    <a:bodyPr/>
+                    <a:lstStyle/>
+                    <a:p>
+                      <a:r>
+                        <a:rPr sz="1500" b="0">
+                          <a:solidFill>
+                            <a:srgbClr val="222B38"/>
+                          </a:solidFill>
+                          <a:latin typeface="Calibri"/>
+                        </a:rPr>
+                        <a:t>F1-macro</a:t>
+                      </a:r>
+                    </a:p>
+                  </a:txBody>
+                  <a:tcPr anchor="ctr" marL="73152" marR="73152">
+                    <a:solidFill>
+                      <a:srgbClr val="F3F5F9"/>
+                    </a:solidFill>
+                  </a:tcPr>
+                </a:tc>
+                <a:tc>
+                  <a:txBody>
+                    <a:bodyPr/>
+                    <a:lstStyle/>
+                    <a:p>
+                      <a:r>
+                        <a:rPr sz="1500" b="0">
+                          <a:solidFill>
+                            <a:srgbClr val="222B38"/>
+                          </a:solidFill>
+                          <a:latin typeface="Calibri"/>
+                        </a:rPr>
+                        <a:t>≥ 0,55</a:t>
+                      </a:r>
+                    </a:p>
+                  </a:txBody>
+                  <a:tcPr anchor="ctr" marL="73152" marR="73152">
+                    <a:solidFill>
+                      <a:srgbClr val="F3F5F9"/>
+                    </a:solidFill>
+                  </a:tcPr>
+                </a:tc>
+              </a:tr>
+              <a:tr h="502920">
+                <a:tc>
+                  <a:txBody>
+                    <a:bodyPr/>
+                    <a:lstStyle/>
+                    <a:p>
+                      <a:r>
+                        <a:rPr sz="1500" b="0">
+                          <a:solidFill>
+                            <a:srgbClr val="222B38"/>
+                          </a:solidFill>
+                          <a:latin typeface="Calibri"/>
+                        </a:rPr>
+                        <a:t>ROC-AUC</a:t>
+                      </a:r>
+                    </a:p>
+                  </a:txBody>
+                  <a:tcPr anchor="ctr" marL="73152" marR="73152">
+                    <a:solidFill>
+                      <a:srgbClr val="FFFFFF"/>
+                    </a:solidFill>
+                  </a:tcPr>
+                </a:tc>
+                <a:tc>
+                  <a:txBody>
+                    <a:bodyPr/>
+                    <a:lstStyle/>
+                    <a:p>
+                      <a:r>
+                        <a:rPr sz="1500" b="0">
+                          <a:solidFill>
+                            <a:srgbClr val="222B38"/>
+                          </a:solidFill>
+                          <a:latin typeface="Calibri"/>
+                        </a:rPr>
+                        <a:t>≥ 0,58</a:t>
+                      </a:r>
+                    </a:p>
+                  </a:txBody>
+                  <a:tcPr anchor="ctr" marL="73152" marR="73152">
+                    <a:solidFill>
+                      <a:srgbClr val="FFFFFF"/>
+                    </a:solidFill>
+                  </a:tcPr>
+                </a:tc>
+              </a:tr>
+              <a:tr h="502920">
+                <a:tc>
+                  <a:txBody>
+                    <a:bodyPr/>
+                    <a:lstStyle/>
+                    <a:p>
+                      <a:r>
+                        <a:rPr sz="1500" b="0">
+                          <a:solidFill>
+                            <a:srgbClr val="222B38"/>
+                          </a:solidFill>
+                          <a:latin typeface="Calibri"/>
+                        </a:rPr>
+                        <a:t>Dibanding tebakan "selalu naik"</a:t>
+                      </a:r>
+                    </a:p>
+                  </a:txBody>
+                  <a:tcPr anchor="ctr" marL="73152" marR="73152">
+                    <a:solidFill>
+                      <a:srgbClr val="F3F5F9"/>
+                    </a:solidFill>
+                  </a:tcPr>
+                </a:tc>
+                <a:tc>
+                  <a:txBody>
+                    <a:bodyPr/>
+                    <a:lstStyle/>
+                    <a:p>
+                      <a:r>
+                        <a:rPr sz="1500" b="0">
+                          <a:solidFill>
+                            <a:srgbClr val="222B38"/>
+                          </a:solidFill>
+                          <a:latin typeface="Calibri"/>
+                        </a:rPr>
+                        <a:t>harus lebih baik</a:t>
+                      </a:r>
+                    </a:p>
+                  </a:txBody>
+                  <a:tcPr anchor="ctr" marL="73152" marR="73152">
+                    <a:solidFill>
+                      <a:srgbClr val="F3F5F9"/>
+                    </a:solidFill>
+                  </a:tcPr>
+                </a:tc>
+              </a:tr>
+            </a:tbl>
+          </a:graphicData>
+        </a:graphic>
+      </p:graphicFrame>
+      <p:sp>
+        <p:nvSpPr>
+          <p:cNvPr id="16" name="TextBox 15"/>
+          <p:cNvSpPr txBox="1"/>
+          <p:nvPr/>
+        </p:nvSpPr>
+        <p:spPr>
+          <a:xfrm>
+            <a:off x="6172200" y="3977639"/>
+            <a:ext cx="5623560" cy="1371600"/>
+          </a:xfrm>
+          <a:prstGeom prst="rect">
+            <a:avLst/>
+          </a:prstGeom>
+          <a:noFill/>
+        </p:spPr>
+        <p:txBody>
+          <a:bodyPr wrap="square" anchor="t">
+            <a:spAutoFit/>
+          </a:bodyPr>
+          <a:lstStyle/>
+          <a:p>
+            <a:pPr algn="l">
+              <a:spcAft>
+                <a:spcPts val="800"/>
+              </a:spcAft>
+            </a:pPr>
+            <a:r>
+              <a:rPr sz="1400" b="0">
+                <a:solidFill>
+                  <a:srgbClr val="5A6778"/>
+                </a:solidFill>
+                <a:latin typeface="Calibri"/>
+              </a:rPr>
+              <a:t>Target sengaja realistis karena arah pasar saham harian memang sulit ditebak.</a:t>
             </a:r>
           </a:p>
         </p:txBody>
@@ -10225,7 +11483,7 @@
                 </a:solidFill>
                 <a:latin typeface="Calibri"/>
               </a:rPr>
-              <a:t>Validasi data: masalah yang ditemukan</a:t>
+              <a:t>Telaah data: S&amp;P 500 paling berpengaruh</a:t>
             </a:r>
           </a:p>
         </p:txBody>
@@ -10308,7 +11566,7 @@
                 </a:solidFill>
                 <a:latin typeface="Calibri"/>
               </a:rPr>
-              <a:t>Unit 4</a:t>
+              <a:t>Unit 3</a:t>
             </a:r>
           </a:p>
         </p:txBody>
@@ -10437,7 +11695,7 @@
       </p:sp>
       <p:pic>
         <p:nvPicPr>
-          <p:cNvPr id="9" name="Picture 8" descr="04_minyak_negatif.png"/>
+          <p:cNvPr id="9" name="Picture 8" descr="03_korelasi_ihsg_besok.png"/>
           <p:cNvPicPr>
             <a:picLocks noChangeAspect="1"/>
           </p:cNvPicPr>
@@ -10451,381 +11709,130 @@
         </p:blipFill>
         <p:spPr>
           <a:xfrm>
-            <a:off x="2579820" y="1188720"/>
-            <a:ext cx="7047598" cy="2651760"/>
+            <a:off x="411480" y="1202611"/>
+            <a:ext cx="6766560" cy="3812696"/>
           </a:xfrm>
           <a:prstGeom prst="rect">
             <a:avLst/>
           </a:prstGeom>
         </p:spPr>
       </p:pic>
-      <p:graphicFrame>
-        <p:nvGraphicFramePr>
-          <p:cNvPr id="10" name="Table 9"/>
-          <p:cNvGraphicFramePr>
-            <a:graphicFrameLocks noGrp="1"/>
-          </p:cNvGraphicFramePr>
-          <p:nvPr/>
-        </p:nvGraphicFramePr>
-        <p:xfrm>
-          <a:off x="411480" y="3977639"/>
-          <a:ext cx="11384280" cy="1920240"/>
-        </p:xfrm>
-        <a:graphic>
-          <a:graphicData uri="http://schemas.openxmlformats.org/drawingml/2006/table">
-            <a:tbl>
-              <a:tblPr firstRow="1" bandRow="1">
-                <a:tableStyleId>{5C22544A-7EE6-4342-B048-85BDC9FD1C3A}</a:tableStyleId>
-              </a:tblPr>
-              <a:tblGrid>
-                <a:gridCol w="5486400"/>
-                <a:gridCol w="1828800"/>
-                <a:gridCol w="4069080"/>
-              </a:tblGrid>
-              <a:tr h="384048">
-                <a:tc>
-                  <a:txBody>
-                    <a:bodyPr/>
-                    <a:lstStyle/>
-                    <a:p>
-                      <a:r>
-                        <a:rPr sz="1300" b="1">
-                          <a:solidFill>
-                            <a:srgbClr val="FFFFFF"/>
-                          </a:solidFill>
-                          <a:latin typeface="Calibri"/>
-                        </a:rPr>
-                        <a:t>Masalah</a:t>
-                      </a:r>
-                    </a:p>
-                  </a:txBody>
-                  <a:tcPr anchor="ctr" marL="73152" marR="73152">
-                    <a:solidFill>
-                      <a:srgbClr val="1F3A5F"/>
-                    </a:solidFill>
-                  </a:tcPr>
-                </a:tc>
-                <a:tc>
-                  <a:txBody>
-                    <a:bodyPr/>
-                    <a:lstStyle/>
-                    <a:p>
-                      <a:r>
-                        <a:rPr sz="1300" b="1">
-                          <a:solidFill>
-                            <a:srgbClr val="FFFFFF"/>
-                          </a:solidFill>
-                          <a:latin typeface="Calibri"/>
-                        </a:rPr>
-                        <a:t>Jumlah</a:t>
-                      </a:r>
-                    </a:p>
-                  </a:txBody>
-                  <a:tcPr anchor="ctr" marL="73152" marR="73152">
-                    <a:solidFill>
-                      <a:srgbClr val="1F3A5F"/>
-                    </a:solidFill>
-                  </a:tcPr>
-                </a:tc>
-                <a:tc>
-                  <a:txBody>
-                    <a:bodyPr/>
-                    <a:lstStyle/>
-                    <a:p>
-                      <a:r>
-                        <a:rPr sz="1300" b="1">
-                          <a:solidFill>
-                            <a:srgbClr val="FFFFFF"/>
-                          </a:solidFill>
-                          <a:latin typeface="Calibri"/>
-                        </a:rPr>
-                        <a:t>Tindakan</a:t>
-                      </a:r>
-                    </a:p>
-                  </a:txBody>
-                  <a:tcPr anchor="ctr" marL="73152" marR="73152">
-                    <a:solidFill>
-                      <a:srgbClr val="1F3A5F"/>
-                    </a:solidFill>
-                  </a:tcPr>
-                </a:tc>
-              </a:tr>
-              <a:tr h="384048">
-                <a:tc>
-                  <a:txBody>
-                    <a:bodyPr/>
-                    <a:lstStyle/>
-                    <a:p>
-                      <a:r>
-                        <a:rPr sz="1300" b="0">
-                          <a:solidFill>
-                            <a:srgbClr val="222B38"/>
-                          </a:solidFill>
-                          <a:latin typeface="Calibri"/>
-                        </a:rPr>
-                        <a:t>Baris kosong (1 Jan 2010)</a:t>
-                      </a:r>
-                    </a:p>
-                  </a:txBody>
-                  <a:tcPr anchor="ctr" marL="73152" marR="73152">
-                    <a:solidFill>
-                      <a:srgbClr val="FFFFFF"/>
-                    </a:solidFill>
-                  </a:tcPr>
-                </a:tc>
-                <a:tc>
-                  <a:txBody>
-                    <a:bodyPr/>
-                    <a:lstStyle/>
-                    <a:p>
-                      <a:r>
-                        <a:rPr sz="1300" b="0">
-                          <a:solidFill>
-                            <a:srgbClr val="222B38"/>
-                          </a:solidFill>
-                          <a:latin typeface="Calibri"/>
-                        </a:rPr>
-                        <a:t>1 baris</a:t>
-                      </a:r>
-                    </a:p>
-                  </a:txBody>
-                  <a:tcPr anchor="ctr" marL="73152" marR="73152">
-                    <a:solidFill>
-                      <a:srgbClr val="FFFFFF"/>
-                    </a:solidFill>
-                  </a:tcPr>
-                </a:tc>
-                <a:tc>
-                  <a:txBody>
-                    <a:bodyPr/>
-                    <a:lstStyle/>
-                    <a:p>
-                      <a:r>
-                        <a:rPr sz="1300" b="0">
-                          <a:solidFill>
-                            <a:srgbClr val="222B38"/>
-                          </a:solidFill>
-                          <a:latin typeface="Calibri"/>
-                        </a:rPr>
-                        <a:t>Dihapus</a:t>
-                      </a:r>
-                    </a:p>
-                  </a:txBody>
-                  <a:tcPr anchor="ctr" marL="73152" marR="73152">
-                    <a:solidFill>
-                      <a:srgbClr val="FFFFFF"/>
-                    </a:solidFill>
-                  </a:tcPr>
-                </a:tc>
-              </a:tr>
-              <a:tr h="384048">
-                <a:tc>
-                  <a:txBody>
-                    <a:bodyPr/>
-                    <a:lstStyle/>
-                    <a:p>
-                      <a:r>
-                        <a:rPr sz="1300" b="0">
-                          <a:solidFill>
-                            <a:srgbClr val="222B38"/>
-                          </a:solidFill>
-                          <a:latin typeface="Calibri"/>
-                        </a:rPr>
-                        <a:t>Tanggal ganda</a:t>
-                      </a:r>
-                    </a:p>
-                  </a:txBody>
-                  <a:tcPr anchor="ctr" marL="73152" marR="73152">
-                    <a:solidFill>
-                      <a:srgbClr val="F3F5F9"/>
-                    </a:solidFill>
-                  </a:tcPr>
-                </a:tc>
-                <a:tc>
-                  <a:txBody>
-                    <a:bodyPr/>
-                    <a:lstStyle/>
-                    <a:p>
-                      <a:r>
-                        <a:rPr sz="1300" b="0">
-                          <a:solidFill>
-                            <a:srgbClr val="222B38"/>
-                          </a:solidFill>
-                          <a:latin typeface="Calibri"/>
-                        </a:rPr>
-                        <a:t>0</a:t>
-                      </a:r>
-                    </a:p>
-                  </a:txBody>
-                  <a:tcPr anchor="ctr" marL="73152" marR="73152">
-                    <a:solidFill>
-                      <a:srgbClr val="F3F5F9"/>
-                    </a:solidFill>
-                  </a:tcPr>
-                </a:tc>
-                <a:tc>
-                  <a:txBody>
-                    <a:bodyPr/>
-                    <a:lstStyle/>
-                    <a:p>
-                      <a:r>
-                        <a:rPr sz="1300" b="0">
-                          <a:solidFill>
-                            <a:srgbClr val="222B38"/>
-                          </a:solidFill>
-                          <a:latin typeface="Calibri"/>
-                        </a:rPr>
-                        <a:t>–</a:t>
-                      </a:r>
-                    </a:p>
-                  </a:txBody>
-                  <a:tcPr anchor="ctr" marL="73152" marR="73152">
-                    <a:solidFill>
-                      <a:srgbClr val="F3F5F9"/>
-                    </a:solidFill>
-                  </a:tcPr>
-                </a:tc>
-              </a:tr>
-              <a:tr h="384048">
-                <a:tc>
-                  <a:txBody>
-                    <a:bodyPr/>
-                    <a:lstStyle/>
-                    <a:p>
-                      <a:r>
-                        <a:rPr sz="1300" b="0">
-                          <a:solidFill>
-                            <a:srgbClr val="222B38"/>
-                          </a:solidFill>
-                          <a:latin typeface="Calibri"/>
-                        </a:rPr>
-                        <a:t>Harga minyak negatif (20 Apr 2020)</a:t>
-                      </a:r>
-                    </a:p>
-                  </a:txBody>
-                  <a:tcPr anchor="ctr" marL="73152" marR="73152">
-                    <a:solidFill>
-                      <a:srgbClr val="FFFFFF"/>
-                    </a:solidFill>
-                  </a:tcPr>
-                </a:tc>
-                <a:tc>
-                  <a:txBody>
-                    <a:bodyPr/>
-                    <a:lstStyle/>
-                    <a:p>
-                      <a:r>
-                        <a:rPr sz="1300" b="0">
-                          <a:solidFill>
-                            <a:srgbClr val="222B38"/>
-                          </a:solidFill>
-                          <a:latin typeface="Calibri"/>
-                        </a:rPr>
-                        <a:t>1 nilai</a:t>
-                      </a:r>
-                    </a:p>
-                  </a:txBody>
-                  <a:tcPr anchor="ctr" marL="73152" marR="73152">
-                    <a:solidFill>
-                      <a:srgbClr val="FFFFFF"/>
-                    </a:solidFill>
-                  </a:tcPr>
-                </a:tc>
-                <a:tc>
-                  <a:txBody>
-                    <a:bodyPr/>
-                    <a:lstStyle/>
-                    <a:p>
-                      <a:r>
-                        <a:rPr sz="1300" b="0">
-                          <a:solidFill>
-                            <a:srgbClr val="222B38"/>
-                          </a:solidFill>
-                          <a:latin typeface="Calibri"/>
-                        </a:rPr>
-                        <a:t>Diganti nilai hari sebelumnya</a:t>
-                      </a:r>
-                    </a:p>
-                  </a:txBody>
-                  <a:tcPr anchor="ctr" marL="73152" marR="73152">
-                    <a:solidFill>
-                      <a:srgbClr val="FFFFFF"/>
-                    </a:solidFill>
-                  </a:tcPr>
-                </a:tc>
-              </a:tr>
-              <a:tr h="384048">
-                <a:tc>
-                  <a:txBody>
-                    <a:bodyPr/>
-                    <a:lstStyle/>
-                    <a:p>
-                      <a:r>
-                        <a:rPr sz="1300" b="0">
-                          <a:solidFill>
-                            <a:srgbClr val="222B38"/>
-                          </a:solidFill>
-                          <a:latin typeface="Calibri"/>
-                        </a:rPr>
-                        <a:t>Hari libur BEI (IHSG disalin)</a:t>
-                      </a:r>
-                    </a:p>
-                  </a:txBody>
-                  <a:tcPr anchor="ctr" marL="73152" marR="73152">
-                    <a:solidFill>
-                      <a:srgbClr val="F3F5F9"/>
-                    </a:solidFill>
-                  </a:tcPr>
-                </a:tc>
-                <a:tc>
-                  <a:txBody>
-                    <a:bodyPr/>
-                    <a:lstStyle/>
-                    <a:p>
-                      <a:r>
-                        <a:rPr sz="1300" b="0">
-                          <a:solidFill>
-                            <a:srgbClr val="222B38"/>
-                          </a:solidFill>
-                          <a:latin typeface="Calibri"/>
-                        </a:rPr>
-                        <a:t>304 baris</a:t>
-                      </a:r>
-                    </a:p>
-                  </a:txBody>
-                  <a:tcPr anchor="ctr" marL="73152" marR="73152">
-                    <a:solidFill>
-                      <a:srgbClr val="F3F5F9"/>
-                    </a:solidFill>
-                  </a:tcPr>
-                </a:tc>
-                <a:tc>
-                  <a:txBody>
-                    <a:bodyPr/>
-                    <a:lstStyle/>
-                    <a:p>
-                      <a:r>
-                        <a:rPr sz="1300" b="0">
-                          <a:solidFill>
-                            <a:srgbClr val="222B38"/>
-                          </a:solidFill>
-                          <a:latin typeface="Calibri"/>
-                        </a:rPr>
-                        <a:t>Dihapus</a:t>
-                      </a:r>
-                    </a:p>
-                  </a:txBody>
-                  <a:tcPr anchor="ctr" marL="73152" marR="73152">
-                    <a:solidFill>
-                      <a:srgbClr val="F3F5F9"/>
-                    </a:solidFill>
-                  </a:tcPr>
-                </a:tc>
-              </a:tr>
-            </a:tbl>
-          </a:graphicData>
-        </a:graphic>
-      </p:graphicFrame>
+      <p:sp>
+        <p:nvSpPr>
+          <p:cNvPr id="10" name="TextBox 9"/>
+          <p:cNvSpPr txBox="1"/>
+          <p:nvPr/>
+        </p:nvSpPr>
+        <p:spPr>
+          <a:xfrm>
+            <a:off x="7452360" y="1325880"/>
+            <a:ext cx="4343400" cy="4114800"/>
+          </a:xfrm>
+          <a:prstGeom prst="rect">
+            <a:avLst/>
+          </a:prstGeom>
+          <a:noFill/>
+        </p:spPr>
+        <p:txBody>
+          <a:bodyPr wrap="square" anchor="t">
+            <a:spAutoFit/>
+          </a:bodyPr>
+          <a:lstStyle/>
+          <a:p>
+            <a:pPr algn="l">
+              <a:spcAft>
+                <a:spcPts val="800"/>
+              </a:spcAft>
+            </a:pPr>
+            <a:r>
+              <a:rPr sz="1000" b="0">
+                <a:solidFill>
+                  <a:srgbClr val="E08214"/>
+                </a:solidFill>
+                <a:latin typeface="Calibri"/>
+              </a:rPr>
+              <a:t>■  </a:t>
+            </a:r>
+            <a:r>
+              <a:rPr sz="1600" b="1">
+                <a:solidFill>
+                  <a:srgbClr val="222B38"/>
+                </a:solidFill>
+                <a:latin typeface="Calibri"/>
+              </a:rPr>
+              <a:t>S&amp;P 500 </a:t>
+            </a:r>
+            <a:r>
+              <a:rPr sz="1600" b="0">
+                <a:solidFill>
+                  <a:srgbClr val="222B38"/>
+                </a:solidFill>
+                <a:latin typeface="Calibri"/>
+              </a:rPr>
+              <a:t>berhubungan paling kuat dengan IHSG besok (+0,29).</a:t>
+            </a:r>
+          </a:p>
+          <a:p>
+            <a:pPr algn="l">
+              <a:spcAft>
+                <a:spcPts val="800"/>
+              </a:spcAft>
+            </a:pPr>
+            <a:r>
+              <a:rPr sz="1000" b="0">
+                <a:solidFill>
+                  <a:srgbClr val="E08214"/>
+                </a:solidFill>
+                <a:latin typeface="Calibri"/>
+              </a:rPr>
+              <a:t>■  </a:t>
+            </a:r>
+            <a:r>
+              <a:rPr sz="1600" b="1">
+                <a:solidFill>
+                  <a:srgbClr val="222B38"/>
+                </a:solidFill>
+                <a:latin typeface="Calibri"/>
+              </a:rPr>
+              <a:t>VIX </a:t>
+            </a:r>
+            <a:r>
+              <a:rPr sz="1600" b="0">
+                <a:solidFill>
+                  <a:srgbClr val="222B38"/>
+                </a:solidFill>
+                <a:latin typeface="Calibri"/>
+              </a:rPr>
+              <a:t>berhubungan terbalik (−0,24): saat pasar takut, IHSG cenderung turun.</a:t>
+            </a:r>
+          </a:p>
+          <a:p>
+            <a:pPr algn="l">
+              <a:spcAft>
+                <a:spcPts val="800"/>
+              </a:spcAft>
+            </a:pPr>
+            <a:r>
+              <a:rPr sz="1000" b="0">
+                <a:solidFill>
+                  <a:srgbClr val="E08214"/>
+                </a:solidFill>
+                <a:latin typeface="Calibri"/>
+              </a:rPr>
+              <a:t>■  </a:t>
+            </a:r>
+            <a:r>
+              <a:rPr sz="1600" b="0">
+                <a:solidFill>
+                  <a:srgbClr val="222B38"/>
+                </a:solidFill>
+                <a:latin typeface="Calibri"/>
+              </a:rPr>
+              <a:t>Analisis hanya memakai data 2010–2022 agar data uji tidak ikut dilihat.</a:t>
+            </a:r>
+          </a:p>
+        </p:txBody>
+      </p:sp>
     </p:spTree>
   </p:cSld>
   <p:clrMapOvr>
@@ -10922,7 +11929,7 @@
                 </a:solidFill>
                 <a:latin typeface="Calibri"/>
               </a:rPr>
-              <a:t>Objek data dan pembersihan</a:t>
+              <a:t>Validasi data: masalah yang ditemukan</a:t>
             </a:r>
           </a:p>
         </p:txBody>
@@ -11005,7 +12012,7 @@
                 </a:solidFill>
                 <a:latin typeface="Calibri"/>
               </a:rPr>
-              <a:t>Unit 5–6</a:t>
+              <a:t>Unit 4</a:t>
             </a:r>
           </a:p>
         </p:txBody>
@@ -11132,17 +12139,41 @@
           </a:p>
         </p:txBody>
       </p:sp>
+      <p:pic>
+        <p:nvPicPr>
+          <p:cNvPr id="9" name="Picture 8" descr="04_minyak_negatif.png"/>
+          <p:cNvPicPr>
+            <a:picLocks noChangeAspect="1"/>
+          </p:cNvPicPr>
+          <p:nvPr/>
+        </p:nvPicPr>
+        <p:blipFill>
+          <a:blip r:embed="rId2"/>
+          <a:stretch>
+            <a:fillRect/>
+          </a:stretch>
+        </p:blipFill>
+        <p:spPr>
+          <a:xfrm>
+            <a:off x="2579820" y="1188720"/>
+            <a:ext cx="7047598" cy="2651760"/>
+          </a:xfrm>
+          <a:prstGeom prst="rect">
+            <a:avLst/>
+          </a:prstGeom>
+        </p:spPr>
+      </p:pic>
       <p:graphicFrame>
         <p:nvGraphicFramePr>
-          <p:cNvPr id="9" name="Table 8"/>
+          <p:cNvPr id="10" name="Table 9"/>
           <p:cNvGraphicFramePr>
             <a:graphicFrameLocks noGrp="1"/>
           </p:cNvGraphicFramePr>
           <p:nvPr/>
         </p:nvGraphicFramePr>
         <p:xfrm>
-          <a:off x="411480" y="1234440"/>
-          <a:ext cx="5577840" cy="1828800"/>
+          <a:off x="411480" y="3977639"/>
+          <a:ext cx="11384280" cy="1920240"/>
         </p:xfrm>
         <a:graphic>
           <a:graphicData uri="http://schemas.openxmlformats.org/drawingml/2006/table">
@@ -11151,23 +12182,24 @@
                 <a:tableStyleId>{5C22544A-7EE6-4342-B048-85BDC9FD1C3A}</a:tableStyleId>
               </a:tblPr>
               <a:tblGrid>
-                <a:gridCol w="2651760"/>
-                <a:gridCol w="2926080"/>
+                <a:gridCol w="5486400"/>
+                <a:gridCol w="1828800"/>
+                <a:gridCol w="4069080"/>
               </a:tblGrid>
-              <a:tr h="457200">
-                <a:tc>
-                  <a:txBody>
-                    <a:bodyPr/>
-                    <a:lstStyle/>
-                    <a:p>
-                      <a:r>
-                        <a:rPr sz="1400" b="1">
+              <a:tr h="384048">
+                <a:tc>
+                  <a:txBody>
+                    <a:bodyPr/>
+                    <a:lstStyle/>
+                    <a:p>
+                      <a:r>
+                        <a:rPr sz="1300" b="1">
                           <a:solidFill>
                             <a:srgbClr val="FFFFFF"/>
                           </a:solidFill>
                           <a:latin typeface="Calibri"/>
                         </a:rPr>
-                        <a:t>Variabel</a:t>
+                        <a:t>Masalah</a:t>
                       </a:r>
                     </a:p>
                   </a:txBody>
@@ -11183,13 +12215,13 @@
                     <a:lstStyle/>
                     <a:p>
                       <a:r>
-                        <a:rPr sz="1400" b="1">
+                        <a:rPr sz="1300" b="1">
                           <a:solidFill>
                             <a:srgbClr val="FFFFFF"/>
                           </a:solidFill>
                           <a:latin typeface="Calibri"/>
                         </a:rPr>
-                        <a:t>Dipakai?</a:t>
+                        <a:t>Jumlah</a:t>
                       </a:r>
                     </a:p>
                   </a:txBody>
@@ -11199,21 +12231,43 @@
                     </a:solidFill>
                   </a:tcPr>
                 </a:tc>
+                <a:tc>
+                  <a:txBody>
+                    <a:bodyPr/>
+                    <a:lstStyle/>
+                    <a:p>
+                      <a:r>
+                        <a:rPr sz="1300" b="1">
+                          <a:solidFill>
+                            <a:srgbClr val="FFFFFF"/>
+                          </a:solidFill>
+                          <a:latin typeface="Calibri"/>
+                        </a:rPr>
+                        <a:t>Tindakan</a:t>
+                      </a:r>
+                    </a:p>
+                  </a:txBody>
+                  <a:tcPr anchor="ctr" marL="73152" marR="73152">
+                    <a:solidFill>
+                      <a:srgbClr val="1F3A5F"/>
+                    </a:solidFill>
+                  </a:tcPr>
+                </a:tc>
               </a:tr>
-              <a:tr h="457200">
-                <a:tc>
-                  <a:txBody>
-                    <a:bodyPr/>
-                    <a:lstStyle/>
-                    <a:p>
-                      <a:r>
-                        <a:rPr sz="1400" b="0">
+              <a:tr h="384048">
+                <a:tc>
+                  <a:txBody>
+                    <a:bodyPr/>
+                    <a:lstStyle/>
+                    <a:p>
+                      <a:r>
+                        <a:rPr sz="1300" b="0">
                           <a:solidFill>
                             <a:srgbClr val="222B38"/>
                           </a:solidFill>
                           <a:latin typeface="Calibri"/>
                         </a:rPr>
-                        <a:t>IHSG, SP500, VIX</a:t>
+                        <a:t>Baris kosong (1 Jan 2010)</a:t>
                       </a:r>
                     </a:p>
                   </a:txBody>
@@ -11229,13 +12283,13 @@
                     <a:lstStyle/>
                     <a:p>
                       <a:r>
-                        <a:rPr sz="1400" b="0">
-                          <a:solidFill>
-                            <a:srgbClr val="1A9850"/>
-                          </a:solidFill>
-                          <a:latin typeface="Calibri"/>
-                        </a:rPr>
-                        <a:t>Ya</a:t>
+                        <a:rPr sz="1300" b="0">
+                          <a:solidFill>
+                            <a:srgbClr val="222B38"/>
+                          </a:solidFill>
+                          <a:latin typeface="Calibri"/>
+                        </a:rPr>
+                        <a:t>1 baris</a:t>
                       </a:r>
                     </a:p>
                   </a:txBody>
@@ -11245,21 +12299,43 @@
                     </a:solidFill>
                   </a:tcPr>
                 </a:tc>
+                <a:tc>
+                  <a:txBody>
+                    <a:bodyPr/>
+                    <a:lstStyle/>
+                    <a:p>
+                      <a:r>
+                        <a:rPr sz="1300" b="0">
+                          <a:solidFill>
+                            <a:srgbClr val="222B38"/>
+                          </a:solidFill>
+                          <a:latin typeface="Calibri"/>
+                        </a:rPr>
+                        <a:t>Dihapus</a:t>
+                      </a:r>
+                    </a:p>
+                  </a:txBody>
+                  <a:tcPr anchor="ctr" marL="73152" marR="73152">
+                    <a:solidFill>
+                      <a:srgbClr val="FFFFFF"/>
+                    </a:solidFill>
+                  </a:tcPr>
+                </a:tc>
               </a:tr>
-              <a:tr h="457200">
-                <a:tc>
-                  <a:txBody>
-                    <a:bodyPr/>
-                    <a:lstStyle/>
-                    <a:p>
-                      <a:r>
-                        <a:rPr sz="1400" b="0">
+              <a:tr h="384048">
+                <a:tc>
+                  <a:txBody>
+                    <a:bodyPr/>
+                    <a:lstStyle/>
+                    <a:p>
+                      <a:r>
+                        <a:rPr sz="1300" b="0">
                           <a:solidFill>
                             <a:srgbClr val="222B38"/>
                           </a:solidFill>
                           <a:latin typeface="Calibri"/>
                         </a:rPr>
-                        <a:t>OIL, GOLD</a:t>
+                        <a:t>Tanggal ganda</a:t>
                       </a:r>
                     </a:p>
                   </a:txBody>
@@ -11275,13 +12351,13 @@
                     <a:lstStyle/>
                     <a:p>
                       <a:r>
-                        <a:rPr sz="1400" b="0">
-                          <a:solidFill>
-                            <a:srgbClr val="1A9850"/>
-                          </a:solidFill>
-                          <a:latin typeface="Calibri"/>
-                        </a:rPr>
-                        <a:t>Ya</a:t>
+                        <a:rPr sz="1300" b="0">
+                          <a:solidFill>
+                            <a:srgbClr val="222B38"/>
+                          </a:solidFill>
+                          <a:latin typeface="Calibri"/>
+                        </a:rPr>
+                        <a:t>0</a:t>
                       </a:r>
                     </a:p>
                   </a:txBody>
@@ -11291,21 +12367,43 @@
                     </a:solidFill>
                   </a:tcPr>
                 </a:tc>
+                <a:tc>
+                  <a:txBody>
+                    <a:bodyPr/>
+                    <a:lstStyle/>
+                    <a:p>
+                      <a:r>
+                        <a:rPr sz="1300" b="0">
+                          <a:solidFill>
+                            <a:srgbClr val="222B38"/>
+                          </a:solidFill>
+                          <a:latin typeface="Calibri"/>
+                        </a:rPr>
+                        <a:t>–</a:t>
+                      </a:r>
+                    </a:p>
+                  </a:txBody>
+                  <a:tcPr anchor="ctr" marL="73152" marR="73152">
+                    <a:solidFill>
+                      <a:srgbClr val="F3F5F9"/>
+                    </a:solidFill>
+                  </a:tcPr>
+                </a:tc>
               </a:tr>
-              <a:tr h="457200">
-                <a:tc>
-                  <a:txBody>
-                    <a:bodyPr/>
-                    <a:lstStyle/>
-                    <a:p>
-                      <a:r>
-                        <a:rPr sz="1400" b="0">
+              <a:tr h="384048">
+                <a:tc>
+                  <a:txBody>
+                    <a:bodyPr/>
+                    <a:lstStyle/>
+                    <a:p>
+                      <a:r>
+                        <a:rPr sz="1300" b="0">
                           <a:solidFill>
                             <a:srgbClr val="222B38"/>
                           </a:solidFill>
                           <a:latin typeface="Calibri"/>
                         </a:rPr>
-                        <a:t>CPI, BI_rate, US_rate</a:t>
+                        <a:t>Harga minyak negatif (20 Apr 2020)</a:t>
                       </a:r>
                     </a:p>
                   </a:txBody>
@@ -11321,19 +12419,109 @@
                     <a:lstStyle/>
                     <a:p>
                       <a:r>
-                        <a:rPr sz="1400" b="0">
-                          <a:solidFill>
-                            <a:srgbClr val="D73027"/>
-                          </a:solidFill>
-                          <a:latin typeface="Calibri"/>
-                        </a:rPr>
-                        <a:t>Tidak — jarang berubah</a:t>
+                        <a:rPr sz="1300" b="0">
+                          <a:solidFill>
+                            <a:srgbClr val="222B38"/>
+                          </a:solidFill>
+                          <a:latin typeface="Calibri"/>
+                        </a:rPr>
+                        <a:t>1 nilai</a:t>
                       </a:r>
                     </a:p>
                   </a:txBody>
                   <a:tcPr anchor="ctr" marL="73152" marR="73152">
                     <a:solidFill>
                       <a:srgbClr val="FFFFFF"/>
+                    </a:solidFill>
+                  </a:tcPr>
+                </a:tc>
+                <a:tc>
+                  <a:txBody>
+                    <a:bodyPr/>
+                    <a:lstStyle/>
+                    <a:p>
+                      <a:r>
+                        <a:rPr sz="1300" b="0">
+                          <a:solidFill>
+                            <a:srgbClr val="222B38"/>
+                          </a:solidFill>
+                          <a:latin typeface="Calibri"/>
+                        </a:rPr>
+                        <a:t>Diganti nilai hari sebelumnya</a:t>
+                      </a:r>
+                    </a:p>
+                  </a:txBody>
+                  <a:tcPr anchor="ctr" marL="73152" marR="73152">
+                    <a:solidFill>
+                      <a:srgbClr val="FFFFFF"/>
+                    </a:solidFill>
+                  </a:tcPr>
+                </a:tc>
+              </a:tr>
+              <a:tr h="384048">
+                <a:tc>
+                  <a:txBody>
+                    <a:bodyPr/>
+                    <a:lstStyle/>
+                    <a:p>
+                      <a:r>
+                        <a:rPr sz="1300" b="0">
+                          <a:solidFill>
+                            <a:srgbClr val="222B38"/>
+                          </a:solidFill>
+                          <a:latin typeface="Calibri"/>
+                        </a:rPr>
+                        <a:t>Hari libur BEI (IHSG disalin)</a:t>
+                      </a:r>
+                    </a:p>
+                  </a:txBody>
+                  <a:tcPr anchor="ctr" marL="73152" marR="73152">
+                    <a:solidFill>
+                      <a:srgbClr val="F3F5F9"/>
+                    </a:solidFill>
+                  </a:tcPr>
+                </a:tc>
+                <a:tc>
+                  <a:txBody>
+                    <a:bodyPr/>
+                    <a:lstStyle/>
+                    <a:p>
+                      <a:r>
+                        <a:rPr sz="1300" b="0">
+                          <a:solidFill>
+                            <a:srgbClr val="222B38"/>
+                          </a:solidFill>
+                          <a:latin typeface="Calibri"/>
+                        </a:rPr>
+                        <a:t>304 baris</a:t>
+                      </a:r>
+                    </a:p>
+                  </a:txBody>
+                  <a:tcPr anchor="ctr" marL="73152" marR="73152">
+                    <a:solidFill>
+                      <a:srgbClr val="F3F5F9"/>
+                    </a:solidFill>
+                  </a:tcPr>
+                </a:tc>
+                <a:tc>
+                  <a:txBody>
+                    <a:bodyPr/>
+                    <a:lstStyle/>
+                    <a:p>
+                      <a:r>
+                        <a:rPr sz="1300" b="0">
+                          <a:solidFill>
+                            <a:srgbClr val="222B38"/>
+                          </a:solidFill>
+                          <a:latin typeface="Calibri"/>
+                        </a:rPr>
+                        <a:t>Dihapus</a:t>
+                      </a:r>
+                    </a:p>
+                  </a:txBody>
+                  <a:tcPr anchor="ctr" marL="73152" marR="73152">
+                    <a:solidFill>
+                      <a:srgbClr val="F3F5F9"/>
                     </a:solidFill>
                   </a:tcPr>
                 </a:tc>
@@ -11342,432 +12530,6 @@
           </a:graphicData>
         </a:graphic>
       </p:graphicFrame>
-      <p:sp>
-        <p:nvSpPr>
-          <p:cNvPr id="10" name="TextBox 9"/>
-          <p:cNvSpPr txBox="1"/>
-          <p:nvPr/>
-        </p:nvSpPr>
-        <p:spPr>
-          <a:xfrm>
-            <a:off x="411480" y="3749039"/>
-            <a:ext cx="5577840" cy="1463040"/>
-          </a:xfrm>
-          <a:prstGeom prst="rect">
-            <a:avLst/>
-          </a:prstGeom>
-          <a:noFill/>
-        </p:spPr>
-        <p:txBody>
-          <a:bodyPr wrap="square" anchor="t">
-            <a:spAutoFit/>
-          </a:bodyPr>
-          <a:lstStyle/>
-          <a:p>
-            <a:pPr algn="l">
-              <a:spcAft>
-                <a:spcPts val="800"/>
-              </a:spcAft>
-            </a:pPr>
-            <a:r>
-              <a:rPr sz="1600" b="1">
-                <a:solidFill>
-                  <a:srgbClr val="222B38"/>
-                </a:solidFill>
-                <a:latin typeface="Calibri"/>
-              </a:rPr>
-              <a:t>Unit analisis: </a:t>
-            </a:r>
-            <a:r>
-              <a:rPr sz="1600" b="0">
-                <a:solidFill>
-                  <a:srgbClr val="222B38"/>
-                </a:solidFill>
-                <a:latin typeface="Calibri"/>
-              </a:rPr>
-              <a:t>satu hari bursa BEI.</a:t>
-            </a:r>
-          </a:p>
-          <a:p>
-            <a:pPr algn="l">
-              <a:spcAft>
-                <a:spcPts val="800"/>
-              </a:spcAft>
-            </a:pPr>
-            <a:r>
-              <a:rPr sz="1600" b="1">
-                <a:solidFill>
-                  <a:srgbClr val="222B38"/>
-                </a:solidFill>
-                <a:latin typeface="Calibri"/>
-              </a:rPr>
-              <a:t>Target: </a:t>
-            </a:r>
-            <a:r>
-              <a:rPr sz="1600" b="0">
-                <a:solidFill>
-                  <a:srgbClr val="222B38"/>
-                </a:solidFill>
-                <a:latin typeface="Calibri"/>
-              </a:rPr>
-              <a:t>1 jika IHSG hari bursa berikutnya naik.</a:t>
-            </a:r>
-          </a:p>
-        </p:txBody>
-      </p:sp>
-      <p:graphicFrame>
-        <p:nvGraphicFramePr>
-          <p:cNvPr id="11" name="Table 10"/>
-          <p:cNvGraphicFramePr>
-            <a:graphicFrameLocks noGrp="1"/>
-          </p:cNvGraphicFramePr>
-          <p:nvPr/>
-        </p:nvGraphicFramePr>
-        <p:xfrm>
-          <a:off x="6263640" y="1234440"/>
-          <a:ext cx="5532120" cy="1828800"/>
-        </p:xfrm>
-        <a:graphic>
-          <a:graphicData uri="http://schemas.openxmlformats.org/drawingml/2006/table">
-            <a:tbl>
-              <a:tblPr firstRow="1" bandRow="1">
-                <a:tableStyleId>{5C22544A-7EE6-4342-B048-85BDC9FD1C3A}</a:tableStyleId>
-              </a:tblPr>
-              <a:tblGrid>
-                <a:gridCol w="3291840"/>
-                <a:gridCol w="2240280"/>
-              </a:tblGrid>
-              <a:tr h="457200">
-                <a:tc>
-                  <a:txBody>
-                    <a:bodyPr/>
-                    <a:lstStyle/>
-                    <a:p>
-                      <a:r>
-                        <a:rPr sz="1400" b="1">
-                          <a:solidFill>
-                            <a:srgbClr val="FFFFFF"/>
-                          </a:solidFill>
-                          <a:latin typeface="Calibri"/>
-                        </a:rPr>
-                        <a:t>Langkah pembersihan</a:t>
-                      </a:r>
-                    </a:p>
-                  </a:txBody>
-                  <a:tcPr anchor="ctr" marL="73152" marR="73152">
-                    <a:solidFill>
-                      <a:srgbClr val="1F3A5F"/>
-                    </a:solidFill>
-                  </a:tcPr>
-                </a:tc>
-                <a:tc>
-                  <a:txBody>
-                    <a:bodyPr/>
-                    <a:lstStyle/>
-                    <a:p>
-                      <a:r>
-                        <a:rPr sz="1400" b="1">
-                          <a:solidFill>
-                            <a:srgbClr val="FFFFFF"/>
-                          </a:solidFill>
-                          <a:latin typeface="Calibri"/>
-                        </a:rPr>
-                        <a:t>Hasil</a:t>
-                      </a:r>
-                    </a:p>
-                  </a:txBody>
-                  <a:tcPr anchor="ctr" marL="73152" marR="73152">
-                    <a:solidFill>
-                      <a:srgbClr val="1F3A5F"/>
-                    </a:solidFill>
-                  </a:tcPr>
-                </a:tc>
-              </a:tr>
-              <a:tr h="457200">
-                <a:tc>
-                  <a:txBody>
-                    <a:bodyPr/>
-                    <a:lstStyle/>
-                    <a:p>
-                      <a:r>
-                        <a:rPr sz="1400" b="0">
-                          <a:solidFill>
-                            <a:srgbClr val="222B38"/>
-                          </a:solidFill>
-                          <a:latin typeface="Calibri"/>
-                        </a:rPr>
-                        <a:t>1. Hapus baris kosong</a:t>
-                      </a:r>
-                    </a:p>
-                  </a:txBody>
-                  <a:tcPr anchor="ctr" marL="73152" marR="73152">
-                    <a:solidFill>
-                      <a:srgbClr val="FFFFFF"/>
-                    </a:solidFill>
-                  </a:tcPr>
-                </a:tc>
-                <a:tc>
-                  <a:txBody>
-                    <a:bodyPr/>
-                    <a:lstStyle/>
-                    <a:p>
-                      <a:r>
-                        <a:rPr sz="1400" b="0">
-                          <a:solidFill>
-                            <a:srgbClr val="222B38"/>
-                          </a:solidFill>
-                          <a:latin typeface="Calibri"/>
-                        </a:rPr>
-                        <a:t>4.365 → 4.364</a:t>
-                      </a:r>
-                    </a:p>
-                  </a:txBody>
-                  <a:tcPr anchor="ctr" marL="73152" marR="73152">
-                    <a:solidFill>
-                      <a:srgbClr val="FFFFFF"/>
-                    </a:solidFill>
-                  </a:tcPr>
-                </a:tc>
-              </a:tr>
-              <a:tr h="457200">
-                <a:tc>
-                  <a:txBody>
-                    <a:bodyPr/>
-                    <a:lstStyle/>
-                    <a:p>
-                      <a:r>
-                        <a:rPr sz="1400" b="0">
-                          <a:solidFill>
-                            <a:srgbClr val="222B38"/>
-                          </a:solidFill>
-                          <a:latin typeface="Calibri"/>
-                        </a:rPr>
-                        <a:t>2. Perbaiki minyak negatif</a:t>
-                      </a:r>
-                    </a:p>
-                  </a:txBody>
-                  <a:tcPr anchor="ctr" marL="73152" marR="73152">
-                    <a:solidFill>
-                      <a:srgbClr val="F3F5F9"/>
-                    </a:solidFill>
-                  </a:tcPr>
-                </a:tc>
-                <a:tc>
-                  <a:txBody>
-                    <a:bodyPr/>
-                    <a:lstStyle/>
-                    <a:p>
-                      <a:r>
-                        <a:rPr sz="1400" b="0">
-                          <a:solidFill>
-                            <a:srgbClr val="222B38"/>
-                          </a:solidFill>
-                          <a:latin typeface="Calibri"/>
-                        </a:rPr>
-                        <a:t>1 nilai</a:t>
-                      </a:r>
-                    </a:p>
-                  </a:txBody>
-                  <a:tcPr anchor="ctr" marL="73152" marR="73152">
-                    <a:solidFill>
-                      <a:srgbClr val="F3F5F9"/>
-                    </a:solidFill>
-                  </a:tcPr>
-                </a:tc>
-              </a:tr>
-              <a:tr h="457200">
-                <a:tc>
-                  <a:txBody>
-                    <a:bodyPr/>
-                    <a:lstStyle/>
-                    <a:p>
-                      <a:r>
-                        <a:rPr sz="1400" b="0">
-                          <a:solidFill>
-                            <a:srgbClr val="222B38"/>
-                          </a:solidFill>
-                          <a:latin typeface="Calibri"/>
-                        </a:rPr>
-                        <a:t>3. Hapus hari libur BEI</a:t>
-                      </a:r>
-                    </a:p>
-                  </a:txBody>
-                  <a:tcPr anchor="ctr" marL="73152" marR="73152">
-                    <a:solidFill>
-                      <a:srgbClr val="FFFFFF"/>
-                    </a:solidFill>
-                  </a:tcPr>
-                </a:tc>
-                <a:tc>
-                  <a:txBody>
-                    <a:bodyPr/>
-                    <a:lstStyle/>
-                    <a:p>
-                      <a:r>
-                        <a:rPr sz="1400" b="0">
-                          <a:solidFill>
-                            <a:srgbClr val="222B38"/>
-                          </a:solidFill>
-                          <a:latin typeface="Calibri"/>
-                        </a:rPr>
-                        <a:t>4.364 → 4.060</a:t>
-                      </a:r>
-                    </a:p>
-                  </a:txBody>
-                  <a:tcPr anchor="ctr" marL="73152" marR="73152">
-                    <a:solidFill>
-                      <a:srgbClr val="FFFFFF"/>
-                    </a:solidFill>
-                  </a:tcPr>
-                </a:tc>
-              </a:tr>
-            </a:tbl>
-          </a:graphicData>
-        </a:graphic>
-      </p:graphicFrame>
-      <p:sp>
-        <p:nvSpPr>
-          <p:cNvPr id="12" name="Rectangle 11"/>
-          <p:cNvSpPr/>
-          <p:nvPr/>
-        </p:nvSpPr>
-        <p:spPr>
-          <a:xfrm>
-            <a:off x="6263640" y="3291840"/>
-            <a:ext cx="5532120" cy="1097280"/>
-          </a:xfrm>
-          <a:prstGeom prst="rect">
-            <a:avLst/>
-          </a:prstGeom>
-          <a:solidFill>
-            <a:srgbClr val="F3F5F9"/>
-          </a:solidFill>
-          <a:ln>
-            <a:noFill/>
-          </a:ln>
-          <a:effectLst/>
-        </p:spPr>
-        <p:style>
-          <a:lnRef idx="1">
-            <a:schemeClr val="accent1"/>
-          </a:lnRef>
-          <a:fillRef idx="3">
-            <a:schemeClr val="accent1"/>
-          </a:fillRef>
-          <a:effectRef idx="2">
-            <a:schemeClr val="accent1"/>
-          </a:effectRef>
-          <a:fontRef idx="minor">
-            <a:schemeClr val="lt1"/>
-          </a:fontRef>
-        </p:style>
-        <p:txBody>
-          <a:bodyPr rtlCol="0" anchor="ctr"/>
-          <a:lstStyle/>
-          <a:p>
-            <a:pPr algn="ctr"/>
-          </a:p>
-        </p:txBody>
-      </p:sp>
-      <p:sp>
-        <p:nvSpPr>
-          <p:cNvPr id="13" name="Rectangle 12"/>
-          <p:cNvSpPr/>
-          <p:nvPr/>
-        </p:nvSpPr>
-        <p:spPr>
-          <a:xfrm>
-            <a:off x="6263640" y="3291840"/>
-            <a:ext cx="64008" cy="1097280"/>
-          </a:xfrm>
-          <a:prstGeom prst="rect">
-            <a:avLst/>
-          </a:prstGeom>
-          <a:solidFill>
-            <a:srgbClr val="1A9850"/>
-          </a:solidFill>
-          <a:ln>
-            <a:noFill/>
-          </a:ln>
-          <a:effectLst/>
-        </p:spPr>
-        <p:style>
-          <a:lnRef idx="1">
-            <a:schemeClr val="accent1"/>
-          </a:lnRef>
-          <a:fillRef idx="3">
-            <a:schemeClr val="accent1"/>
-          </a:fillRef>
-          <a:effectRef idx="2">
-            <a:schemeClr val="accent1"/>
-          </a:effectRef>
-          <a:fontRef idx="minor">
-            <a:schemeClr val="lt1"/>
-          </a:fontRef>
-        </p:style>
-        <p:txBody>
-          <a:bodyPr rtlCol="0" anchor="ctr"/>
-          <a:lstStyle/>
-          <a:p>
-            <a:pPr algn="ctr"/>
-          </a:p>
-        </p:txBody>
-      </p:sp>
-      <p:sp>
-        <p:nvSpPr>
-          <p:cNvPr id="14" name="TextBox 13"/>
-          <p:cNvSpPr txBox="1"/>
-          <p:nvPr/>
-        </p:nvSpPr>
-        <p:spPr>
-          <a:xfrm>
-            <a:off x="6492240" y="3401568"/>
-            <a:ext cx="5166359" cy="914400"/>
-          </a:xfrm>
-          <a:prstGeom prst="rect">
-            <a:avLst/>
-          </a:prstGeom>
-          <a:noFill/>
-        </p:spPr>
-        <p:txBody>
-          <a:bodyPr wrap="square" anchor="t">
-            <a:spAutoFit/>
-          </a:bodyPr>
-          <a:lstStyle/>
-          <a:p>
-            <a:pPr algn="l">
-              <a:spcAft>
-                <a:spcPts val="800"/>
-              </a:spcAft>
-            </a:pPr>
-            <a:r>
-              <a:rPr sz="1800" b="1">
-                <a:solidFill>
-                  <a:srgbClr val="1A9850"/>
-                </a:solidFill>
-                <a:latin typeface="Calibri"/>
-              </a:rPr>
-              <a:t>Hasil</a:t>
-            </a:r>
-          </a:p>
-          <a:p>
-            <a:pPr algn="l">
-              <a:spcAft>
-                <a:spcPts val="800"/>
-              </a:spcAft>
-            </a:pPr>
-            <a:r>
-              <a:rPr sz="1700" b="0">
-                <a:solidFill>
-                  <a:srgbClr val="222B38"/>
-                </a:solidFill>
-                <a:latin typeface="Calibri"/>
-              </a:rPr>
-              <a:t>4.060 hari bursa bersih, tanpa data kosong.</a:t>
-            </a:r>
-          </a:p>
-        </p:txBody>
-      </p:sp>
     </p:spTree>
   </p:cSld>
   <p:clrMapOvr>
@@ -11864,7 +12626,7 @@
                 </a:solidFill>
                 <a:latin typeface="Calibri"/>
               </a:rPr>
-              <a:t>Konstruksi data dan skenario model</a:t>
+              <a:t>Objek data dan pembersihan</a:t>
             </a:r>
           </a:p>
         </p:txBody>
@@ -11947,7 +12709,7 @@
                 </a:solidFill>
                 <a:latin typeface="Calibri"/>
               </a:rPr>
-              <a:t>Unit 7–8</a:t>
+              <a:t>Unit 5–6</a:t>
             </a:r>
           </a:p>
         </p:txBody>
@@ -12074,139 +12836,17 @@
           </a:p>
         </p:txBody>
       </p:sp>
-      <p:pic>
-        <p:nvPicPr>
-          <p:cNvPr id="9" name="Picture 8" descr="07_pembagian_data.png"/>
-          <p:cNvPicPr>
-            <a:picLocks noChangeAspect="1"/>
-          </p:cNvPicPr>
-          <p:nvPr/>
-        </p:nvPicPr>
-        <p:blipFill>
-          <a:blip r:embed="rId2"/>
-          <a:stretch>
-            <a:fillRect/>
-          </a:stretch>
-        </p:blipFill>
-        <p:spPr>
-          <a:xfrm>
-            <a:off x="411480" y="1220650"/>
-            <a:ext cx="6675120" cy="2496459"/>
-          </a:xfrm>
-          <a:prstGeom prst="rect">
-            <a:avLst/>
-          </a:prstGeom>
-        </p:spPr>
-      </p:pic>
-      <p:sp>
-        <p:nvSpPr>
-          <p:cNvPr id="10" name="TextBox 9"/>
-          <p:cNvSpPr txBox="1"/>
-          <p:nvPr/>
-        </p:nvSpPr>
-        <p:spPr>
-          <a:xfrm>
-            <a:off x="411480" y="3931920"/>
-            <a:ext cx="6675120" cy="2103120"/>
-          </a:xfrm>
-          <a:prstGeom prst="rect">
-            <a:avLst/>
-          </a:prstGeom>
-          <a:noFill/>
-        </p:spPr>
-        <p:txBody>
-          <a:bodyPr wrap="square" anchor="t">
-            <a:spAutoFit/>
-          </a:bodyPr>
-          <a:lstStyle/>
-          <a:p>
-            <a:pPr algn="l">
-              <a:spcAft>
-                <a:spcPts val="800"/>
-              </a:spcAft>
-            </a:pPr>
-            <a:r>
-              <a:rPr sz="1500" b="1">
-                <a:solidFill>
-                  <a:srgbClr val="222B38"/>
-                </a:solidFill>
-                <a:latin typeface="Calibri"/>
-              </a:rPr>
-              <a:t>5 fitur: </a:t>
-            </a:r>
-            <a:r>
-              <a:rPr sz="1500" b="0">
-                <a:solidFill>
-                  <a:srgbClr val="222B38"/>
-                </a:solidFill>
-                <a:latin typeface="Calibri"/>
-              </a:rPr>
-              <a:t>perubahan harian (%) IHSG, S&amp;P 500, VIX, minyak, dan emas.</a:t>
-            </a:r>
-          </a:p>
-          <a:p>
-            <a:pPr algn="l">
-              <a:spcAft>
-                <a:spcPts val="800"/>
-              </a:spcAft>
-            </a:pPr>
-            <a:r>
-              <a:rPr sz="1500" b="1">
-                <a:solidFill>
-                  <a:srgbClr val="222B38"/>
-                </a:solidFill>
-                <a:latin typeface="Calibri"/>
-              </a:rPr>
-              <a:t>Data latih: </a:t>
-            </a:r>
-            <a:r>
-              <a:rPr sz="1500" b="0">
-                <a:solidFill>
-                  <a:srgbClr val="222B38"/>
-                </a:solidFill>
-                <a:latin typeface="Calibri"/>
-              </a:rPr>
-              <a:t>3.246 hari (2010 – Apr 2023).</a:t>
-            </a:r>
-          </a:p>
-          <a:p>
-            <a:pPr algn="l">
-              <a:spcAft>
-                <a:spcPts val="800"/>
-              </a:spcAft>
-            </a:pPr>
-            <a:r>
-              <a:rPr sz="1500" b="1">
-                <a:solidFill>
-                  <a:srgbClr val="222B38"/>
-                </a:solidFill>
-                <a:latin typeface="Calibri"/>
-              </a:rPr>
-              <a:t>Data uji: </a:t>
-            </a:r>
-            <a:r>
-              <a:rPr sz="1500" b="0">
-                <a:solidFill>
-                  <a:srgbClr val="222B38"/>
-                </a:solidFill>
-                <a:latin typeface="Calibri"/>
-              </a:rPr>
-              <a:t>812 hari (Apr 2023 – Sep 2026), tidak diacak.</a:t>
-            </a:r>
-          </a:p>
-        </p:txBody>
-      </p:sp>
       <p:graphicFrame>
         <p:nvGraphicFramePr>
-          <p:cNvPr id="11" name="Table 10"/>
+          <p:cNvPr id="9" name="Table 8"/>
           <p:cNvGraphicFramePr>
             <a:graphicFrameLocks noGrp="1"/>
           </p:cNvGraphicFramePr>
           <p:nvPr/>
         </p:nvGraphicFramePr>
         <p:xfrm>
-          <a:off x="7360920" y="1234440"/>
-          <a:ext cx="4434840" cy="2743200"/>
+          <a:off x="411480" y="1234440"/>
+          <a:ext cx="5577840" cy="1828800"/>
         </p:xfrm>
         <a:graphic>
           <a:graphicData uri="http://schemas.openxmlformats.org/drawingml/2006/table">
@@ -12215,8 +12855,8 @@
                 <a:tableStyleId>{5C22544A-7EE6-4342-B048-85BDC9FD1C3A}</a:tableStyleId>
               </a:tblPr>
               <a:tblGrid>
-                <a:gridCol w="2743200"/>
-                <a:gridCol w="1691640"/>
+                <a:gridCol w="2651760"/>
+                <a:gridCol w="2926080"/>
               </a:tblGrid>
               <a:tr h="457200">
                 <a:tc>
@@ -12231,7 +12871,7 @@
                           </a:solidFill>
                           <a:latin typeface="Calibri"/>
                         </a:rPr>
-                        <a:t>Skenario</a:t>
+                        <a:t>Variabel</a:t>
                       </a:r>
                     </a:p>
                   </a:txBody>
@@ -12253,7 +12893,7 @@
                           </a:solidFill>
                           <a:latin typeface="Calibri"/>
                         </a:rPr>
-                        <a:t>Jenis</a:t>
+                        <a:t>Dipakai?</a:t>
                       </a:r>
                     </a:p>
                   </a:txBody>
@@ -12277,7 +12917,7 @@
                           </a:solidFill>
                           <a:latin typeface="Calibri"/>
                         </a:rPr>
-                        <a:t>Selalu Naik</a:t>
+                        <a:t>IHSG, SP500, VIX</a:t>
                       </a:r>
                     </a:p>
                   </a:txBody>
@@ -12295,11 +12935,11 @@
                       <a:r>
                         <a:rPr sz="1400" b="0">
                           <a:solidFill>
-                            <a:srgbClr val="222B38"/>
-                          </a:solidFill>
-                          <a:latin typeface="Calibri"/>
-                        </a:rPr>
-                        <a:t>Baseline</a:t>
+                            <a:srgbClr val="1A9850"/>
+                          </a:solidFill>
+                          <a:latin typeface="Calibri"/>
+                        </a:rPr>
+                        <a:t>Ya</a:t>
                       </a:r>
                     </a:p>
                   </a:txBody>
@@ -12323,7 +12963,7 @@
                           </a:solidFill>
                           <a:latin typeface="Calibri"/>
                         </a:rPr>
-                        <a:t>Ikuti S&amp;P 500</a:t>
+                        <a:t>OIL, GOLD</a:t>
                       </a:r>
                     </a:p>
                   </a:txBody>
@@ -12341,11 +12981,11 @@
                       <a:r>
                         <a:rPr sz="1400" b="0">
                           <a:solidFill>
-                            <a:srgbClr val="222B38"/>
-                          </a:solidFill>
-                          <a:latin typeface="Calibri"/>
-                        </a:rPr>
-                        <a:t>Baseline</a:t>
+                            <a:srgbClr val="1A9850"/>
+                          </a:solidFill>
+                          <a:latin typeface="Calibri"/>
+                        </a:rPr>
+                        <a:t>Ya</a:t>
                       </a:r>
                     </a:p>
                   </a:txBody>
@@ -12369,7 +13009,7 @@
                           </a:solidFill>
                           <a:latin typeface="Calibri"/>
                         </a:rPr>
-                        <a:t>Logistic Regression</a:t>
+                        <a:t>CPI, BI_rate, US_rate</a:t>
                       </a:r>
                     </a:p>
                   </a:txBody>
@@ -12387,103 +13027,11 @@
                       <a:r>
                         <a:rPr sz="1400" b="0">
                           <a:solidFill>
-                            <a:srgbClr val="222B38"/>
-                          </a:solidFill>
-                          <a:latin typeface="Calibri"/>
-                        </a:rPr>
-                        <a:t>Model</a:t>
-                      </a:r>
-                    </a:p>
-                  </a:txBody>
-                  <a:tcPr anchor="ctr" marL="73152" marR="73152">
-                    <a:solidFill>
-                      <a:srgbClr val="FFFFFF"/>
-                    </a:solidFill>
-                  </a:tcPr>
-                </a:tc>
-              </a:tr>
-              <a:tr h="457200">
-                <a:tc>
-                  <a:txBody>
-                    <a:bodyPr/>
-                    <a:lstStyle/>
-                    <a:p>
-                      <a:r>
-                        <a:rPr sz="1400" b="0">
-                          <a:solidFill>
-                            <a:srgbClr val="222B38"/>
-                          </a:solidFill>
-                          <a:latin typeface="Calibri"/>
-                        </a:rPr>
-                        <a:t>Decision Tree</a:t>
-                      </a:r>
-                    </a:p>
-                  </a:txBody>
-                  <a:tcPr anchor="ctr" marL="73152" marR="73152">
-                    <a:solidFill>
-                      <a:srgbClr val="F3F5F9"/>
-                    </a:solidFill>
-                  </a:tcPr>
-                </a:tc>
-                <a:tc>
-                  <a:txBody>
-                    <a:bodyPr/>
-                    <a:lstStyle/>
-                    <a:p>
-                      <a:r>
-                        <a:rPr sz="1400" b="0">
-                          <a:solidFill>
-                            <a:srgbClr val="222B38"/>
-                          </a:solidFill>
-                          <a:latin typeface="Calibri"/>
-                        </a:rPr>
-                        <a:t>Model</a:t>
-                      </a:r>
-                    </a:p>
-                  </a:txBody>
-                  <a:tcPr anchor="ctr" marL="73152" marR="73152">
-                    <a:solidFill>
-                      <a:srgbClr val="F3F5F9"/>
-                    </a:solidFill>
-                  </a:tcPr>
-                </a:tc>
-              </a:tr>
-              <a:tr h="457200">
-                <a:tc>
-                  <a:txBody>
-                    <a:bodyPr/>
-                    <a:lstStyle/>
-                    <a:p>
-                      <a:r>
-                        <a:rPr sz="1400" b="0">
-                          <a:solidFill>
-                            <a:srgbClr val="222B38"/>
-                          </a:solidFill>
-                          <a:latin typeface="Calibri"/>
-                        </a:rPr>
-                        <a:t>Random Forest</a:t>
-                      </a:r>
-                    </a:p>
-                  </a:txBody>
-                  <a:tcPr anchor="ctr" marL="73152" marR="73152">
-                    <a:solidFill>
-                      <a:srgbClr val="FFFFFF"/>
-                    </a:solidFill>
-                  </a:tcPr>
-                </a:tc>
-                <a:tc>
-                  <a:txBody>
-                    <a:bodyPr/>
-                    <a:lstStyle/>
-                    <a:p>
-                      <a:r>
-                        <a:rPr sz="1400" b="0">
-                          <a:solidFill>
-                            <a:srgbClr val="222B38"/>
-                          </a:solidFill>
-                          <a:latin typeface="Calibri"/>
-                        </a:rPr>
-                        <a:t>Model</a:t>
+                            <a:srgbClr val="D73027"/>
+                          </a:solidFill>
+                          <a:latin typeface="Calibri"/>
+                        </a:rPr>
+                        <a:t>Tidak — jarang berubah</a:t>
                       </a:r>
                     </a:p>
                   </a:txBody>
@@ -12500,14 +13048,14 @@
       </p:graphicFrame>
       <p:sp>
         <p:nvSpPr>
-          <p:cNvPr id="12" name="TextBox 11"/>
+          <p:cNvPr id="10" name="TextBox 9"/>
           <p:cNvSpPr txBox="1"/>
           <p:nvPr/>
         </p:nvSpPr>
         <p:spPr>
           <a:xfrm>
-            <a:off x="7360920" y="4160520"/>
-            <a:ext cx="4434840" cy="1645920"/>
+            <a:off x="411480" y="3749039"/>
+            <a:ext cx="5577840" cy="1463040"/>
           </a:xfrm>
           <a:prstGeom prst="rect">
             <a:avLst/>
@@ -12526,13 +13074,400 @@
               </a:spcAft>
             </a:pPr>
             <a:r>
-              <a:rPr sz="1400" b="0">
-                <a:solidFill>
-                  <a:srgbClr val="5A6778"/>
+              <a:rPr sz="1600" b="1">
+                <a:solidFill>
+                  <a:srgbClr val="222B38"/>
                 </a:solidFill>
                 <a:latin typeface="Calibri"/>
               </a:rPr>
-              <a:t>Model dibandingkan dengan validasi silang deret waktu (5 bagian) pada data latih.</a:t>
+              <a:t>Unit analisis: </a:t>
+            </a:r>
+            <a:r>
+              <a:rPr sz="1600" b="0">
+                <a:solidFill>
+                  <a:srgbClr val="222B38"/>
+                </a:solidFill>
+                <a:latin typeface="Calibri"/>
+              </a:rPr>
+              <a:t>satu hari bursa BEI.</a:t>
+            </a:r>
+          </a:p>
+          <a:p>
+            <a:pPr algn="l">
+              <a:spcAft>
+                <a:spcPts val="800"/>
+              </a:spcAft>
+            </a:pPr>
+            <a:r>
+              <a:rPr sz="1600" b="1">
+                <a:solidFill>
+                  <a:srgbClr val="222B38"/>
+                </a:solidFill>
+                <a:latin typeface="Calibri"/>
+              </a:rPr>
+              <a:t>Target: </a:t>
+            </a:r>
+            <a:r>
+              <a:rPr sz="1600" b="0">
+                <a:solidFill>
+                  <a:srgbClr val="222B38"/>
+                </a:solidFill>
+                <a:latin typeface="Calibri"/>
+              </a:rPr>
+              <a:t>1 jika IHSG hari bursa berikutnya naik.</a:t>
+            </a:r>
+          </a:p>
+        </p:txBody>
+      </p:sp>
+      <p:graphicFrame>
+        <p:nvGraphicFramePr>
+          <p:cNvPr id="11" name="Table 10"/>
+          <p:cNvGraphicFramePr>
+            <a:graphicFrameLocks noGrp="1"/>
+          </p:cNvGraphicFramePr>
+          <p:nvPr/>
+        </p:nvGraphicFramePr>
+        <p:xfrm>
+          <a:off x="6263640" y="1234440"/>
+          <a:ext cx="5532120" cy="1828800"/>
+        </p:xfrm>
+        <a:graphic>
+          <a:graphicData uri="http://schemas.openxmlformats.org/drawingml/2006/table">
+            <a:tbl>
+              <a:tblPr firstRow="1" bandRow="1">
+                <a:tableStyleId>{5C22544A-7EE6-4342-B048-85BDC9FD1C3A}</a:tableStyleId>
+              </a:tblPr>
+              <a:tblGrid>
+                <a:gridCol w="3291840"/>
+                <a:gridCol w="2240280"/>
+              </a:tblGrid>
+              <a:tr h="457200">
+                <a:tc>
+                  <a:txBody>
+                    <a:bodyPr/>
+                    <a:lstStyle/>
+                    <a:p>
+                      <a:r>
+                        <a:rPr sz="1400" b="1">
+                          <a:solidFill>
+                            <a:srgbClr val="FFFFFF"/>
+                          </a:solidFill>
+                          <a:latin typeface="Calibri"/>
+                        </a:rPr>
+                        <a:t>Langkah pembersihan</a:t>
+                      </a:r>
+                    </a:p>
+                  </a:txBody>
+                  <a:tcPr anchor="ctr" marL="73152" marR="73152">
+                    <a:solidFill>
+                      <a:srgbClr val="1F3A5F"/>
+                    </a:solidFill>
+                  </a:tcPr>
+                </a:tc>
+                <a:tc>
+                  <a:txBody>
+                    <a:bodyPr/>
+                    <a:lstStyle/>
+                    <a:p>
+                      <a:r>
+                        <a:rPr sz="1400" b="1">
+                          <a:solidFill>
+                            <a:srgbClr val="FFFFFF"/>
+                          </a:solidFill>
+                          <a:latin typeface="Calibri"/>
+                        </a:rPr>
+                        <a:t>Hasil</a:t>
+                      </a:r>
+                    </a:p>
+                  </a:txBody>
+                  <a:tcPr anchor="ctr" marL="73152" marR="73152">
+                    <a:solidFill>
+                      <a:srgbClr val="1F3A5F"/>
+                    </a:solidFill>
+                  </a:tcPr>
+                </a:tc>
+              </a:tr>
+              <a:tr h="457200">
+                <a:tc>
+                  <a:txBody>
+                    <a:bodyPr/>
+                    <a:lstStyle/>
+                    <a:p>
+                      <a:r>
+                        <a:rPr sz="1400" b="0">
+                          <a:solidFill>
+                            <a:srgbClr val="222B38"/>
+                          </a:solidFill>
+                          <a:latin typeface="Calibri"/>
+                        </a:rPr>
+                        <a:t>1. Hapus baris kosong</a:t>
+                      </a:r>
+                    </a:p>
+                  </a:txBody>
+                  <a:tcPr anchor="ctr" marL="73152" marR="73152">
+                    <a:solidFill>
+                      <a:srgbClr val="FFFFFF"/>
+                    </a:solidFill>
+                  </a:tcPr>
+                </a:tc>
+                <a:tc>
+                  <a:txBody>
+                    <a:bodyPr/>
+                    <a:lstStyle/>
+                    <a:p>
+                      <a:r>
+                        <a:rPr sz="1400" b="0">
+                          <a:solidFill>
+                            <a:srgbClr val="222B38"/>
+                          </a:solidFill>
+                          <a:latin typeface="Calibri"/>
+                        </a:rPr>
+                        <a:t>4.365 → 4.364</a:t>
+                      </a:r>
+                    </a:p>
+                  </a:txBody>
+                  <a:tcPr anchor="ctr" marL="73152" marR="73152">
+                    <a:solidFill>
+                      <a:srgbClr val="FFFFFF"/>
+                    </a:solidFill>
+                  </a:tcPr>
+                </a:tc>
+              </a:tr>
+              <a:tr h="457200">
+                <a:tc>
+                  <a:txBody>
+                    <a:bodyPr/>
+                    <a:lstStyle/>
+                    <a:p>
+                      <a:r>
+                        <a:rPr sz="1400" b="0">
+                          <a:solidFill>
+                            <a:srgbClr val="222B38"/>
+                          </a:solidFill>
+                          <a:latin typeface="Calibri"/>
+                        </a:rPr>
+                        <a:t>2. Perbaiki minyak negatif</a:t>
+                      </a:r>
+                    </a:p>
+                  </a:txBody>
+                  <a:tcPr anchor="ctr" marL="73152" marR="73152">
+                    <a:solidFill>
+                      <a:srgbClr val="F3F5F9"/>
+                    </a:solidFill>
+                  </a:tcPr>
+                </a:tc>
+                <a:tc>
+                  <a:txBody>
+                    <a:bodyPr/>
+                    <a:lstStyle/>
+                    <a:p>
+                      <a:r>
+                        <a:rPr sz="1400" b="0">
+                          <a:solidFill>
+                            <a:srgbClr val="222B38"/>
+                          </a:solidFill>
+                          <a:latin typeface="Calibri"/>
+                        </a:rPr>
+                        <a:t>1 nilai</a:t>
+                      </a:r>
+                    </a:p>
+                  </a:txBody>
+                  <a:tcPr anchor="ctr" marL="73152" marR="73152">
+                    <a:solidFill>
+                      <a:srgbClr val="F3F5F9"/>
+                    </a:solidFill>
+                  </a:tcPr>
+                </a:tc>
+              </a:tr>
+              <a:tr h="457200">
+                <a:tc>
+                  <a:txBody>
+                    <a:bodyPr/>
+                    <a:lstStyle/>
+                    <a:p>
+                      <a:r>
+                        <a:rPr sz="1400" b="0">
+                          <a:solidFill>
+                            <a:srgbClr val="222B38"/>
+                          </a:solidFill>
+                          <a:latin typeface="Calibri"/>
+                        </a:rPr>
+                        <a:t>3. Hapus hari libur BEI</a:t>
+                      </a:r>
+                    </a:p>
+                  </a:txBody>
+                  <a:tcPr anchor="ctr" marL="73152" marR="73152">
+                    <a:solidFill>
+                      <a:srgbClr val="FFFFFF"/>
+                    </a:solidFill>
+                  </a:tcPr>
+                </a:tc>
+                <a:tc>
+                  <a:txBody>
+                    <a:bodyPr/>
+                    <a:lstStyle/>
+                    <a:p>
+                      <a:r>
+                        <a:rPr sz="1400" b="0">
+                          <a:solidFill>
+                            <a:srgbClr val="222B38"/>
+                          </a:solidFill>
+                          <a:latin typeface="Calibri"/>
+                        </a:rPr>
+                        <a:t>4.364 → 4.060</a:t>
+                      </a:r>
+                    </a:p>
+                  </a:txBody>
+                  <a:tcPr anchor="ctr" marL="73152" marR="73152">
+                    <a:solidFill>
+                      <a:srgbClr val="FFFFFF"/>
+                    </a:solidFill>
+                  </a:tcPr>
+                </a:tc>
+              </a:tr>
+            </a:tbl>
+          </a:graphicData>
+        </a:graphic>
+      </p:graphicFrame>
+      <p:sp>
+        <p:nvSpPr>
+          <p:cNvPr id="12" name="Rectangle 11"/>
+          <p:cNvSpPr/>
+          <p:nvPr/>
+        </p:nvSpPr>
+        <p:spPr>
+          <a:xfrm>
+            <a:off x="6263640" y="3291840"/>
+            <a:ext cx="5532120" cy="1097280"/>
+          </a:xfrm>
+          <a:prstGeom prst="rect">
+            <a:avLst/>
+          </a:prstGeom>
+          <a:solidFill>
+            <a:srgbClr val="F3F5F9"/>
+          </a:solidFill>
+          <a:ln>
+            <a:noFill/>
+          </a:ln>
+          <a:effectLst/>
+        </p:spPr>
+        <p:style>
+          <a:lnRef idx="1">
+            <a:schemeClr val="accent1"/>
+          </a:lnRef>
+          <a:fillRef idx="3">
+            <a:schemeClr val="accent1"/>
+          </a:fillRef>
+          <a:effectRef idx="2">
+            <a:schemeClr val="accent1"/>
+          </a:effectRef>
+          <a:fontRef idx="minor">
+            <a:schemeClr val="lt1"/>
+          </a:fontRef>
+        </p:style>
+        <p:txBody>
+          <a:bodyPr rtlCol="0" anchor="ctr"/>
+          <a:lstStyle/>
+          <a:p>
+            <a:pPr algn="ctr"/>
+          </a:p>
+        </p:txBody>
+      </p:sp>
+      <p:sp>
+        <p:nvSpPr>
+          <p:cNvPr id="13" name="Rectangle 12"/>
+          <p:cNvSpPr/>
+          <p:nvPr/>
+        </p:nvSpPr>
+        <p:spPr>
+          <a:xfrm>
+            <a:off x="6263640" y="3291840"/>
+            <a:ext cx="64008" cy="1097280"/>
+          </a:xfrm>
+          <a:prstGeom prst="rect">
+            <a:avLst/>
+          </a:prstGeom>
+          <a:solidFill>
+            <a:srgbClr val="1A9850"/>
+          </a:solidFill>
+          <a:ln>
+            <a:noFill/>
+          </a:ln>
+          <a:effectLst/>
+        </p:spPr>
+        <p:style>
+          <a:lnRef idx="1">
+            <a:schemeClr val="accent1"/>
+          </a:lnRef>
+          <a:fillRef idx="3">
+            <a:schemeClr val="accent1"/>
+          </a:fillRef>
+          <a:effectRef idx="2">
+            <a:schemeClr val="accent1"/>
+          </a:effectRef>
+          <a:fontRef idx="minor">
+            <a:schemeClr val="lt1"/>
+          </a:fontRef>
+        </p:style>
+        <p:txBody>
+          <a:bodyPr rtlCol="0" anchor="ctr"/>
+          <a:lstStyle/>
+          <a:p>
+            <a:pPr algn="ctr"/>
+          </a:p>
+        </p:txBody>
+      </p:sp>
+      <p:sp>
+        <p:nvSpPr>
+          <p:cNvPr id="14" name="TextBox 13"/>
+          <p:cNvSpPr txBox="1"/>
+          <p:nvPr/>
+        </p:nvSpPr>
+        <p:spPr>
+          <a:xfrm>
+            <a:off x="6492240" y="3401568"/>
+            <a:ext cx="5166359" cy="914400"/>
+          </a:xfrm>
+          <a:prstGeom prst="rect">
+            <a:avLst/>
+          </a:prstGeom>
+          <a:noFill/>
+        </p:spPr>
+        <p:txBody>
+          <a:bodyPr wrap="square" anchor="t">
+            <a:spAutoFit/>
+          </a:bodyPr>
+          <a:lstStyle/>
+          <a:p>
+            <a:pPr algn="l">
+              <a:spcAft>
+                <a:spcPts val="800"/>
+              </a:spcAft>
+            </a:pPr>
+            <a:r>
+              <a:rPr sz="1800" b="1">
+                <a:solidFill>
+                  <a:srgbClr val="1A9850"/>
+                </a:solidFill>
+                <a:latin typeface="Calibri"/>
+              </a:rPr>
+              <a:t>Hasil</a:t>
+            </a:r>
+          </a:p>
+          <a:p>
+            <a:pPr algn="l">
+              <a:spcAft>
+                <a:spcPts val="800"/>
+              </a:spcAft>
+            </a:pPr>
+            <a:r>
+              <a:rPr sz="1700" b="0">
+                <a:solidFill>
+                  <a:srgbClr val="222B38"/>
+                </a:solidFill>
+                <a:latin typeface="Calibri"/>
+              </a:rPr>
+              <a:t>4.060 hari bursa bersih, tanpa data kosong.</a:t>
             </a:r>
           </a:p>
         </p:txBody>

--- a/presentation/Presentasi_Ilmuwan_Data_Syamsuddin_Wisnubroto.pptx
+++ b/presentation/Presentasi_Ilmuwan_Data_Syamsuddin_Wisnubroto.pptx
@@ -3741,7 +3741,7 @@
                 </a:solidFill>
                 <a:latin typeface="Calibri"/>
               </a:rPr>
-              <a:t>5 fitur: </a:t>
+              <a:t>6 fitur: </a:t>
             </a:r>
             <a:r>
               <a:rPr sz="1500" b="0">
@@ -3750,7 +3750,7 @@
                 </a:solidFill>
                 <a:latin typeface="Calibri"/>
               </a:rPr>
-              <a:t>perubahan harian (%) IHSG, S&amp;P 500, VIX, minyak, dan emas.</a:t>
+              <a:t>perubahan harian (%) IHSG, S&amp;P 500, VIX, minyak, emas, dan kurs.</a:t>
             </a:r>
           </a:p>
           <a:p>
@@ -4116,7 +4116,7 @@
         <p:spPr>
           <a:xfrm>
             <a:off x="7360920" y="4160520"/>
-            <a:ext cx="4434840" cy="1645920"/>
+            <a:ext cx="4434840" cy="1828800"/>
           </a:xfrm>
           <a:prstGeom prst="rect">
             <a:avLst/>
@@ -4142,6 +4142,31 @@
                 <a:latin typeface="Calibri"/>
               </a:rPr>
               <a:t>Model dibandingkan dengan validasi silang deret waktu (5 bagian) pada data latih.</a:t>
+            </a:r>
+          </a:p>
+          <a:p>
+            <a:pPr algn="l">
+              <a:spcAft>
+                <a:spcPts val="800"/>
+              </a:spcAft>
+            </a:pPr>
+            <a:r>
+              <a:rPr sz="1400" b="1">
+                <a:solidFill>
+                  <a:srgbClr val="5A6778"/>
+                </a:solidFill>
+                <a:latin typeface="Calibri"/>
+              </a:rPr>
+              <a:t>2 iterasi: </a:t>
+            </a:r>
+            <a:r>
+              <a:rPr sz="1400" b="0">
+                <a:solidFill>
+                  <a:srgbClr val="5A6778"/>
+                </a:solidFill>
+                <a:latin typeface="Calibri"/>
+              </a:rPr>
+              <a:t>dengan kurs (6 fitur), lalu tanpa kurs (5 fitur).</a:t>
             </a:r>
           </a:p>
         </p:txBody>
@@ -4468,8 +4493,8 @@
         </p:blipFill>
         <p:spPr>
           <a:xfrm>
-            <a:off x="411480" y="1256607"/>
-            <a:ext cx="6949440" cy="3247505"/>
+            <a:off x="411480" y="1246987"/>
+            <a:ext cx="6949440" cy="3266744"/>
           </a:xfrm>
           <a:prstGeom prst="rect">
             <a:avLst/>
@@ -4485,7 +4510,7 @@
         <p:spPr>
           <a:xfrm>
             <a:off x="7635240" y="1325880"/>
-            <a:ext cx="4160520" cy="4114800"/>
+            <a:ext cx="4160520" cy="4572000"/>
           </a:xfrm>
           <a:prstGeom prst="rect">
             <a:avLst/>
@@ -4519,7 +4544,7 @@
                 </a:solidFill>
                 <a:latin typeface="Calibri"/>
               </a:rPr>
-              <a:t>Logistic Regression </a:t>
+              <a:t>Iterasi 1 (dengan kurs): </a:t>
             </a:r>
             <a:r>
               <a:rPr sz="1600" b="0">
@@ -4528,25 +4553,7 @@
                 </a:solidFill>
                 <a:latin typeface="Calibri"/>
               </a:rPr>
-              <a:t>dipilih (accuracy validasi </a:t>
-            </a:r>
-            <a:r>
-              <a:rPr sz="1600" b="1">
-                <a:solidFill>
-                  <a:srgbClr val="222B38"/>
-                </a:solidFill>
-                <a:latin typeface="Calibri"/>
-              </a:rPr>
-              <a:t>0,599</a:t>
-            </a:r>
-            <a:r>
-              <a:rPr sz="1600" b="0">
-                <a:solidFill>
-                  <a:srgbClr val="222B38"/>
-                </a:solidFill>
-                <a:latin typeface="Calibri"/>
-              </a:rPr>
-              <a:t>).</a:t>
+              <a:t>Random Forest terbaik (0,595).</a:t>
             </a:r>
           </a:p>
           <a:p>
@@ -4565,13 +4572,65 @@
               <a:t>■  </a:t>
             </a:r>
             <a:r>
-              <a:rPr sz="1600" b="0">
+              <a:rPr sz="1600" b="1">
                 <a:solidFill>
                   <a:srgbClr val="222B38"/>
                 </a:solidFill>
                 <a:latin typeface="Calibri"/>
               </a:rPr>
-              <a:t>Random Forest hampir sama baiknya (0,594).</a:t>
+              <a:t>Iterasi 2 (tanpa kurs): </a:t>
+            </a:r>
+            <a:r>
+              <a:rPr sz="1600" b="0">
+                <a:solidFill>
+                  <a:srgbClr val="222B38"/>
+                </a:solidFill>
+                <a:latin typeface="Calibri"/>
+              </a:rPr>
+              <a:t>Logistic Regression terbaik (</a:t>
+            </a:r>
+            <a:r>
+              <a:rPr sz="1600" b="1">
+                <a:solidFill>
+                  <a:srgbClr val="222B38"/>
+                </a:solidFill>
+                <a:latin typeface="Calibri"/>
+              </a:rPr>
+              <a:t>0,599</a:t>
+            </a:r>
+            <a:r>
+              <a:rPr sz="1600" b="0">
+                <a:solidFill>
+                  <a:srgbClr val="222B38"/>
+                </a:solidFill>
+                <a:latin typeface="Calibri"/>
+              </a:rPr>
+              <a:t>) → model akhir.</a:t>
+            </a:r>
+          </a:p>
+          <a:p>
+            <a:pPr algn="l">
+              <a:spcAft>
+                <a:spcPts val="800"/>
+              </a:spcAft>
+            </a:pPr>
+            <a:r>
+              <a:rPr sz="1000" b="0">
+                <a:solidFill>
+                  <a:srgbClr val="E08214"/>
+                </a:solidFill>
+                <a:latin typeface="Calibri"/>
+              </a:rPr>
+              <a:t>■  </a:t>
+            </a:r>
+            <a:r>
+              <a:rPr sz="1600" b="0">
+                <a:solidFill>
+                  <a:srgbClr val="222B38"/>
+                </a:solidFill>
+                <a:latin typeface="Calibri"/>
+              </a:rPr>
+              <a:t>Tanpa kurs, hasil validasi tidak turun.</a:t>
             </a:r>
           </a:p>
           <a:p>
@@ -4926,7 +4985,7 @@
         </p:nvGraphicFramePr>
         <p:xfrm>
           <a:off x="411480" y="1234440"/>
-          <a:ext cx="6400800" cy="1828800"/>
+          <a:ext cx="6400800" cy="2148840"/>
         </p:xfrm>
         <a:graphic>
           <a:graphicData uri="http://schemas.openxmlformats.org/drawingml/2006/table">
@@ -4935,19 +4994,19 @@
                 <a:tableStyleId>{5C22544A-7EE6-4342-B048-85BDC9FD1C3A}</a:tableStyleId>
               </a:tblPr>
               <a:tblGrid>
-                <a:gridCol w="3108960"/>
-                <a:gridCol w="1097280"/>
-                <a:gridCol w="1097280"/>
-                <a:gridCol w="1097280"/>
+                <a:gridCol w="3520440"/>
+                <a:gridCol w="960120"/>
+                <a:gridCol w="960120"/>
+                <a:gridCol w="960120"/>
               </a:tblGrid>
-              <a:tr h="457200">
-                <a:tc>
-                  <a:txBody>
-                    <a:bodyPr/>
-                    <a:lstStyle/>
-                    <a:p>
-                      <a:r>
-                        <a:rPr sz="1400" b="1">
+              <a:tr h="429768">
+                <a:tc>
+                  <a:txBody>
+                    <a:bodyPr/>
+                    <a:lstStyle/>
+                    <a:p>
+                      <a:r>
+                        <a:rPr sz="1300" b="1">
                           <a:solidFill>
                             <a:srgbClr val="FFFFFF"/>
                           </a:solidFill>
@@ -4969,7 +5028,7 @@
                     <a:lstStyle/>
                     <a:p>
                       <a:r>
-                        <a:rPr sz="1400" b="1">
+                        <a:rPr sz="1300" b="1">
                           <a:solidFill>
                             <a:srgbClr val="FFFFFF"/>
                           </a:solidFill>
@@ -4991,7 +5050,7 @@
                     <a:lstStyle/>
                     <a:p>
                       <a:r>
-                        <a:rPr sz="1400" b="1">
+                        <a:rPr sz="1300" b="1">
                           <a:solidFill>
                             <a:srgbClr val="FFFFFF"/>
                           </a:solidFill>
@@ -5013,7 +5072,7 @@
                     <a:lstStyle/>
                     <a:p>
                       <a:r>
-                        <a:rPr sz="1400" b="1">
+                        <a:rPr sz="1300" b="1">
                           <a:solidFill>
                             <a:srgbClr val="FFFFFF"/>
                           </a:solidFill>
@@ -5030,20 +5089,20 @@
                   </a:tcPr>
                 </a:tc>
               </a:tr>
-              <a:tr h="457200">
-                <a:tc>
-                  <a:txBody>
-                    <a:bodyPr/>
-                    <a:lstStyle/>
-                    <a:p>
-                      <a:r>
-                        <a:rPr sz="1400" b="1">
+              <a:tr h="429768">
+                <a:tc>
+                  <a:txBody>
+                    <a:bodyPr/>
+                    <a:lstStyle/>
+                    <a:p>
+                      <a:r>
+                        <a:rPr sz="1300" b="1">
                           <a:solidFill>
                             <a:srgbClr val="222B38"/>
                           </a:solidFill>
                           <a:latin typeface="Calibri"/>
                         </a:rPr>
-                        <a:t>Logistic Regression</a:t>
+                        <a:t>Iterasi 2: Logistic Regression</a:t>
                       </a:r>
                     </a:p>
                   </a:txBody>
@@ -5059,7 +5118,7 @@
                     <a:lstStyle/>
                     <a:p>
                       <a:r>
-                        <a:rPr sz="1400" b="1">
+                        <a:rPr sz="1300" b="1">
                           <a:solidFill>
                             <a:srgbClr val="222B38"/>
                           </a:solidFill>
@@ -5081,7 +5140,7 @@
                     <a:lstStyle/>
                     <a:p>
                       <a:r>
-                        <a:rPr sz="1400" b="1">
+                        <a:rPr sz="1300" b="1">
                           <a:solidFill>
                             <a:srgbClr val="222B38"/>
                           </a:solidFill>
@@ -5103,7 +5162,7 @@
                     <a:lstStyle/>
                     <a:p>
                       <a:r>
-                        <a:rPr sz="1400" b="1">
+                        <a:rPr sz="1300" b="1">
                           <a:solidFill>
                             <a:srgbClr val="222B38"/>
                           </a:solidFill>
@@ -5120,25 +5179,205 @@
                   </a:tcPr>
                 </a:tc>
               </a:tr>
-              <a:tr h="457200">
-                <a:tc>
-                  <a:txBody>
-                    <a:bodyPr/>
-                    <a:lstStyle/>
-                    <a:p>
-                      <a:r>
-                        <a:rPr sz="1400" b="0">
+              <a:tr h="429768">
+                <a:tc>
+                  <a:txBody>
+                    <a:bodyPr/>
+                    <a:lstStyle/>
+                    <a:p>
+                      <a:r>
+                        <a:rPr sz="1300" b="0">
                           <a:solidFill>
                             <a:srgbClr val="222B38"/>
                           </a:solidFill>
                           <a:latin typeface="Calibri"/>
                         </a:rPr>
+                        <a:t>Iterasi 1: Random Forest</a:t>
+                      </a:r>
+                    </a:p>
+                  </a:txBody>
+                  <a:tcPr anchor="ctr" marL="73152" marR="73152">
+                    <a:solidFill>
+                      <a:srgbClr val="F3F5F9"/>
+                    </a:solidFill>
+                  </a:tcPr>
+                </a:tc>
+                <a:tc>
+                  <a:txBody>
+                    <a:bodyPr/>
+                    <a:lstStyle/>
+                    <a:p>
+                      <a:r>
+                        <a:rPr sz="1300" b="0">
+                          <a:solidFill>
+                            <a:srgbClr val="222B38"/>
+                          </a:solidFill>
+                          <a:latin typeface="Calibri"/>
+                        </a:rPr>
+                        <a:t>0,543</a:t>
+                      </a:r>
+                    </a:p>
+                  </a:txBody>
+                  <a:tcPr anchor="ctr" marL="73152" marR="73152">
+                    <a:solidFill>
+                      <a:srgbClr val="F3F5F9"/>
+                    </a:solidFill>
+                  </a:tcPr>
+                </a:tc>
+                <a:tc>
+                  <a:txBody>
+                    <a:bodyPr/>
+                    <a:lstStyle/>
+                    <a:p>
+                      <a:r>
+                        <a:rPr sz="1300" b="0">
+                          <a:solidFill>
+                            <a:srgbClr val="222B38"/>
+                          </a:solidFill>
+                          <a:latin typeface="Calibri"/>
+                        </a:rPr>
+                        <a:t>0,535</a:t>
+                      </a:r>
+                    </a:p>
+                  </a:txBody>
+                  <a:tcPr anchor="ctr" marL="73152" marR="73152">
+                    <a:solidFill>
+                      <a:srgbClr val="F3F5F9"/>
+                    </a:solidFill>
+                  </a:tcPr>
+                </a:tc>
+                <a:tc>
+                  <a:txBody>
+                    <a:bodyPr/>
+                    <a:lstStyle/>
+                    <a:p>
+                      <a:r>
+                        <a:rPr sz="1300" b="0">
+                          <a:solidFill>
+                            <a:srgbClr val="222B38"/>
+                          </a:solidFill>
+                          <a:latin typeface="Calibri"/>
+                        </a:rPr>
+                        <a:t>0,577</a:t>
+                      </a:r>
+                    </a:p>
+                  </a:txBody>
+                  <a:tcPr anchor="ctr" marL="73152" marR="73152">
+                    <a:solidFill>
+                      <a:srgbClr val="F3F5F9"/>
+                    </a:solidFill>
+                  </a:tcPr>
+                </a:tc>
+              </a:tr>
+              <a:tr h="429768">
+                <a:tc>
+                  <a:txBody>
+                    <a:bodyPr/>
+                    <a:lstStyle/>
+                    <a:p>
+                      <a:r>
+                        <a:rPr sz="1300" b="0">
+                          <a:solidFill>
+                            <a:srgbClr val="222B38"/>
+                          </a:solidFill>
+                          <a:latin typeface="Calibri"/>
+                        </a:rPr>
                         <a:t>Ikuti S&amp;P 500 (baseline)</a:t>
                       </a:r>
                     </a:p>
                   </a:txBody>
                   <a:tcPr anchor="ctr" marL="73152" marR="73152">
                     <a:solidFill>
+                      <a:srgbClr val="FFFFFF"/>
+                    </a:solidFill>
+                  </a:tcPr>
+                </a:tc>
+                <a:tc>
+                  <a:txBody>
+                    <a:bodyPr/>
+                    <a:lstStyle/>
+                    <a:p>
+                      <a:r>
+                        <a:rPr sz="1300" b="0">
+                          <a:solidFill>
+                            <a:srgbClr val="222B38"/>
+                          </a:solidFill>
+                          <a:latin typeface="Calibri"/>
+                        </a:rPr>
+                        <a:t>0,546</a:t>
+                      </a:r>
+                    </a:p>
+                  </a:txBody>
+                  <a:tcPr anchor="ctr" marL="73152" marR="73152">
+                    <a:solidFill>
+                      <a:srgbClr val="FFFFFF"/>
+                    </a:solidFill>
+                  </a:tcPr>
+                </a:tc>
+                <a:tc>
+                  <a:txBody>
+                    <a:bodyPr/>
+                    <a:lstStyle/>
+                    <a:p>
+                      <a:r>
+                        <a:rPr sz="1300" b="0">
+                          <a:solidFill>
+                            <a:srgbClr val="222B38"/>
+                          </a:solidFill>
+                          <a:latin typeface="Calibri"/>
+                        </a:rPr>
+                        <a:t>0,543</a:t>
+                      </a:r>
+                    </a:p>
+                  </a:txBody>
+                  <a:tcPr anchor="ctr" marL="73152" marR="73152">
+                    <a:solidFill>
+                      <a:srgbClr val="FFFFFF"/>
+                    </a:solidFill>
+                  </a:tcPr>
+                </a:tc>
+                <a:tc>
+                  <a:txBody>
+                    <a:bodyPr/>
+                    <a:lstStyle/>
+                    <a:p>
+                      <a:r>
+                        <a:rPr sz="1300" b="0">
+                          <a:solidFill>
+                            <a:srgbClr val="222B38"/>
+                          </a:solidFill>
+                          <a:latin typeface="Calibri"/>
+                        </a:rPr>
+                        <a:t>0,575</a:t>
+                      </a:r>
+                    </a:p>
+                  </a:txBody>
+                  <a:tcPr anchor="ctr" marL="73152" marR="73152">
+                    <a:solidFill>
+                      <a:srgbClr val="FFFFFF"/>
+                    </a:solidFill>
+                  </a:tcPr>
+                </a:tc>
+              </a:tr>
+              <a:tr h="429768">
+                <a:tc>
+                  <a:txBody>
+                    <a:bodyPr/>
+                    <a:lstStyle/>
+                    <a:p>
+                      <a:r>
+                        <a:rPr sz="1300" b="0">
+                          <a:solidFill>
+                            <a:srgbClr val="222B38"/>
+                          </a:solidFill>
+                          <a:latin typeface="Calibri"/>
+                        </a:rPr>
+                        <a:t>Selalu Naik (baseline)</a:t>
+                      </a:r>
+                    </a:p>
+                  </a:txBody>
+                  <a:tcPr anchor="ctr" marL="73152" marR="73152">
+                    <a:solidFill>
                       <a:srgbClr val="F3F5F9"/>
                     </a:solidFill>
                   </a:tcPr>
@@ -5149,13 +5388,13 @@
                     <a:lstStyle/>
                     <a:p>
                       <a:r>
-                        <a:rPr sz="1400" b="0">
+                        <a:rPr sz="1300" b="0">
                           <a:solidFill>
                             <a:srgbClr val="222B38"/>
                           </a:solidFill>
                           <a:latin typeface="Calibri"/>
                         </a:rPr>
-                        <a:t>0,546</a:t>
+                        <a:t>0,522</a:t>
                       </a:r>
                     </a:p>
                   </a:txBody>
@@ -5171,13 +5410,13 @@
                     <a:lstStyle/>
                     <a:p>
                       <a:r>
-                        <a:rPr sz="1400" b="0">
+                        <a:rPr sz="1300" b="0">
                           <a:solidFill>
                             <a:srgbClr val="222B38"/>
                           </a:solidFill>
                           <a:latin typeface="Calibri"/>
                         </a:rPr>
-                        <a:t>0,543</a:t>
+                        <a:t>0,343</a:t>
                       </a:r>
                     </a:p>
                   </a:txBody>
@@ -5193,109 +5432,19 @@
                     <a:lstStyle/>
                     <a:p>
                       <a:r>
-                        <a:rPr sz="1400" b="0">
+                        <a:rPr sz="1300" b="0">
                           <a:solidFill>
                             <a:srgbClr val="222B38"/>
                           </a:solidFill>
                           <a:latin typeface="Calibri"/>
                         </a:rPr>
-                        <a:t>0,575</a:t>
+                        <a:t>0,500</a:t>
                       </a:r>
                     </a:p>
                   </a:txBody>
                   <a:tcPr anchor="ctr" marL="73152" marR="73152">
                     <a:solidFill>
                       <a:srgbClr val="F3F5F9"/>
-                    </a:solidFill>
-                  </a:tcPr>
-                </a:tc>
-              </a:tr>
-              <a:tr h="457200">
-                <a:tc>
-                  <a:txBody>
-                    <a:bodyPr/>
-                    <a:lstStyle/>
-                    <a:p>
-                      <a:r>
-                        <a:rPr sz="1400" b="0">
-                          <a:solidFill>
-                            <a:srgbClr val="222B38"/>
-                          </a:solidFill>
-                          <a:latin typeface="Calibri"/>
-                        </a:rPr>
-                        <a:t>Selalu Naik (baseline)</a:t>
-                      </a:r>
-                    </a:p>
-                  </a:txBody>
-                  <a:tcPr anchor="ctr" marL="73152" marR="73152">
-                    <a:solidFill>
-                      <a:srgbClr val="FFFFFF"/>
-                    </a:solidFill>
-                  </a:tcPr>
-                </a:tc>
-                <a:tc>
-                  <a:txBody>
-                    <a:bodyPr/>
-                    <a:lstStyle/>
-                    <a:p>
-                      <a:r>
-                        <a:rPr sz="1400" b="0">
-                          <a:solidFill>
-                            <a:srgbClr val="222B38"/>
-                          </a:solidFill>
-                          <a:latin typeface="Calibri"/>
-                        </a:rPr>
-                        <a:t>0,522</a:t>
-                      </a:r>
-                    </a:p>
-                  </a:txBody>
-                  <a:tcPr anchor="ctr" marL="73152" marR="73152">
-                    <a:solidFill>
-                      <a:srgbClr val="FFFFFF"/>
-                    </a:solidFill>
-                  </a:tcPr>
-                </a:tc>
-                <a:tc>
-                  <a:txBody>
-                    <a:bodyPr/>
-                    <a:lstStyle/>
-                    <a:p>
-                      <a:r>
-                        <a:rPr sz="1400" b="0">
-                          <a:solidFill>
-                            <a:srgbClr val="222B38"/>
-                          </a:solidFill>
-                          <a:latin typeface="Calibri"/>
-                        </a:rPr>
-                        <a:t>0,343</a:t>
-                      </a:r>
-                    </a:p>
-                  </a:txBody>
-                  <a:tcPr anchor="ctr" marL="73152" marR="73152">
-                    <a:solidFill>
-                      <a:srgbClr val="FFFFFF"/>
-                    </a:solidFill>
-                  </a:tcPr>
-                </a:tc>
-                <a:tc>
-                  <a:txBody>
-                    <a:bodyPr/>
-                    <a:lstStyle/>
-                    <a:p>
-                      <a:r>
-                        <a:rPr sz="1400" b="0">
-                          <a:solidFill>
-                            <a:srgbClr val="222B38"/>
-                          </a:solidFill>
-                          <a:latin typeface="Calibri"/>
-                        </a:rPr>
-                        <a:t>0,500</a:t>
-                      </a:r>
-                    </a:p>
-                  </a:txBody>
-                  <a:tcPr anchor="ctr" marL="73152" marR="73152">
-                    <a:solidFill>
-                      <a:srgbClr val="FFFFFF"/>
                     </a:solidFill>
                   </a:tcPr>
                 </a:tc>
@@ -5313,8 +5462,8 @@
           <p:nvPr/>
         </p:nvGraphicFramePr>
         <p:xfrm>
-          <a:off x="411480" y="3337560"/>
-          <a:ext cx="6400800" cy="2148840"/>
+          <a:off x="411480" y="3657600"/>
+          <a:ext cx="6400800" cy="2057400"/>
         </p:xfrm>
         <a:graphic>
           <a:graphicData uri="http://schemas.openxmlformats.org/drawingml/2006/table">
@@ -5327,14 +5476,14 @@
                 <a:gridCol w="1280160"/>
                 <a:gridCol w="1280160"/>
               </a:tblGrid>
-              <a:tr h="429768">
-                <a:tc>
-                  <a:txBody>
-                    <a:bodyPr/>
-                    <a:lstStyle/>
-                    <a:p>
-                      <a:r>
-                        <a:rPr sz="1400" b="1">
+              <a:tr h="411480">
+                <a:tc>
+                  <a:txBody>
+                    <a:bodyPr/>
+                    <a:lstStyle/>
+                    <a:p>
+                      <a:r>
+                        <a:rPr sz="1300" b="1">
                           <a:solidFill>
                             <a:srgbClr val="FFFFFF"/>
                           </a:solidFill>
@@ -5356,13 +5505,13 @@
                     <a:lstStyle/>
                     <a:p>
                       <a:r>
-                        <a:rPr sz="1400" b="1">
+                        <a:rPr sz="1300" b="1">
                           <a:solidFill>
                             <a:srgbClr val="FFFFFF"/>
                           </a:solidFill>
                           <a:latin typeface="Calibri"/>
                         </a:rPr>
-                        <a:t>Nilai</a:t>
+                        <a:t>Iterasi 1</a:t>
                       </a:r>
                     </a:p>
                   </a:txBody>
@@ -5378,13 +5527,13 @@
                     <a:lstStyle/>
                     <a:p>
                       <a:r>
-                        <a:rPr sz="1400" b="1">
+                        <a:rPr sz="1300" b="1">
                           <a:solidFill>
                             <a:srgbClr val="FFFFFF"/>
                           </a:solidFill>
                           <a:latin typeface="Calibri"/>
                         </a:rPr>
-                        <a:t>Tercapai</a:t>
+                        <a:t>Iterasi 2</a:t>
                       </a:r>
                     </a:p>
                   </a:txBody>
@@ -5395,14 +5544,14 @@
                   </a:tcPr>
                 </a:tc>
               </a:tr>
-              <a:tr h="429768">
-                <a:tc>
-                  <a:txBody>
-                    <a:bodyPr/>
-                    <a:lstStyle/>
-                    <a:p>
-                      <a:r>
-                        <a:rPr sz="1400" b="0">
+              <a:tr h="411480">
+                <a:tc>
+                  <a:txBody>
+                    <a:bodyPr/>
+                    <a:lstStyle/>
+                    <a:p>
+                      <a:r>
+                        <a:rPr sz="1300" b="0">
                           <a:solidFill>
                             <a:srgbClr val="222B38"/>
                           </a:solidFill>
@@ -5424,13 +5573,127 @@
                     <a:lstStyle/>
                     <a:p>
                       <a:r>
-                        <a:rPr sz="1400" b="0">
+                        <a:rPr sz="1300" b="0">
+                          <a:solidFill>
+                            <a:srgbClr val="D73027"/>
+                          </a:solidFill>
+                          <a:latin typeface="Calibri"/>
+                        </a:rPr>
+                        <a:t>0,543</a:t>
+                      </a:r>
+                    </a:p>
+                  </a:txBody>
+                  <a:tcPr anchor="ctr" marL="73152" marR="73152">
+                    <a:solidFill>
+                      <a:srgbClr val="FFFFFF"/>
+                    </a:solidFill>
+                  </a:tcPr>
+                </a:tc>
+                <a:tc>
+                  <a:txBody>
+                    <a:bodyPr/>
+                    <a:lstStyle/>
+                    <a:p>
+                      <a:r>
+                        <a:rPr sz="1300" b="0">
+                          <a:solidFill>
+                            <a:srgbClr val="1A9850"/>
+                          </a:solidFill>
+                          <a:latin typeface="Calibri"/>
+                        </a:rPr>
+                        <a:t>0,558</a:t>
+                      </a:r>
+                    </a:p>
+                  </a:txBody>
+                  <a:tcPr anchor="ctr" marL="73152" marR="73152">
+                    <a:solidFill>
+                      <a:srgbClr val="FFFFFF"/>
+                    </a:solidFill>
+                  </a:tcPr>
+                </a:tc>
+              </a:tr>
+              <a:tr h="411480">
+                <a:tc>
+                  <a:txBody>
+                    <a:bodyPr/>
+                    <a:lstStyle/>
+                    <a:p>
+                      <a:r>
+                        <a:rPr sz="1300" b="0">
                           <a:solidFill>
                             <a:srgbClr val="222B38"/>
                           </a:solidFill>
                           <a:latin typeface="Calibri"/>
                         </a:rPr>
-                        <a:t>0,558</a:t>
+                        <a:t>F1-macro ≥ 0,55</a:t>
+                      </a:r>
+                    </a:p>
+                  </a:txBody>
+                  <a:tcPr anchor="ctr" marL="73152" marR="73152">
+                    <a:solidFill>
+                      <a:srgbClr val="F3F5F9"/>
+                    </a:solidFill>
+                  </a:tcPr>
+                </a:tc>
+                <a:tc>
+                  <a:txBody>
+                    <a:bodyPr/>
+                    <a:lstStyle/>
+                    <a:p>
+                      <a:r>
+                        <a:rPr sz="1300" b="0">
+                          <a:solidFill>
+                            <a:srgbClr val="D73027"/>
+                          </a:solidFill>
+                          <a:latin typeface="Calibri"/>
+                        </a:rPr>
+                        <a:t>0,535</a:t>
+                      </a:r>
+                    </a:p>
+                  </a:txBody>
+                  <a:tcPr anchor="ctr" marL="73152" marR="73152">
+                    <a:solidFill>
+                      <a:srgbClr val="F3F5F9"/>
+                    </a:solidFill>
+                  </a:tcPr>
+                </a:tc>
+                <a:tc>
+                  <a:txBody>
+                    <a:bodyPr/>
+                    <a:lstStyle/>
+                    <a:p>
+                      <a:r>
+                        <a:rPr sz="1300" b="0">
+                          <a:solidFill>
+                            <a:srgbClr val="1A9850"/>
+                          </a:solidFill>
+                          <a:latin typeface="Calibri"/>
+                        </a:rPr>
+                        <a:t>0,554</a:t>
+                      </a:r>
+                    </a:p>
+                  </a:txBody>
+                  <a:tcPr anchor="ctr" marL="73152" marR="73152">
+                    <a:solidFill>
+                      <a:srgbClr val="F3F5F9"/>
+                    </a:solidFill>
+                  </a:tcPr>
+                </a:tc>
+              </a:tr>
+              <a:tr h="411480">
+                <a:tc>
+                  <a:txBody>
+                    <a:bodyPr/>
+                    <a:lstStyle/>
+                    <a:p>
+                      <a:r>
+                        <a:rPr sz="1300" b="0">
+                          <a:solidFill>
+                            <a:srgbClr val="222B38"/>
+                          </a:solidFill>
+                          <a:latin typeface="Calibri"/>
+                        </a:rPr>
+                        <a:t>ROC-AUC ≥ 0,58</a:t>
                       </a:r>
                     </a:p>
                   </a:txBody>
@@ -5446,13 +5709,35 @@
                     <a:lstStyle/>
                     <a:p>
                       <a:r>
-                        <a:rPr sz="1400" b="0">
+                        <a:rPr sz="1300" b="0">
+                          <a:solidFill>
+                            <a:srgbClr val="D73027"/>
+                          </a:solidFill>
+                          <a:latin typeface="Calibri"/>
+                        </a:rPr>
+                        <a:t>0,577</a:t>
+                      </a:r>
+                    </a:p>
+                  </a:txBody>
+                  <a:tcPr anchor="ctr" marL="73152" marR="73152">
+                    <a:solidFill>
+                      <a:srgbClr val="FFFFFF"/>
+                    </a:solidFill>
+                  </a:tcPr>
+                </a:tc>
+                <a:tc>
+                  <a:txBody>
+                    <a:bodyPr/>
+                    <a:lstStyle/>
+                    <a:p>
+                      <a:r>
+                        <a:rPr sz="1300" b="0">
                           <a:solidFill>
                             <a:srgbClr val="1A9850"/>
                           </a:solidFill>
                           <a:latin typeface="Calibri"/>
                         </a:rPr>
-                        <a:t>Ya</a:t>
+                        <a:t>0,583</a:t>
                       </a:r>
                     </a:p>
                   </a:txBody>
@@ -5463,20 +5748,20 @@
                   </a:tcPr>
                 </a:tc>
               </a:tr>
-              <a:tr h="429768">
-                <a:tc>
-                  <a:txBody>
-                    <a:bodyPr/>
-                    <a:lstStyle/>
-                    <a:p>
-                      <a:r>
-                        <a:rPr sz="1400" b="0">
+              <a:tr h="411480">
+                <a:tc>
+                  <a:txBody>
+                    <a:bodyPr/>
+                    <a:lstStyle/>
+                    <a:p>
+                      <a:r>
+                        <a:rPr sz="1300" b="0">
                           <a:solidFill>
                             <a:srgbClr val="222B38"/>
                           </a:solidFill>
                           <a:latin typeface="Calibri"/>
                         </a:rPr>
-                        <a:t>F1-macro ≥ 0,55</a:t>
+                        <a:t>Accuracy &gt; baseline "Selalu Naik"</a:t>
                       </a:r>
                     </a:p>
                   </a:txBody>
@@ -5492,13 +5777,13 @@
                     <a:lstStyle/>
                     <a:p>
                       <a:r>
-                        <a:rPr sz="1400" b="0">
-                          <a:solidFill>
-                            <a:srgbClr val="222B38"/>
-                          </a:solidFill>
-                          <a:latin typeface="Calibri"/>
-                        </a:rPr>
-                        <a:t>0,554</a:t>
+                        <a:rPr sz="1300" b="0">
+                          <a:solidFill>
+                            <a:srgbClr val="1A9850"/>
+                          </a:solidFill>
+                          <a:latin typeface="Calibri"/>
+                        </a:rPr>
+                        <a:t>+0,021</a:t>
                       </a:r>
                     </a:p>
                   </a:txBody>
@@ -5514,149 +5799,13 @@
                     <a:lstStyle/>
                     <a:p>
                       <a:r>
-                        <a:rPr sz="1400" b="0">
+                        <a:rPr sz="1300" b="0">
                           <a:solidFill>
                             <a:srgbClr val="1A9850"/>
                           </a:solidFill>
                           <a:latin typeface="Calibri"/>
                         </a:rPr>
-                        <a:t>Ya</a:t>
-                      </a:r>
-                    </a:p>
-                  </a:txBody>
-                  <a:tcPr anchor="ctr" marL="73152" marR="73152">
-                    <a:solidFill>
-                      <a:srgbClr val="F3F5F9"/>
-                    </a:solidFill>
-                  </a:tcPr>
-                </a:tc>
-              </a:tr>
-              <a:tr h="429768">
-                <a:tc>
-                  <a:txBody>
-                    <a:bodyPr/>
-                    <a:lstStyle/>
-                    <a:p>
-                      <a:r>
-                        <a:rPr sz="1400" b="0">
-                          <a:solidFill>
-                            <a:srgbClr val="222B38"/>
-                          </a:solidFill>
-                          <a:latin typeface="Calibri"/>
-                        </a:rPr>
-                        <a:t>ROC-AUC ≥ 0,58</a:t>
-                      </a:r>
-                    </a:p>
-                  </a:txBody>
-                  <a:tcPr anchor="ctr" marL="73152" marR="73152">
-                    <a:solidFill>
-                      <a:srgbClr val="FFFFFF"/>
-                    </a:solidFill>
-                  </a:tcPr>
-                </a:tc>
-                <a:tc>
-                  <a:txBody>
-                    <a:bodyPr/>
-                    <a:lstStyle/>
-                    <a:p>
-                      <a:r>
-                        <a:rPr sz="1400" b="0">
-                          <a:solidFill>
-                            <a:srgbClr val="222B38"/>
-                          </a:solidFill>
-                          <a:latin typeface="Calibri"/>
-                        </a:rPr>
-                        <a:t>0,583</a:t>
-                      </a:r>
-                    </a:p>
-                  </a:txBody>
-                  <a:tcPr anchor="ctr" marL="73152" marR="73152">
-                    <a:solidFill>
-                      <a:srgbClr val="FFFFFF"/>
-                    </a:solidFill>
-                  </a:tcPr>
-                </a:tc>
-                <a:tc>
-                  <a:txBody>
-                    <a:bodyPr/>
-                    <a:lstStyle/>
-                    <a:p>
-                      <a:r>
-                        <a:rPr sz="1400" b="0">
-                          <a:solidFill>
-                            <a:srgbClr val="1A9850"/>
-                          </a:solidFill>
-                          <a:latin typeface="Calibri"/>
-                        </a:rPr>
-                        <a:t>Ya</a:t>
-                      </a:r>
-                    </a:p>
-                  </a:txBody>
-                  <a:tcPr anchor="ctr" marL="73152" marR="73152">
-                    <a:solidFill>
-                      <a:srgbClr val="FFFFFF"/>
-                    </a:solidFill>
-                  </a:tcPr>
-                </a:tc>
-              </a:tr>
-              <a:tr h="429768">
-                <a:tc>
-                  <a:txBody>
-                    <a:bodyPr/>
-                    <a:lstStyle/>
-                    <a:p>
-                      <a:r>
-                        <a:rPr sz="1400" b="0">
-                          <a:solidFill>
-                            <a:srgbClr val="222B38"/>
-                          </a:solidFill>
-                          <a:latin typeface="Calibri"/>
-                        </a:rPr>
-                        <a:t>Accuracy &gt; baseline "Selalu Naik"</a:t>
-                      </a:r>
-                    </a:p>
-                  </a:txBody>
-                  <a:tcPr anchor="ctr" marL="73152" marR="73152">
-                    <a:solidFill>
-                      <a:srgbClr val="F3F5F9"/>
-                    </a:solidFill>
-                  </a:tcPr>
-                </a:tc>
-                <a:tc>
-                  <a:txBody>
-                    <a:bodyPr/>
-                    <a:lstStyle/>
-                    <a:p>
-                      <a:r>
-                        <a:rPr sz="1400" b="0">
-                          <a:solidFill>
-                            <a:srgbClr val="222B38"/>
-                          </a:solidFill>
-                          <a:latin typeface="Calibri"/>
-                        </a:rPr>
                         <a:t>+0,036</a:t>
-                      </a:r>
-                    </a:p>
-                  </a:txBody>
-                  <a:tcPr anchor="ctr" marL="73152" marR="73152">
-                    <a:solidFill>
-                      <a:srgbClr val="F3F5F9"/>
-                    </a:solidFill>
-                  </a:tcPr>
-                </a:tc>
-                <a:tc>
-                  <a:txBody>
-                    <a:bodyPr/>
-                    <a:lstStyle/>
-                    <a:p>
-                      <a:r>
-                        <a:rPr sz="1400" b="0">
-                          <a:solidFill>
-                            <a:srgbClr val="1A9850"/>
-                          </a:solidFill>
-                          <a:latin typeface="Calibri"/>
-                        </a:rPr>
-                        <a:t>Ya</a:t>
                       </a:r>
                     </a:p>
                   </a:txBody>
@@ -5671,9 +5820,48 @@
           </a:graphicData>
         </a:graphic>
       </p:graphicFrame>
+      <p:sp>
+        <p:nvSpPr>
+          <p:cNvPr id="11" name="TextBox 10"/>
+          <p:cNvSpPr txBox="1"/>
+          <p:nvPr/>
+        </p:nvSpPr>
+        <p:spPr>
+          <a:xfrm>
+            <a:off x="411480" y="5760720"/>
+            <a:ext cx="6400800" cy="365760"/>
+          </a:xfrm>
+          <a:prstGeom prst="rect">
+            <a:avLst/>
+          </a:prstGeom>
+          <a:noFill/>
+        </p:spPr>
+        <p:txBody>
+          <a:bodyPr wrap="square" anchor="t">
+            <a:spAutoFit/>
+          </a:bodyPr>
+          <a:lstStyle/>
+          <a:p>
+            <a:pPr algn="l">
+              <a:spcAft>
+                <a:spcPts val="800"/>
+              </a:spcAft>
+            </a:pPr>
+            <a:r>
+              <a:rPr sz="1100" b="0">
+                <a:solidFill>
+                  <a:srgbClr val="5A6778"/>
+                </a:solidFill>
+                <a:latin typeface="Calibri"/>
+              </a:rPr>
+              <a:t>Hijau = target tercapai, merah = belum.</a:t>
+            </a:r>
+          </a:p>
+        </p:txBody>
+      </p:sp>
       <p:pic>
         <p:nvPicPr>
-          <p:cNvPr id="11" name="Picture 10" descr="10_fitur_penting.png"/>
+          <p:cNvPr id="12" name="Picture 11" descr="10_fitur_penting.png"/>
           <p:cNvPicPr>
             <a:picLocks noChangeAspect="1"/>
           </p:cNvPicPr>
@@ -5697,7 +5885,7 @@
       </p:pic>
       <p:sp>
         <p:nvSpPr>
-          <p:cNvPr id="12" name="Rectangle 11"/>
+          <p:cNvPr id="13" name="Rectangle 12"/>
           <p:cNvSpPr/>
           <p:nvPr/>
         </p:nvSpPr>
@@ -5741,7 +5929,7 @@
       </p:sp>
       <p:sp>
         <p:nvSpPr>
-          <p:cNvPr id="13" name="Rectangle 12"/>
+          <p:cNvPr id="14" name="Rectangle 13"/>
           <p:cNvSpPr/>
           <p:nvPr/>
         </p:nvSpPr>
@@ -5785,7 +5973,7 @@
       </p:sp>
       <p:sp>
         <p:nvSpPr>
-          <p:cNvPr id="14" name="TextBox 13"/>
+          <p:cNvPr id="15" name="TextBox 14"/>
           <p:cNvSpPr txBox="1"/>
           <p:nvPr/>
         </p:nvSpPr>
@@ -5849,7 +6037,7 @@
                 </a:solidFill>
                 <a:latin typeface="Calibri"/>
               </a:rPr>
-              <a:t>•  4 dari 4 target tercapai, tetapi tipis</a:t>
+              <a:t>•  Iterasi 2: 4 dari 4 target, tetapi tipis</a:t>
             </a:r>
           </a:p>
           <a:p>
@@ -5865,7 +6053,7 @@
                 </a:solidFill>
                 <a:latin typeface="Calibri"/>
               </a:rPr>
-              <a:t>•  Iterasi ke-2: 1 variabel lemah dibuang</a:t>
+              <a:t>•  Iterasi 1 (dengan kurs): 1 dari 4 target</a:t>
             </a:r>
           </a:p>
           <a:p>
@@ -7429,7 +7617,7 @@
                 </a:solidFill>
                 <a:latin typeface="Calibri"/>
               </a:rPr>
-              <a:t>IHSG dipengaruhi pasar global: saham Amerika, indeks ketakutan (VIX), harga minyak, dan emas.</a:t>
+              <a:t>IHSG dipengaruhi pasar global dan kurs: saham Amerika, indeks ketakutan (VIX), harga minyak, emas, dan kurs rupiah.</a:t>
             </a:r>
           </a:p>
           <a:p>
@@ -8063,7 +8251,7 @@
         </p:nvGraphicFramePr>
         <p:xfrm>
           <a:off x="7635240" y="1234440"/>
-          <a:ext cx="4160520" cy="1920240"/>
+          <a:ext cx="4160520" cy="2304288"/>
         </p:xfrm>
         <a:graphic>
           <a:graphicData uri="http://schemas.openxmlformats.org/drawingml/2006/table">
@@ -8305,6 +8493,52 @@
                   </a:tcPr>
                 </a:tc>
               </a:tr>
+              <a:tr h="384048">
+                <a:tc>
+                  <a:txBody>
+                    <a:bodyPr/>
+                    <a:lstStyle/>
+                    <a:p>
+                      <a:r>
+                        <a:rPr sz="1300" b="0">
+                          <a:solidFill>
+                            <a:srgbClr val="222B38"/>
+                          </a:solidFill>
+                          <a:latin typeface="Calibri"/>
+                        </a:rPr>
+                        <a:t>USDIDR</a:t>
+                      </a:r>
+                    </a:p>
+                  </a:txBody>
+                  <a:tcPr anchor="ctr" marL="73152" marR="73152">
+                    <a:solidFill>
+                      <a:srgbClr val="FFFFFF"/>
+                    </a:solidFill>
+                  </a:tcPr>
+                </a:tc>
+                <a:tc>
+                  <a:txBody>
+                    <a:bodyPr/>
+                    <a:lstStyle/>
+                    <a:p>
+                      <a:r>
+                        <a:rPr sz="1300" b="0">
+                          <a:solidFill>
+                            <a:srgbClr val="222B38"/>
+                          </a:solidFill>
+                          <a:latin typeface="Calibri"/>
+                        </a:rPr>
+                        <a:t>Kurs rupiah per dolar AS</a:t>
+                      </a:r>
+                    </a:p>
+                  </a:txBody>
+                  <a:tcPr anchor="ctr" marL="73152" marR="73152">
+                    <a:solidFill>
+                      <a:srgbClr val="FFFFFF"/>
+                    </a:solidFill>
+                  </a:tcPr>
+                </a:tc>
+              </a:tr>
             </a:tbl>
           </a:graphicData>
         </a:graphic>
@@ -8447,7 +8681,7 @@
                 </a:solidFill>
                 <a:latin typeface="Calibri"/>
               </a:rPr>
-              <a:t>Data nyata harian 1 Jan 2010 – 30 Sep 2026 dari Yahoo Finance: 4.365 baris hari kerja, 5 variabel. IHSG naik pada 54% hari bursa.</a:t>
+              <a:t>Data nyata harian 1 Jan 2010 – 30 Sep 2026 dari Yahoo Finance: 4.365 baris hari kerja, 6 variabel. IHSG naik pada 54% hari bursa.</a:t>
             </a:r>
           </a:p>
         </p:txBody>
@@ -8685,7 +8919,7 @@
         </p:nvGraphicFramePr>
         <p:xfrm>
           <a:off x="411480" y="1188720"/>
-          <a:ext cx="11384280" cy="3401568"/>
+          <a:ext cx="11384280" cy="3520440"/>
         </p:xfrm>
         <a:graphic>
           <a:graphicData uri="http://schemas.openxmlformats.org/drawingml/2006/table">
@@ -8699,7 +8933,7 @@
                 <a:gridCol w="2514600"/>
                 <a:gridCol w="3474720"/>
               </a:tblGrid>
-              <a:tr h="566928">
+              <a:tr h="502920">
                 <a:tc>
                   <a:txBody>
                     <a:bodyPr/>
@@ -8789,7 +9023,7 @@
                   </a:tcPr>
                 </a:tc>
               </a:tr>
-              <a:tr h="566928">
+              <a:tr h="502920">
                 <a:tc>
                   <a:txBody>
                     <a:bodyPr/>
@@ -8879,7 +9113,7 @@
                   </a:tcPr>
                 </a:tc>
               </a:tr>
-              <a:tr h="566928">
+              <a:tr h="502920">
                 <a:tc>
                   <a:txBody>
                     <a:bodyPr/>
@@ -8969,7 +9203,7 @@
                   </a:tcPr>
                 </a:tc>
               </a:tr>
-              <a:tr h="566928">
+              <a:tr h="502920">
                 <a:tc>
                   <a:txBody>
                     <a:bodyPr/>
@@ -9059,7 +9293,7 @@
                   </a:tcPr>
                 </a:tc>
               </a:tr>
-              <a:tr h="566928">
+              <a:tr h="502920">
                 <a:tc>
                   <a:txBody>
                     <a:bodyPr/>
@@ -9149,7 +9383,7 @@
                   </a:tcPr>
                 </a:tc>
               </a:tr>
-              <a:tr h="566928">
+              <a:tr h="502920">
                 <a:tc>
                   <a:txBody>
                     <a:bodyPr/>
@@ -9235,6 +9469,96 @@
                   <a:tcPr anchor="ctr" marL="73152" marR="73152">
                     <a:solidFill>
                       <a:srgbClr val="FFFFFF"/>
+                    </a:solidFill>
+                  </a:tcPr>
+                </a:tc>
+              </a:tr>
+              <a:tr h="502920">
+                <a:tc>
+                  <a:txBody>
+                    <a:bodyPr/>
+                    <a:lstStyle/>
+                    <a:p>
+                      <a:r>
+                        <a:rPr sz="1300" b="0">
+                          <a:solidFill>
+                            <a:srgbClr val="222B38"/>
+                          </a:solidFill>
+                          <a:latin typeface="Calibri"/>
+                        </a:rPr>
+                        <a:t>Kurs (USD/IDR)</a:t>
+                      </a:r>
+                    </a:p>
+                  </a:txBody>
+                  <a:tcPr anchor="ctr" marL="73152" marR="73152">
+                    <a:solidFill>
+                      <a:srgbClr val="F3F5F9"/>
+                    </a:solidFill>
+                  </a:tcPr>
+                </a:tc>
+                <a:tc>
+                  <a:txBody>
+                    <a:bodyPr/>
+                    <a:lstStyle/>
+                    <a:p>
+                      <a:r>
+                        <a:rPr sz="1300" b="0">
+                          <a:solidFill>
+                            <a:srgbClr val="222B38"/>
+                          </a:solidFill>
+                          <a:latin typeface="Calibri"/>
+                        </a:rPr>
+                        <a:t>Banyaknya rupiah untuk membeli 1 dolar AS</a:t>
+                      </a:r>
+                    </a:p>
+                  </a:txBody>
+                  <a:tcPr anchor="ctr" marL="73152" marR="73152">
+                    <a:solidFill>
+                      <a:srgbClr val="F3F5F9"/>
+                    </a:solidFill>
+                  </a:tcPr>
+                </a:tc>
+                <a:tc>
+                  <a:txBody>
+                    <a:bodyPr/>
+                    <a:lstStyle/>
+                    <a:p>
+                      <a:r>
+                        <a:rPr sz="1300" b="0">
+                          <a:solidFill>
+                            <a:srgbClr val="222B38"/>
+                          </a:solidFill>
+                          <a:latin typeface="Calibri"/>
+                        </a:rPr>
+                        <a:t>rupiah per USD; naik = rupiah melemah</a:t>
+                      </a:r>
+                    </a:p>
+                  </a:txBody>
+                  <a:tcPr anchor="ctr" marL="73152" marR="73152">
+                    <a:solidFill>
+                      <a:srgbClr val="F3F5F9"/>
+                    </a:solidFill>
+                  </a:tcPr>
+                </a:tc>
+                <a:tc>
+                  <a:txBody>
+                    <a:bodyPr/>
+                    <a:lstStyle/>
+                    <a:p>
+                      <a:r>
+                        <a:rPr sz="1300" b="0">
+                          <a:solidFill>
+                            <a:srgbClr val="222B38"/>
+                          </a:solidFill>
+                          <a:latin typeface="Calibri"/>
+                        </a:rPr>
+                        <a:t>Rupiah melemah ↔ investor asing menjual</a:t>
+                      </a:r>
+                    </a:p>
+                  </a:txBody>
+                  <a:tcPr anchor="ctr" marL="73152" marR="73152">
+                    <a:solidFill>
+                      <a:srgbClr val="F3F5F9"/>
                     </a:solidFill>
                   </a:tcPr>
                 </a:tc>
@@ -9251,7 +9575,7 @@
         </p:nvSpPr>
         <p:spPr>
           <a:xfrm>
-            <a:off x="411480" y="4800600"/>
+            <a:off x="411480" y="4846320"/>
             <a:ext cx="11384280" cy="1280160"/>
           </a:xfrm>
           <a:prstGeom prst="rect">
@@ -9295,7 +9619,7 @@
         </p:nvSpPr>
         <p:spPr>
           <a:xfrm>
-            <a:off x="411480" y="4800600"/>
+            <a:off x="411480" y="4846320"/>
             <a:ext cx="64008" cy="1280160"/>
           </a:xfrm>
           <a:prstGeom prst="rect">
@@ -9339,7 +9663,7 @@
         </p:nvSpPr>
         <p:spPr>
           <a:xfrm>
-            <a:off x="640080" y="4910328"/>
+            <a:off x="640080" y="4956048"/>
             <a:ext cx="11018519" cy="1097280"/>
           </a:xfrm>
           <a:prstGeom prst="rect">
@@ -9381,7 +9705,7 @@
                 </a:solidFill>
                 <a:latin typeface="Calibri"/>
               </a:rPr>
-              <a:t>BEI ±09.00–16.00 · Bursa AS ±20.30–03.00 (Maret–November) atau ±21.30–04.00 (November–Maret). Sumber data: Yahoo Finance (^JKSE, ^GSPC, ^VIX, CL=F, GC=F).</a:t>
+              <a:t>BEI ±09.00–16.00 · Bursa AS ±20.30–03.00 (Maret–November) atau ±21.30–04.00 (November–Maret) · Kurs harian ditutup ±06.00–07.00. Sumber: Yahoo Finance (^JKSE, ^GSPC, ^VIX, CL=F, GC=F, IDR=X).</a:t>
             </a:r>
           </a:p>
         </p:txBody>
@@ -9961,7 +10285,7 @@
                           </a:solidFill>
                           <a:latin typeface="Calibri"/>
                         </a:rPr>
-                        <a:t>Menemukan 3 jenis masalah data</a:t>
+                        <a:t>Menemukan 4 jenis masalah data</a:t>
                       </a:r>
                     </a:p>
                   </a:txBody>
@@ -10029,7 +10353,7 @@
                           </a:solidFill>
                           <a:latin typeface="Calibri"/>
                         </a:rPr>
-                        <a:t>Memilih 5 variabel dan target</a:t>
+                        <a:t>Memilih 6 variabel dan target</a:t>
                       </a:r>
                     </a:p>
                   </a:txBody>
@@ -10097,7 +10421,7 @@
                           </a:solidFill>
                           <a:latin typeface="Calibri"/>
                         </a:rPr>
-                        <a:t>3 langkah perbaikan</a:t>
+                        <a:t>4 langkah perbaikan</a:t>
                       </a:r>
                     </a:p>
                   </a:txBody>
@@ -10165,7 +10489,7 @@
                           </a:solidFill>
                           <a:latin typeface="Calibri"/>
                         </a:rPr>
-                        <a:t>5 fitur, data latih 80% &amp; uji 20%</a:t>
+                        <a:t>6 fitur, data latih 80% &amp; uji 20%</a:t>
                       </a:r>
                     </a:p>
                   </a:txBody>
@@ -10233,7 +10557,7 @@
                           </a:solidFill>
                           <a:latin typeface="Calibri"/>
                         </a:rPr>
-                        <a:t>2 baseline + 3 model</a:t>
+                        <a:t>2 baseline + 3 model, 2 iterasi fitur</a:t>
                       </a:r>
                     </a:p>
                   </a:txBody>
@@ -10369,7 +10693,7 @@
                           </a:solidFill>
                           <a:latin typeface="Calibri"/>
                         </a:rPr>
-                        <a:t>Uji dengan data baru</a:t>
+                        <a:t>Uji kedua iterasi dengan data uji</a:t>
                       </a:r>
                     </a:p>
                   </a:txBody>
@@ -11709,8 +12033,8 @@
         </p:blipFill>
         <p:spPr>
           <a:xfrm>
-            <a:off x="411480" y="1202611"/>
-            <a:ext cx="6766560" cy="3812696"/>
+            <a:off x="411480" y="1229716"/>
+            <a:ext cx="6766560" cy="3758487"/>
           </a:xfrm>
           <a:prstGeom prst="rect">
             <a:avLst/>
@@ -11804,6 +12128,40 @@
                 <a:latin typeface="Calibri"/>
               </a:rPr>
               <a:t>berhubungan terbalik (−0,24): saat pasar takut, IHSG cenderung turun.</a:t>
+            </a:r>
+          </a:p>
+          <a:p>
+            <a:pPr algn="l">
+              <a:spcAft>
+                <a:spcPts val="800"/>
+              </a:spcAft>
+            </a:pPr>
+            <a:r>
+              <a:rPr sz="1000" b="0">
+                <a:solidFill>
+                  <a:srgbClr val="E08214"/>
+                </a:solidFill>
+                <a:latin typeface="Calibri"/>
+              </a:rPr>
+              <a:t>■  </a:t>
+            </a:r>
+            <a:r>
+              <a:rPr sz="1600" b="1">
+                <a:solidFill>
+                  <a:srgbClr val="222B38"/>
+                </a:solidFill>
+                <a:latin typeface="Calibri"/>
+              </a:rPr>
+              <a:t>Kurs USD/IDR </a:t>
+            </a:r>
+            <a:r>
+              <a:rPr sz="1600" b="0">
+                <a:solidFill>
+                  <a:srgbClr val="222B38"/>
+                </a:solidFill>
+                <a:latin typeface="Calibri"/>
+              </a:rPr>
+              <a:t>hampir tidak berhubungan (−0,02).</a:t>
             </a:r>
           </a:p>
           <a:p>
@@ -12155,25 +12513,49 @@
         </p:blipFill>
         <p:spPr>
           <a:xfrm>
-            <a:off x="2579820" y="1188720"/>
-            <a:ext cx="7047598" cy="2651760"/>
+            <a:off x="411480" y="1328068"/>
+            <a:ext cx="5577840" cy="2098742"/>
           </a:xfrm>
           <a:prstGeom prst="rect">
             <a:avLst/>
           </a:prstGeom>
         </p:spPr>
       </p:pic>
+      <p:pic>
+        <p:nvPicPr>
+          <p:cNvPr id="10" name="Picture 9" descr="04_kurs_janggal.png"/>
+          <p:cNvPicPr>
+            <a:picLocks noChangeAspect="1"/>
+          </p:cNvPicPr>
+          <p:nvPr/>
+        </p:nvPicPr>
+        <p:blipFill>
+          <a:blip r:embed="rId3"/>
+          <a:stretch>
+            <a:fillRect/>
+          </a:stretch>
+        </p:blipFill>
+        <p:spPr>
+          <a:xfrm>
+            <a:off x="6217920" y="1343408"/>
+            <a:ext cx="5577840" cy="2068062"/>
+          </a:xfrm>
+          <a:prstGeom prst="rect">
+            <a:avLst/>
+          </a:prstGeom>
+        </p:spPr>
+      </p:pic>
       <p:graphicFrame>
         <p:nvGraphicFramePr>
-          <p:cNvPr id="10" name="Table 9"/>
+          <p:cNvPr id="11" name="Table 10"/>
           <p:cNvGraphicFramePr>
             <a:graphicFrameLocks noGrp="1"/>
           </p:cNvGraphicFramePr>
           <p:nvPr/>
         </p:nvGraphicFramePr>
         <p:xfrm>
-          <a:off x="411480" y="3977639"/>
-          <a:ext cx="11384280" cy="1920240"/>
+          <a:off x="411480" y="3749039"/>
+          <a:ext cx="11384280" cy="2304288"/>
         </p:xfrm>
         <a:graphic>
           <a:graphicData uri="http://schemas.openxmlformats.org/drawingml/2006/table">
@@ -12471,13 +12853,81 @@
                           </a:solidFill>
                           <a:latin typeface="Calibri"/>
                         </a:rPr>
+                        <a:t>Kurs USD/IDR janggal (mis. 888 pada 1 Nov 2010)</a:t>
+                      </a:r>
+                    </a:p>
+                  </a:txBody>
+                  <a:tcPr anchor="ctr" marL="73152" marR="73152">
+                    <a:solidFill>
+                      <a:srgbClr val="F3F5F9"/>
+                    </a:solidFill>
+                  </a:tcPr>
+                </a:tc>
+                <a:tc>
+                  <a:txBody>
+                    <a:bodyPr/>
+                    <a:lstStyle/>
+                    <a:p>
+                      <a:r>
+                        <a:rPr sz="1300" b="0">
+                          <a:solidFill>
+                            <a:srgbClr val="222B38"/>
+                          </a:solidFill>
+                          <a:latin typeface="Calibri"/>
+                        </a:rPr>
+                        <a:t>15 nilai</a:t>
+                      </a:r>
+                    </a:p>
+                  </a:txBody>
+                  <a:tcPr anchor="ctr" marL="73152" marR="73152">
+                    <a:solidFill>
+                      <a:srgbClr val="F3F5F9"/>
+                    </a:solidFill>
+                  </a:tcPr>
+                </a:tc>
+                <a:tc>
+                  <a:txBody>
+                    <a:bodyPr/>
+                    <a:lstStyle/>
+                    <a:p>
+                      <a:r>
+                        <a:rPr sz="1300" b="0">
+                          <a:solidFill>
+                            <a:srgbClr val="222B38"/>
+                          </a:solidFill>
+                          <a:latin typeface="Calibri"/>
+                        </a:rPr>
+                        <a:t>Diganti nilai hari sebelumnya</a:t>
+                      </a:r>
+                    </a:p>
+                  </a:txBody>
+                  <a:tcPr anchor="ctr" marL="73152" marR="73152">
+                    <a:solidFill>
+                      <a:srgbClr val="F3F5F9"/>
+                    </a:solidFill>
+                  </a:tcPr>
+                </a:tc>
+              </a:tr>
+              <a:tr h="384048">
+                <a:tc>
+                  <a:txBody>
+                    <a:bodyPr/>
+                    <a:lstStyle/>
+                    <a:p>
+                      <a:r>
+                        <a:rPr sz="1300" b="0">
+                          <a:solidFill>
+                            <a:srgbClr val="222B38"/>
+                          </a:solidFill>
+                          <a:latin typeface="Calibri"/>
+                        </a:rPr>
                         <a:t>Hari libur BEI (IHSG disalin)</a:t>
                       </a:r>
                     </a:p>
                   </a:txBody>
                   <a:tcPr anchor="ctr" marL="73152" marR="73152">
                     <a:solidFill>
-                      <a:srgbClr val="F3F5F9"/>
+                      <a:srgbClr val="FFFFFF"/>
                     </a:solidFill>
                   </a:tcPr>
                 </a:tc>
@@ -12499,7 +12949,7 @@
                   </a:txBody>
                   <a:tcPr anchor="ctr" marL="73152" marR="73152">
                     <a:solidFill>
-                      <a:srgbClr val="F3F5F9"/>
+                      <a:srgbClr val="FFFFFF"/>
                     </a:solidFill>
                   </a:tcPr>
                 </a:tc>
@@ -12521,7 +12971,7 @@
                   </a:txBody>
                   <a:tcPr anchor="ctr" marL="73152" marR="73152">
                     <a:solidFill>
-                      <a:srgbClr val="F3F5F9"/>
+                      <a:srgbClr val="FFFFFF"/>
                     </a:solidFill>
                   </a:tcPr>
                 </a:tc>
@@ -12846,7 +13296,7 @@
         </p:nvGraphicFramePr>
         <p:xfrm>
           <a:off x="411480" y="1234440"/>
-          <a:ext cx="5577840" cy="1828800"/>
+          <a:ext cx="5577840" cy="2286000"/>
         </p:xfrm>
         <a:graphic>
           <a:graphicData uri="http://schemas.openxmlformats.org/drawingml/2006/table">
@@ -12855,8 +13305,8 @@
                 <a:tableStyleId>{5C22544A-7EE6-4342-B048-85BDC9FD1C3A}</a:tableStyleId>
               </a:tblPr>
               <a:tblGrid>
-                <a:gridCol w="2651760"/>
-                <a:gridCol w="2926080"/>
+                <a:gridCol w="2194560"/>
+                <a:gridCol w="3383280"/>
               </a:tblGrid>
               <a:tr h="457200">
                 <a:tc>
@@ -13009,13 +13459,59 @@
                           </a:solidFill>
                           <a:latin typeface="Calibri"/>
                         </a:rPr>
+                        <a:t>USDIDR</a:t>
+                      </a:r>
+                    </a:p>
+                  </a:txBody>
+                  <a:tcPr anchor="ctr" marL="73152" marR="73152">
+                    <a:solidFill>
+                      <a:srgbClr val="FFFFFF"/>
+                    </a:solidFill>
+                  </a:tcPr>
+                </a:tc>
+                <a:tc>
+                  <a:txBody>
+                    <a:bodyPr/>
+                    <a:lstStyle/>
+                    <a:p>
+                      <a:r>
+                        <a:rPr sz="1400" b="0">
+                          <a:solidFill>
+                            <a:srgbClr val="E08214"/>
+                          </a:solidFill>
+                          <a:latin typeface="Calibri"/>
+                        </a:rPr>
+                        <a:t>Ya, iterasi 1 (dikeluarkan di iterasi 2)</a:t>
+                      </a:r>
+                    </a:p>
+                  </a:txBody>
+                  <a:tcPr anchor="ctr" marL="73152" marR="73152">
+                    <a:solidFill>
+                      <a:srgbClr val="FFFFFF"/>
+                    </a:solidFill>
+                  </a:tcPr>
+                </a:tc>
+              </a:tr>
+              <a:tr h="457200">
+                <a:tc>
+                  <a:txBody>
+                    <a:bodyPr/>
+                    <a:lstStyle/>
+                    <a:p>
+                      <a:r>
+                        <a:rPr sz="1400" b="0">
+                          <a:solidFill>
+                            <a:srgbClr val="222B38"/>
+                          </a:solidFill>
+                          <a:latin typeface="Calibri"/>
+                        </a:rPr>
                         <a:t>CPI, BI_rate, US_rate</a:t>
                       </a:r>
                     </a:p>
                   </a:txBody>
                   <a:tcPr anchor="ctr" marL="73152" marR="73152">
                     <a:solidFill>
-                      <a:srgbClr val="FFFFFF"/>
+                      <a:srgbClr val="F3F5F9"/>
                     </a:solidFill>
                   </a:tcPr>
                 </a:tc>
@@ -13037,7 +13533,7 @@
                   </a:txBody>
                   <a:tcPr anchor="ctr" marL="73152" marR="73152">
                     <a:solidFill>
-                      <a:srgbClr val="FFFFFF"/>
+                      <a:srgbClr val="F3F5F9"/>
                     </a:solidFill>
                   </a:tcPr>
                 </a:tc>
@@ -13054,7 +13550,7 @@
         </p:nvSpPr>
         <p:spPr>
           <a:xfrm>
-            <a:off x="411480" y="3749039"/>
+            <a:off x="411480" y="3886200"/>
             <a:ext cx="5577840" cy="1463040"/>
           </a:xfrm>
           <a:prstGeom prst="rect">
@@ -13129,7 +13625,7 @@
         </p:nvGraphicFramePr>
         <p:xfrm>
           <a:off x="6263640" y="1234440"/>
-          <a:ext cx="5532120" cy="1828800"/>
+          <a:ext cx="5532120" cy="2286000"/>
         </p:xfrm>
         <a:graphic>
           <a:graphicData uri="http://schemas.openxmlformats.org/drawingml/2006/table">
@@ -13246,7 +13742,7 @@
                           </a:solidFill>
                           <a:latin typeface="Calibri"/>
                         </a:rPr>
-                        <a:t>2. Perbaiki minyak negatif</a:t>
+                        <a:t>2. Perbaiki kurs janggal</a:t>
                       </a:r>
                     </a:p>
                   </a:txBody>
@@ -13268,7 +13764,7 @@
                           </a:solidFill>
                           <a:latin typeface="Calibri"/>
                         </a:rPr>
-                        <a:t>1 nilai</a:t>
+                        <a:t>15 nilai</a:t>
                       </a:r>
                     </a:p>
                   </a:txBody>
@@ -13292,7 +13788,7 @@
                           </a:solidFill>
                           <a:latin typeface="Calibri"/>
                         </a:rPr>
-                        <a:t>3. Hapus hari libur BEI</a:t>
+                        <a:t>3. Perbaiki minyak negatif</a:t>
                       </a:r>
                     </a:p>
                   </a:txBody>
@@ -13314,13 +13810,59 @@
                           </a:solidFill>
                           <a:latin typeface="Calibri"/>
                         </a:rPr>
+                        <a:t>1 nilai</a:t>
+                      </a:r>
+                    </a:p>
+                  </a:txBody>
+                  <a:tcPr anchor="ctr" marL="73152" marR="73152">
+                    <a:solidFill>
+                      <a:srgbClr val="FFFFFF"/>
+                    </a:solidFill>
+                  </a:tcPr>
+                </a:tc>
+              </a:tr>
+              <a:tr h="457200">
+                <a:tc>
+                  <a:txBody>
+                    <a:bodyPr/>
+                    <a:lstStyle/>
+                    <a:p>
+                      <a:r>
+                        <a:rPr sz="1400" b="0">
+                          <a:solidFill>
+                            <a:srgbClr val="222B38"/>
+                          </a:solidFill>
+                          <a:latin typeface="Calibri"/>
+                        </a:rPr>
+                        <a:t>4. Hapus hari libur BEI</a:t>
+                      </a:r>
+                    </a:p>
+                  </a:txBody>
+                  <a:tcPr anchor="ctr" marL="73152" marR="73152">
+                    <a:solidFill>
+                      <a:srgbClr val="F3F5F9"/>
+                    </a:solidFill>
+                  </a:tcPr>
+                </a:tc>
+                <a:tc>
+                  <a:txBody>
+                    <a:bodyPr/>
+                    <a:lstStyle/>
+                    <a:p>
+                      <a:r>
+                        <a:rPr sz="1400" b="0">
+                          <a:solidFill>
+                            <a:srgbClr val="222B38"/>
+                          </a:solidFill>
+                          <a:latin typeface="Calibri"/>
+                        </a:rPr>
                         <a:t>4.364 → 4.060</a:t>
                       </a:r>
                     </a:p>
                   </a:txBody>
                   <a:tcPr anchor="ctr" marL="73152" marR="73152">
                     <a:solidFill>
-                      <a:srgbClr val="FFFFFF"/>
+                      <a:srgbClr val="F3F5F9"/>
                     </a:solidFill>
                   </a:tcPr>
                 </a:tc>
@@ -13337,7 +13879,7 @@
         </p:nvSpPr>
         <p:spPr>
           <a:xfrm>
-            <a:off x="6263640" y="3291840"/>
+            <a:off x="6263640" y="3749039"/>
             <a:ext cx="5532120" cy="1097280"/>
           </a:xfrm>
           <a:prstGeom prst="rect">
@@ -13381,7 +13923,7 @@
         </p:nvSpPr>
         <p:spPr>
           <a:xfrm>
-            <a:off x="6263640" y="3291840"/>
+            <a:off x="6263640" y="3749039"/>
             <a:ext cx="64008" cy="1097280"/>
           </a:xfrm>
           <a:prstGeom prst="rect">
@@ -13425,7 +13967,7 @@
         </p:nvSpPr>
         <p:spPr>
           <a:xfrm>
-            <a:off x="6492240" y="3401568"/>
+            <a:off x="6492240" y="3858768"/>
             <a:ext cx="5166359" cy="914400"/>
           </a:xfrm>
           <a:prstGeom prst="rect">
